--- a/docs/onboarding-adf.pptx
+++ b/docs/onboarding-adf.pptx
@@ -28,9 +28,10 @@
     <p:sldId id="276" r:id="rId22"/>
     <p:sldId id="277" r:id="rId23"/>
     <p:sldId id="278" r:id="rId24"/>
+    <p:sldId id="279" r:id="rId25"/>
   </p:sldIdLst>
   <p:notesMasterIdLst>
-    <p:notesMasterId r:id="rId25"/>
+    <p:notesMasterId r:id="rId26"/>
   </p:notesMasterIdLst>
   <p:sldSz cx="12192000" cy="6858000"/>
   <p:notesSz cx="6858000" cy="12192000"/>
@@ -129,7 +130,7 @@
   <p:extLst>
     <p:ext uri="{521415D9-36F7-43E2-AB2F-B90AF26B5E84}">
       <p14:sectionLst xmlns:p14="http://schemas.microsoft.com/office/powerpoint/2010/main">
-        <p14:section name="Introducción" id="{93592682-286c-15b0-0ef1-be38e4f0dfc4}">
+        <p14:section name="Introducción" id="{1c4ef33e-4df3-adee-866c-2d1a226acc2b}">
           <p14:sldIdLst>
             <p14:sldId id="256"/>
             <p14:sldId id="257"/>
@@ -138,7 +139,7 @@
             <p14:sldId id="260"/>
           </p14:sldIdLst>
         </p14:section>
-        <p14:section name="1 · Yeoman" id="{84015c87-3ab8-934c-07b4-27d91b77ff3f}">
+        <p14:section name="1 · Yeoman" id="{388329bb-430d-ed65-ed30-7d3770f8e69d}">
           <p14:sldIdLst>
             <p14:sldId id="261"/>
             <p14:sldId id="262"/>
@@ -146,7 +147,7 @@
             <p14:sldId id="264"/>
           </p14:sldIdLst>
         </p14:section>
-        <p14:section name="2 · Generador Nx" id="{341c7ed0-cd12-6b62-02f9-ab44230a0635}">
+        <p14:section name="2 · Generador Nx" id="{5730a39e-f8be-a4c5-2860-7ad355eb5f4d}">
           <p14:sldIdLst>
             <p14:sldId id="265"/>
             <p14:sldId id="266"/>
@@ -154,7 +155,7 @@
             <p14:sldId id="268"/>
           </p14:sldIdLst>
         </p14:section>
-        <p14:section name="3 · ACA" id="{c02ae48b-6c5e-6277-79fa-80c410731c79}">
+        <p14:section name="3 · ACA" id="{1b236781-3daa-a062-69bb-24c05893ef9d}">
           <p14:sldIdLst>
             <p14:sldId id="269"/>
             <p14:sldId id="270"/>
@@ -162,18 +163,19 @@
             <p14:sldId id="272"/>
           </p14:sldIdLst>
         </p14:section>
-        <p14:section name="4 · ADF a mano" id="{4e7fd75f-4dea-0fae-4174-a0dc77301509}">
+        <p14:section name="4 · ADF a mano" id="{474adf14-6ce1-7c44-520e-e452cd3568b6}">
           <p14:sldIdLst>
             <p14:sldId id="273"/>
             <p14:sldId id="274"/>
             <p14:sldId id="275"/>
             <p14:sldId id="276"/>
+            <p14:sldId id="277"/>
           </p14:sldIdLst>
         </p14:section>
-        <p14:section name="Cierre" id="{65fd8339-2e9c-5946-d27c-31a30c4e48ad}">
+        <p14:section name="Cierre" id="{9f0a1f35-db35-5948-f912-f431c714533f}">
           <p14:sldIdLst>
-            <p14:sldId id="277"/>
             <p14:sldId id="278"/>
+            <p14:sldId id="279"/>
           </p14:sldIdLst>
         </p14:section>
       </p14:sectionLst>
@@ -668,7 +670,7 @@
           <a:p>
             <a:r>
               <a:rPr lang="en-US" dirty="0"/>
-              <a:t>Los generadores Nx reemplazan a Yeoman. Todas sus versiones (1.0.0 a 1.0.4) generan Angular 19.2.6 con ADF 8.0.0 y js-api 9. No tienen opción para elegir otra versión de Angular.</a:t>
+              <a:t>El generador Nx reemplaza a Yeoman. Todas sus versiones (1.0.0 a 1.0.4) generan Angular 19.2.6 con ADF 8.0.0 y js-api 9. No tiene opción para elegir otra versión de Angular.</a:t>
             </a:r>
             <a:endParaRPr lang="en-US" dirty="0"/>
           </a:p>
@@ -756,7 +758,7 @@
           <a:p>
             <a:r>
               <a:rPr lang="en-US" dirty="0"/>
-              <a:t>Sin flags, create-nx-workspace pregunta: Workspace empty, Stack none, Prettier No, CI skip, Remote caching skip. También existe empty-app para una app sin componentes. Comprobado con Node 24.19.0 y npm 11.17.0.</a:t>
+              <a:t>Comprobado con Node 24.19.0 y npm 11.17.0. Sin flags, create-nx-workspace pregunta: Workspace empty, Stack none, Prettier No, CI skip, Remote caching skip. Para una app sin componentes: npx nx g @alfresco/adf-generators:empty-app.</a:t>
             </a:r>
             <a:endParaRPr lang="en-US" dirty="0"/>
           </a:p>
@@ -844,7 +846,7 @@
           <a:p>
             <a:r>
               <a:rPr lang="en-US" dirty="0"/>
-              <a:t>El template sale con las URLs vacías en proxy.conf.js: hay que completar ecmHost. Con el template automate también hay que completar variables OAuth en app.config.json. Comprobado: npm install y nx build template terminaron bien.</a:t>
+              <a:t>El template sale con ecmHost y bpmHost vacíos en proxy.conf.js: hay que completar ecmHost. Con el template automate también se completan las variables OAuth en src/app.config.json. Comprobado: npm install y npm run build terminaron bien.</a:t>
             </a:r>
             <a:endParaRPr lang="en-US" dirty="0"/>
           </a:p>
@@ -932,7 +934,7 @@
           <a:p>
             <a:r>
               <a:rPr lang="en-US" dirty="0"/>
-              <a:t>Al publicar el blog en Hyland Connect, la mención @alfresco se perdió (el foro la interpreta como usuario). El paso de instalar build-angular sin versión trae Angular 22 y rompe un template de Angular 19.</a:t>
+              <a:t>En el blog de Hyland Connect y en docs.hyland.com el comando aparece como 'nx generate /adf-generators:...': se perdió @alfresco al publicar. También indican 'npm i -D @angular-devkit/build-angular' antes de instalar: no hace falta y, sin versión, instala la última de Angular y rompe el template. Aquí están los comandos que sí funcionan, todos probados.</a:t>
             </a:r>
             <a:endParaRPr lang="en-US" dirty="0"/>
           </a:p>
@@ -1108,7 +1110,7 @@
           <a:p>
             <a:r>
               <a:rPr lang="en-US" dirty="0"/>
-              <a:t>Comprobado: ACA 8.0.0 instaló en 40 segundos, compiló en 40 segundos y abrió el login con Angular 20.3.25. Master usa pnpm: el preinstall ejecuta only-allow pnpm. pnpm lint usa sintaxis POSIX, hay que correrlo en Git Bash.</a:t>
+              <a:t>Comprobado: ACA 8.0.0 instaló en 40 segundos, compiló en 40 segundos y abrió el login con Angular 20.3.25. Master usa pnpm: con npm el preinstall lo bloquea, por eso se activa pnpm con corepack.</a:t>
             </a:r>
             <a:endParaRPr lang="en-US" dirty="0"/>
           </a:p>
@@ -1196,7 +1198,7 @@
           <a:p>
             <a:r>
               <a:rPr lang="en-US" dirty="0"/>
-              <a:t>La guía 'Deploy Alfresco Content App' de docs.hyland.com para ADW 8.0 indica Node 18, npm y variables APP_CONFIG_*. Probamos cuatro versiones de ACA y todas usan solo BASE_URL, que lee app/proxy.conf.js.</a:t>
+              <a:t>La guía 'Deploy Alfresco Content App' de docs.hyland.com indica Node 18, npm y variables APP_CONFIG_*. Probamos cuatro versiones de ACA y todas usan solo BASE_URL. El error de discovery document se comprobó: al quitar el bloque oauth2 de app/src/app.config.json desaparece y el login sigue funcionando. Comando para borrarlo desde la raíz de ACA (probado en PowerShell): node -e "const f='app/src/app.config.json',fs=require('fs'),c=JSON.parse(fs.readFileSync(f));delete c.oauth2;fs.writeFileSync(f,JSON.stringify(c,null,2))" . Si después se quiere usar OAuth (Keycloak), hay que volver a poner ese bloque con los datos del servidor.</a:t>
             </a:r>
             <a:endParaRPr lang="en-US" dirty="0"/>
           </a:p>
@@ -1284,7 +1286,7 @@
           <a:p>
             <a:r>
               <a:rPr lang="en-US" dirty="0"/>
-              <a:t>La documentación de ACA (carpeta docs/ del repo y alfresco-content-app.netlify.app) tiene tutoriales: primera extensión, visor personalizado, listas de archivos, formulario de búsqueda. ADW, la versión Enterprise, se extiende igual con @alfresco/adw-generators.</a:t>
+              <a:t>Comprobado en ACA 8.0.0: nx add instaló el plugin, el generador creó projects/ext y actualizó app/src/app/extensions.module.ts, app/project.json y tsconfig.json; luego npm install y npx nx build content-ce terminaron bien. El ítem de menú se ve después de iniciar sesión, con ACS levantado. La documentación de ACA (carpeta docs/ y alfresco-content-app.netlify.app) tiene tutoriales de extensiones.</a:t>
             </a:r>
             <a:endParaRPr lang="en-US" dirty="0"/>
           </a:p>
@@ -1372,7 +1374,7 @@
           <a:p>
             <a:r>
               <a:rPr lang="en-US" dirty="0"/>
-              <a:t>Para Angular 22 no hay generador ni ACA. Usamos ADF 9.0.0, compilado con Angular 20, y funciona sin errores. Probado con Angular 22.2. La guía del repositorio tiene la misma receta para Angular 14, 16, 18 y 20.</a:t>
+              <a:t>Para Angular 22 no hay generador ni ACA. Usamos ADF 9.0.0 y funciona sin errores: se probó con Angular 22.2. La guía del repositorio tiene la misma receta para Angular 14, 16, 18 y 20, y el script scripts/probar-angular-adf.sh 22 hace todos estos pasos de una vez.</a:t>
             </a:r>
             <a:endParaRPr lang="en-US" dirty="0"/>
           </a:p>
@@ -1460,7 +1462,7 @@
           <a:p>
             <a:r>
               <a:rPr lang="en-US" dirty="0"/>
-              <a:t>La lista completa de paquetes está en docs/06-adf-manual.md: también @mat-datetimepicker/core, @angular/material-date-fns-adapter@22, date-fns@2, angular-oauth2-oidc@19, minimatch, pdfjs-dist y cropperjs. Para componentes de documentos se suma @alfresco/adf-content-services@9.0.0.</a:t>
+              <a:t>Comandos completos, tal como se probaron con Angular 22.2 y Node 24.19. Para usar documentos, visor y búsqueda se agrega: npm install @alfresco/adf-content-services@9.0.0.</a:t>
             </a:r>
             <a:endParaRPr lang="en-US" dirty="0"/>
           </a:p>
@@ -1548,7 +1550,7 @@
           <a:p>
             <a:r>
               <a:rPr lang="en-US" dirty="0"/>
-              <a:t>Hay cuatro formas de arrancar. Mostramos el ejemplo más actual de cada una. Yeoman quedó congelado en Angular 14. Los generadores Nx son la forma oficial actual pero siempre generan Angular 19. ACA 8.0.0 es la última estable (Angular 20) y master ya está en Angular 21. Para la última versión de Angular (22) solo existe el camino manual.</a:t>
+              <a:t>Hay cuatro formas de arrancar. Mostramos el ejemplo más actual de cada una. Yeoman quedó en Angular 14. El generador Nx es la forma oficial actual pero siempre genera Angular 19. ACA 8.0.0 es la última estable (Angular 20) y master ya está en Angular 21. Para la última versión de Angular (22) solo existe el camino manual.</a:t>
             </a:r>
             <a:endParaRPr lang="en-US" dirty="0"/>
           </a:p>
@@ -1636,7 +1638,7 @@
           <a:p>
             <a:r>
               <a:rPr lang="en-US" dirty="0"/>
-              <a:t>En ADF 9 los componentes son standalone: se importa cada uno (LoginComponent, DocumentListComponent...). En ADF 6 y 7, en cambio, se usa CoreModule.forRoot() más AuthModule.forRoot({ useHash: true }). Comprobado: con esta configuración el login se abre en Chrome sin errores en consola.</a:t>
+              <a:t>En ADF 9 se configura con provide*() y los componentes son standalone: se importa cada uno (LoginComponent, DocumentListComponent...). provideZoneChangeDetection() es necesario porque Angular 22 crea el proyecto sin zone.js. Probado: el login se abre en Chrome sin errores.</a:t>
             </a:r>
             <a:endParaRPr lang="en-US" dirty="0"/>
           </a:p>
@@ -1724,7 +1726,7 @@
           <a:p>
             <a:r>
               <a:rPr lang="en-US" dirty="0"/>
-              <a:t>Todos aparecieron en las pruebas. El primero es el más engañoso: si app.config.json queda en src/assets, el servidor devuelve index.html, ADF dice 'validation errors' y la app queda en blanco sin ningún otro error en ADF 6/7.</a:t>
+              <a:t>Solo se agregan o cambian esas claves; el resto de angular.json queda como lo generó ng new. Después: npm start y abrir http://localhost:4200. El budget se sube porque ADF supera el límite de 1 MB que trae ng new y sin el cambio ng build falla.</a:t>
             </a:r>
             <a:endParaRPr lang="en-US" dirty="0"/>
           </a:p>
@@ -1812,7 +1814,7 @@
           <a:p>
             <a:r>
               <a:rPr lang="en-US" dirty="0"/>
-              <a:t>Resumen para decidir. Aula moderna: generadores Nx o ACA 8.0.0 con Node 24. Proyecto existente: ADF a mano según su Angular. Proyecto heredado en Angular 14: Yeoman o ACA 4.4.1.</a:t>
+              <a:t>Todos aparecieron en las pruebas. El primero es el más engañoso: si app.config.json queda en src/assets, el servidor devuelve index.html y ADF muestra 'validation errors'. En Angular 14 a 17 el archivo va en src/app.config.json y hay que agregar "src/app.config.json" a assets en angular.json. Si ng add no agrega Material Icons, poner en src/index.html: &lt;link href="https://fonts.googleapis.com/icon?family=Material+Icons" rel="stylesheet"&gt;</a:t>
             </a:r>
             <a:endParaRPr lang="en-US" dirty="0"/>
           </a:p>
@@ -1900,7 +1902,7 @@
           <a:p>
             <a:r>
               <a:rPr lang="en-US" dirty="0"/>
-              <a:t>Próximos pasos sugeridos: levantar ACS con Docker y hacer el tutorial completo con datos reales; crear una extensión de ACA; practicar agregar ADF a un proyecto Angular propio. Preguntas.</a:t>
+              <a:t>Resumen para decidir. Aula moderna: generador Nx o ACA 8.0.0 con Node 24. Proyecto existente: ADF a mano según su Angular. Proyecto heredado en Angular 14: Yeoman o ACA 4.4.1.</a:t>
             </a:r>
             <a:endParaRPr lang="en-US" dirty="0"/>
           </a:p>
@@ -1924,6 +1926,94 @@
             <a:fld id="{F7021451-1387-4CA6-816F-3879F97B5CBC}" type="slidenum">
               <a:rPr lang="en-US"/>
               <a:t>23</a:t>
+            </a:fld>
+            <a:endParaRPr lang="en-US"/>
+          </a:p>
+        </p:txBody>
+      </p:sp>
+    </p:spTree>
+    <p:extLst>
+      <p:ext uri="{BB962C8B-B14F-4D97-AF65-F5344CB8AC3E}">
+        <p14:creationId xmlns:p14="http://schemas.microsoft.com/office/powerpoint/2010/main" val="1024086991"/>
+      </p:ext>
+    </p:extLst>
+  </p:cSld>
+  <p:clrMapOvr>
+    <a:masterClrMapping/>
+  </p:clrMapOvr>
+</p:notes>
+</file>
+
+<file path=ppt/notesSlides/notesSlide24.xml><?xml version="1.0" encoding="utf-8"?>
+<p:notes xmlns:a="http://schemas.openxmlformats.org/drawingml/2006/main" xmlns:r="http://schemas.openxmlformats.org/officeDocument/2006/relationships" xmlns:p="http://schemas.openxmlformats.org/presentationml/2006/main">
+  <p:cSld>
+    <p:spTree>
+      <p:nvGrpSpPr>
+        <p:cNvPr id="1" name=""/>
+        <p:cNvGrpSpPr/>
+        <p:nvPr/>
+      </p:nvGrpSpPr>
+      <p:grpSpPr>
+        <a:xfrm>
+          <a:off x="0" y="0"/>
+          <a:ext cx="0" cy="0"/>
+          <a:chOff x="0" y="0"/>
+          <a:chExt cx="0" cy="0"/>
+        </a:xfrm>
+      </p:grpSpPr>
+      <p:sp>
+        <p:nvSpPr>
+          <p:cNvPr id="2" name="Slide Image Placeholder 1"/>
+          <p:cNvSpPr>
+            <a:spLocks noGrp="1" noRot="1" noChangeAspect="1"/>
+          </p:cNvSpPr>
+          <p:nvPr>
+            <p:ph type="sldImg"/>
+          </p:nvPr>
+        </p:nvSpPr>
+        <p:spPr/>
+      </p:sp>
+      <p:sp>
+        <p:nvSpPr>
+          <p:cNvPr id="3" name="Notes Placeholder 2"/>
+          <p:cNvSpPr>
+            <a:spLocks noGrp="1"/>
+          </p:cNvSpPr>
+          <p:nvPr>
+            <p:ph type="body" idx="1"/>
+          </p:nvPr>
+        </p:nvSpPr>
+        <p:spPr/>
+        <p:txBody>
+          <a:bodyPr/>
+          <a:lstStyle/>
+          <a:p>
+            <a:r>
+              <a:rPr lang="en-US" dirty="0"/>
+              <a:t>Próximos pasos sugeridos: levantar ACS con Docker y hacer el tutorial completo con datos reales; crear una extensión de ACA; practicar agregar ADF a un proyecto Angular propio. Preguntas.</a:t>
+            </a:r>
+            <a:endParaRPr lang="en-US" dirty="0"/>
+          </a:p>
+        </p:txBody>
+      </p:sp>
+      <p:sp>
+        <p:nvSpPr>
+          <p:cNvPr id="4" name="Slide Number Placeholder 3"/>
+          <p:cNvSpPr>
+            <a:spLocks noGrp="1"/>
+          </p:cNvSpPr>
+          <p:nvPr>
+            <p:ph type="sldNum" sz="quarter" idx="10"/>
+          </p:nvPr>
+        </p:nvSpPr>
+        <p:spPr/>
+        <p:txBody>
+          <a:bodyPr/>
+          <a:lstStyle/>
+          <a:p>
+            <a:fld id="{F7021451-1387-4CA6-816F-3879F97B5CBC}" type="slidenum">
+              <a:rPr lang="en-US"/>
+              <a:t>24</a:t>
             </a:fld>
             <a:endParaRPr lang="en-US"/>
           </a:p>
@@ -2076,7 +2166,7 @@
           <a:p>
             <a:r>
               <a:rPr lang="en-US" dirty="0"/>
-              <a:t>Si se mezclan versiones se rompe la instalación (ERESOLVE), el build o la app en ejecución. Los peerDependencies de ADF dicen &gt;=16 para todo, por eso no sirven. El dato confiable es la versión del compilador de Angular que queda dentro del paquete. Con grep sobre el .mjs se obtiene.</a:t>
+              <a:t>Antes de instalar nada, mirar la versión de Angular del proyecto. Cada fila de esta tabla se probó en el curso: se creó el proyecto, se instaló esa versión de ADF y se abrió el login sin errores. La guía docs/02-matriz-de-versiones.md tiene el detalle.</a:t>
             </a:r>
             <a:endParaRPr lang="en-US" dirty="0"/>
           </a:p>
@@ -2164,7 +2254,7 @@
           <a:p>
             <a:r>
               <a:rPr lang="en-US" dirty="0"/>
-              <a:t>nvm-windows cambia el Node de todo el sistema y los paquetes globales son por versión de Node: si instalan yo con Node 16, no existe con Node 24. Para un aula alcanza con tres versiones. ACS Community 26 en Docker: la primera vez tarda varios minutos; comprobar con el endpoint probes/-ready-.</a:t>
+              <a:t>Node 24 sirve para el generador Nx, ACA 8 y master y ADF a mano con Angular 18, 20 y 22; Node 18 para ACA 4 y 5; Node 16 para Yeoman y ADF a mano con Angular 14 y 16. Los paquetes globales son por versión de Node. Los comandos de Docker no se ejecutaron en las pruebas del curso: todo se probó hasta la pantalla de login, sin backend. ACS tarda varios minutos en arrancar la primera vez; comprobar con curl http://localhost:8080/alfresco/api/-default-/public/alfresco/versions/1/probes/-ready-</a:t>
             </a:r>
             <a:endParaRPr lang="en-US" dirty="0"/>
           </a:p>
@@ -2252,7 +2342,7 @@
           <a:p>
             <a:r>
               <a:rPr lang="en-US" dirty="0"/>
-              <a:t>Yeoman fue el template clásico. Su última versión es la 6.1.1 y genera Angular 14 con ADF 6.1. No existe para Angular 16, 18, 20 ni 22, y ng update no sirve porque ADF 6 no funciona con Angular 15+. Lo vemos para entender proyectos heredados.</a:t>
+              <a:t>Yeoman fue el template clásico. Su última versión es la 6.1.1 y genera Angular 14 con ADF 6.1. No existe para Angular 16, 18, 20 ni 22. Lo vemos para entender proyectos heredados.</a:t>
             </a:r>
             <a:endParaRPr lang="en-US" dirty="0"/>
           </a:p>
@@ -2340,7 +2430,7 @@
           <a:p>
             <a:r>
               <a:rPr lang="en-US" dirty="0"/>
-              <a:t>El punto crítico es deasync, que llega a través de generator-alfresco-common. En Windows hace falta Visual Studio Build Tools 2022 con 'Desarrollo para el escritorio con C++'. La 2026 no la reconoce el node-gyp de Node 16. Con Python 3.12 o superior hay que instalar setuptools. Si algo de esto no se puede instalar, en dos diapositivas vemos la alternativa.</a:t>
+              <a:t>El punto crítico es deasync. En Windows hace falta Visual Studio Build Tools 2022 con 'Desarrollo para el escritorio con C++'. Con Python 3.12 o superior hay que instalar setuptools. Si no se puede instalar Visual Studio, en dos diapositivas vemos la alternativa que no compila nada.</a:t>
             </a:r>
             <a:endParaRPr lang="en-US" dirty="0"/>
           </a:p>
@@ -2428,7 +2518,7 @@
           <a:p>
             <a:r>
               <a:rPr lang="en-US" dirty="0"/>
-              <a:t>Comprobado: yo generó el proyecto, npm install terminó y ng serve compiló. El valor de --blueprint es el name del package.json de la plantilla (adf-cli-acs-template), no la carpeta. El subgenerador de licencia pregunta nombre, email y web incluso en modo no interactivo.</a:t>
+              <a:t>Comprobado: yo generó el proyecto, npm install terminó y ng serve compiló. En modo semi-automático: yo alfresco-adf-app --name=mi-app --blueprint=adf-cli-acs-template --no-install. El subgenerador de licencia igual pregunta nombre, email y web. El archivo LICENSE queda en la carpeta padre: moverlo con Move-Item ..\LICENSE . si se quiere dentro del proyecto.</a:t>
             </a:r>
             <a:endParaRPr lang="en-US" dirty="0"/>
           </a:p>
@@ -2516,7 +2606,7 @@
           <a:p>
             <a:r>
               <a:rPr lang="en-US" dirty="0"/>
-              <a:t>Recomendado para onboarding: nadie tiene que instalar varios GB de herramientas. El resultado es idéntico a ejecutar yo, porque el generador no reemplaza nada en la plantilla.</a:t>
+              <a:t>El atajo da el mismo resultado que yo, porque el generador no reemplaza nada en la plantilla. Comprobado con Node 16.20.2: npm install y ng build terminan bien. Si aparece 'Could not locate the bindings file' es porque deasync no se compiló: corregir Build Tools o setuptools y reinstalar.</a:t>
             </a:r>
             <a:endParaRPr lang="en-US" dirty="0"/>
           </a:p>
@@ -3372,7 +3462,7 @@
                   <a:schemeClr val="bg2"/>
                 </a:solidFill>
               </a:rPr>
-              <a:t>Yeoman · Generadores Nx · ACA · ADF a mano — el ejemplo más actual de cada camino, paso a paso</a:t>
+              <a:t>Yeoman · Generador Nx · ACA · ADF a mano — el ejemplo más actual de cada camino, paso a paso</a:t>
             </a:r>
             <a:endParaRPr lang="en-US" sz="2200" dirty="0"/>
           </a:p>
@@ -4646,7 +4736,7 @@
             <a:r>
               <a:rPr lang="en-US" sz="1400" dirty="0">
                 <a:solidFill>
-                  <a:schemeClr val="bg1"/>
+                  <a:schemeClr val="accent1"/>
                 </a:solidFill>
                 <a:latin typeface="Courier New" pitchFamily="34" charset="0"/>
                 <a:ea typeface="Courier New" pitchFamily="34" charset="-122"/>
@@ -4692,7 +4782,24 @@
                 <a:ea typeface="Courier New" pitchFamily="34" charset="-122"/>
                 <a:cs typeface="Courier New" pitchFamily="34" charset="-120"/>
               </a:rPr>
-              <a:t>const bpmHost = '';   // solo con APS</a:t>
+              <a:t>const bpmHost = '';   </a:t>
+            </a:r>
+            <a:pPr indent="0" marL="0">
+              <a:spcAft>
+                <a:spcPts val="200"/>
+              </a:spcAft>
+              <a:buNone/>
+            </a:pPr>
+            <a:r>
+              <a:rPr lang="en-US" sz="1400" dirty="0">
+                <a:solidFill>
+                  <a:schemeClr val="accent1"/>
+                </a:solidFill>
+                <a:latin typeface="Courier New" pitchFamily="34" charset="0"/>
+                <a:ea typeface="Courier New" pitchFamily="34" charset="-122"/>
+                <a:cs typeface="Courier New" pitchFamily="34" charset="-120"/>
+              </a:rPr>
+              <a:t>// solo con APS</a:t>
             </a:r>
             <a:endParaRPr lang="en-US" sz="1400" dirty="0"/>
           </a:p>
@@ -4793,7 +4900,7 @@
                 <a:ea typeface="Courier New" pitchFamily="34" charset="-122"/>
                 <a:cs typeface="Courier New" pitchFamily="34" charset="-120"/>
               </a:rPr>
-              <a:t># ~2 min, aviso ERESOLVE</a:t>
+              <a:t># ~2 min</a:t>
             </a:r>
             <a:endParaRPr lang="en-US" sz="1400" dirty="0"/>
           </a:p>
@@ -4830,7 +4937,7 @@
                 <a:ea typeface="Courier New" pitchFamily="34" charset="-122"/>
                 <a:cs typeface="Courier New" pitchFamily="34" charset="-120"/>
               </a:rPr>
-              <a:t># nx serve template</a:t>
+              <a:t># http://localhost:4200</a:t>
             </a:r>
             <a:endParaRPr lang="en-US" sz="1400" dirty="0"/>
           </a:p>
@@ -4867,7 +4974,7 @@
                 <a:ea typeface="Courier New" pitchFamily="34" charset="-122"/>
                 <a:cs typeface="Courier New" pitchFamily="34" charset="-120"/>
               </a:rPr>
-              <a:t># nx build template</a:t>
+              <a:t># build de producción</a:t>
             </a:r>
             <a:endParaRPr lang="en-US" sz="1400" dirty="0"/>
           </a:p>
@@ -5123,7 +5230,7 @@
                   <a:schemeClr val="tx2"/>
                 </a:solidFill>
               </a:rPr>
-              <a:t>Tres trampas de la documentación oficial</a:t>
+              <a:t>Generador Nx: comandos correctos</a:t>
             </a:r>
             <a:endParaRPr lang="en-US" sz="3400" dirty="0"/>
           </a:p>
@@ -5131,18 +5238,18 @@
       </p:sp>
       <p:sp>
         <p:nvSpPr>
-          <p:cNvPr id="3" name="trampa-Falta @alfresco"/>
+          <p:cNvPr id="3" name="nxfix-Nombre completo del generador"/>
           <p:cNvSpPr/>
           <p:nvPr/>
         </p:nvSpPr>
         <p:spPr>
           <a:xfrm>
-            <a:off x="548640" y="1417320"/>
-            <a:ext cx="3520440" cy="4663440"/>
+            <a:off x="548640" y="1371600"/>
+            <a:ext cx="11064240" cy="1463040"/>
           </a:xfrm>
           <a:prstGeom prst="roundRect">
             <a:avLst>
-              <a:gd name="adj" fmla="val 2597"/>
+              <a:gd name="adj" fmla="val 6250"/>
             </a:avLst>
           </a:prstGeom>
           <a:solidFill>
@@ -5153,27 +5260,27 @@
       </p:sp>
       <p:sp>
         <p:nvSpPr>
-          <p:cNvPr id="4" name="trampa-Falta @alfresco-circulo"/>
+          <p:cNvPr id="4" name="nxfix-Nombre completo del generador-circulo"/>
           <p:cNvSpPr/>
           <p:nvPr/>
         </p:nvSpPr>
         <p:spPr>
           <a:xfrm>
-            <a:off x="822960" y="1691640"/>
+            <a:off x="777240" y="1737360"/>
             <a:ext cx="731520" cy="731520"/>
           </a:xfrm>
           <a:prstGeom prst="ellipse">
             <a:avLst/>
           </a:prstGeom>
           <a:solidFill>
-            <a:schemeClr val="accent5"/>
+            <a:schemeClr val="accent3"/>
           </a:solidFill>
           <a:ln/>
         </p:spPr>
       </p:sp>
       <p:pic>
         <p:nvPicPr>
-          <p:cNvPr id="5" name="trampa-Falta @alfresco-icono" descr="preencoded.png">    </p:cNvPr>
+          <p:cNvPr id="5" name="nxfix-Nombre completo del generador-icono" descr="preencoded.png">    </p:cNvPr>
           <p:cNvPicPr>
             <a:picLocks noChangeAspect="1"/>
           </p:cNvPicPr>
@@ -5187,7 +5294,7 @@
         </p:blipFill>
         <p:spPr>
           <a:xfrm>
-            <a:off x="1005840" y="1874520"/>
+            <a:off x="960120" y="1920240"/>
             <a:ext cx="365760" cy="365760"/>
           </a:xfrm>
           <a:prstGeom prst="rect">
@@ -5203,8 +5310,8 @@
         </p:nvSpPr>
         <p:spPr>
           <a:xfrm>
-            <a:off x="822960" y="2606040"/>
-            <a:ext cx="2971800" cy="457200"/>
+            <a:off x="1691640" y="1554480"/>
+            <a:ext cx="3566160" cy="457200"/>
           </a:xfrm>
           <a:prstGeom prst="rect">
             <a:avLst/>
@@ -5220,14 +5327,14 @@
               <a:buNone/>
             </a:pPr>
             <a:r>
-              <a:rPr lang="en-US" sz="2000" b="1" dirty="0">
+              <a:rPr lang="en-US" sz="1800" b="1" dirty="0">
                 <a:solidFill>
                   <a:schemeClr val="tx2"/>
                 </a:solidFill>
               </a:rPr>
-              <a:t>Falta @alfresco</a:t>
-            </a:r>
-            <a:endParaRPr lang="en-US" sz="2000" dirty="0"/>
+              <a:t>Nombre completo del generador</a:t>
+            </a:r>
+            <a:endParaRPr lang="en-US" sz="1800" dirty="0"/>
           </a:p>
         </p:txBody>
       </p:sp>
@@ -5239,8 +5346,8 @@
         </p:nvSpPr>
         <p:spPr>
           <a:xfrm>
-            <a:off x="822960" y="3108960"/>
-            <a:ext cx="2971800" cy="640080"/>
+            <a:off x="1691640" y="2011680"/>
+            <a:ext cx="3566160" cy="685800"/>
           </a:xfrm>
           <a:prstGeom prst="rect">
             <a:avLst/>
@@ -5261,7 +5368,7 @@
                   <a:schemeClr val="tx1"/>
                 </a:solidFill>
               </a:rPr>
-              <a:t>El blog y docs.hyland.com dicen:</a:t>
+              <a:t>Al blog y a docs.hyland.com les falta @alfresco</a:t>
             </a:r>
             <a:endParaRPr lang="en-US" sz="1400" dirty="0"/>
           </a:p>
@@ -5269,14 +5376,36 @@
       </p:sp>
       <p:sp>
         <p:nvSpPr>
-          <p:cNvPr id="8" name="Text 5"/>
+          <p:cNvPr id="8" name="nxfix-Nombre completo del generador-fondo"/>
+          <p:cNvSpPr/>
+          <p:nvPr/>
+        </p:nvSpPr>
+        <p:spPr>
+          <a:xfrm>
+            <a:off x="5440680" y="1481328"/>
+            <a:ext cx="6035040" cy="1243584"/>
+          </a:xfrm>
+          <a:prstGeom prst="roundRect">
+            <a:avLst>
+              <a:gd name="adj" fmla="val 5882"/>
+            </a:avLst>
+          </a:prstGeom>
+          <a:solidFill>
+            <a:schemeClr val="tx2"/>
+          </a:solidFill>
+          <a:ln/>
+        </p:spPr>
+      </p:sp>
+      <p:sp>
+        <p:nvSpPr>
+          <p:cNvPr id="9" name="nxfix-Nombre completo del generador-codigo"/>
           <p:cNvSpPr txBox="1"/>
           <p:nvPr/>
         </p:nvSpPr>
         <p:spPr>
           <a:xfrm>
-            <a:off x="777240" y="3749040"/>
-            <a:ext cx="3063240" cy="731520"/>
+            <a:off x="5669280" y="1645920"/>
+            <a:ext cx="5577840" cy="914400"/>
           </a:xfrm>
           <a:prstGeom prst="rect">
             <a:avLst/>
@@ -5289,90 +5418,80 @@
           <a:lstStyle/>
           <a:p>
             <a:pPr indent="0" marL="0">
+              <a:spcAft>
+                <a:spcPts val="200"/>
+              </a:spcAft>
               <a:buNone/>
             </a:pPr>
             <a:r>
               <a:rPr lang="en-US" sz="1300" dirty="0">
                 <a:solidFill>
-                  <a:schemeClr val="accent5"/>
+                  <a:schemeClr val="bg1"/>
                 </a:solidFill>
                 <a:latin typeface="Courier New" pitchFamily="34" charset="0"/>
                 <a:ea typeface="Courier New" pitchFamily="34" charset="-122"/>
                 <a:cs typeface="Courier New" pitchFamily="34" charset="-120"/>
               </a:rPr>
-              <a:t>nx generate</a:t>
+              <a:t>npx nx g @alfresco/adf-generators:template-app `</a:t>
             </a:r>
             <a:endParaRPr lang="en-US" sz="1300" dirty="0"/>
           </a:p>
           <a:p>
             <a:pPr indent="0" marL="0">
+              <a:spcAft>
+                <a:spcPts val="200"/>
+              </a:spcAft>
               <a:buNone/>
             </a:pPr>
             <a:r>
               <a:rPr lang="en-US" sz="1300" dirty="0">
                 <a:solidFill>
-                  <a:schemeClr val="accent5"/>
+                  <a:schemeClr val="bg1"/>
                 </a:solidFill>
                 <a:latin typeface="Courier New" pitchFamily="34" charset="0"/>
                 <a:ea typeface="Courier New" pitchFamily="34" charset="-122"/>
                 <a:cs typeface="Courier New" pitchFamily="34" charset="-120"/>
               </a:rPr>
-              <a:t>/adf-generators:...</a:t>
+              <a:t>  --name=template --template=acs `</a:t>
             </a:r>
             <a:endParaRPr lang="en-US" sz="1300" dirty="0"/>
           </a:p>
-        </p:txBody>
-      </p:sp>
-      <p:sp>
-        <p:nvSpPr>
-          <p:cNvPr id="9" name="Text 6"/>
-          <p:cNvSpPr txBox="1"/>
-          <p:nvPr/>
-        </p:nvSpPr>
-        <p:spPr>
-          <a:xfrm>
-            <a:off x="822960" y="4526280"/>
-            <a:ext cx="2971800" cy="1371600"/>
-          </a:xfrm>
-          <a:prstGeom prst="rect">
-            <a:avLst/>
-          </a:prstGeom>
-          <a:noFill/>
-          <a:ln/>
-        </p:spPr>
-        <p:txBody>
-          <a:bodyPr wrap="square" lIns="0" tIns="0" rIns="0" bIns="0" rtlCol="0" anchor="t"/>
-          <a:lstStyle/>
-          <a:p>
-            <a:pPr indent="0" marL="0">
-              <a:buNone/>
-            </a:pPr>
-            <a:r>
-              <a:rPr lang="en-US" sz="1400" dirty="0">
-                <a:solidFill>
-                  <a:schemeClr val="tx1"/>
-                </a:solidFill>
-              </a:rPr>
-              <a:t>Correcto: @alfresco/adf-generators:template-app</a:t>
-            </a:r>
-            <a:endParaRPr lang="en-US" sz="1400" dirty="0"/>
-          </a:p>
-        </p:txBody>
-      </p:sp>
-      <p:sp>
-        <p:nvSpPr>
-          <p:cNvPr id="10" name="trampa-build-angular sobra"/>
+          <a:p>
+            <a:pPr indent="0" marL="0">
+              <a:spcAft>
+                <a:spcPts val="200"/>
+              </a:spcAft>
+              <a:buNone/>
+            </a:pPr>
+            <a:r>
+              <a:rPr lang="en-US" sz="1300" dirty="0">
+                <a:solidFill>
+                  <a:schemeClr val="bg1"/>
+                </a:solidFill>
+                <a:latin typeface="Courier New" pitchFamily="34" charset="0"/>
+                <a:ea typeface="Courier New" pitchFamily="34" charset="-122"/>
+                <a:cs typeface="Courier New" pitchFamily="34" charset="-120"/>
+              </a:rPr>
+              <a:t>  --authType=BASIC --provider=ECM</a:t>
+            </a:r>
+            <a:endParaRPr lang="en-US" sz="1300" dirty="0"/>
+          </a:p>
+        </p:txBody>
+      </p:sp>
+      <p:sp>
+        <p:nvSpPr>
+          <p:cNvPr id="10" name="nxfix-Instalar e iniciar sin pasos extra"/>
           <p:cNvSpPr/>
           <p:nvPr/>
         </p:nvSpPr>
         <p:spPr>
           <a:xfrm>
-            <a:off x="4320540" y="1417320"/>
-            <a:ext cx="3520440" cy="4663440"/>
+            <a:off x="548640" y="2971800"/>
+            <a:ext cx="11064240" cy="1463040"/>
           </a:xfrm>
           <a:prstGeom prst="roundRect">
             <a:avLst>
-              <a:gd name="adj" fmla="val 2597"/>
+              <a:gd name="adj" fmla="val 6250"/>
             </a:avLst>
           </a:prstGeom>
           <a:solidFill>
@@ -5383,27 +5502,27 @@
       </p:sp>
       <p:sp>
         <p:nvSpPr>
-          <p:cNvPr id="11" name="trampa-build-angular sobra-circulo"/>
+          <p:cNvPr id="11" name="nxfix-Instalar e iniciar sin pasos extra-circulo"/>
           <p:cNvSpPr/>
           <p:nvPr/>
         </p:nvSpPr>
         <p:spPr>
           <a:xfrm>
-            <a:off x="4594860" y="1691640"/>
+            <a:off x="777240" y="3337560"/>
             <a:ext cx="731520" cy="731520"/>
           </a:xfrm>
           <a:prstGeom prst="ellipse">
             <a:avLst/>
           </a:prstGeom>
           <a:solidFill>
-            <a:schemeClr val="accent5"/>
+            <a:schemeClr val="accent3"/>
           </a:solidFill>
           <a:ln/>
         </p:spPr>
       </p:sp>
       <p:pic>
         <p:nvPicPr>
-          <p:cNvPr id="12" name="trampa-build-angular sobra-icono" descr="preencoded.png">    </p:cNvPr>
+          <p:cNvPr id="12" name="nxfix-Instalar e iniciar sin pasos extra-icono" descr="preencoded.png">    </p:cNvPr>
           <p:cNvPicPr>
             <a:picLocks noChangeAspect="1"/>
           </p:cNvPicPr>
@@ -5417,7 +5536,7 @@
         </p:blipFill>
         <p:spPr>
           <a:xfrm>
-            <a:off x="4777740" y="1874520"/>
+            <a:off x="960120" y="3520440"/>
             <a:ext cx="365760" cy="365760"/>
           </a:xfrm>
           <a:prstGeom prst="rect">
@@ -5433,8 +5552,8 @@
         </p:nvSpPr>
         <p:spPr>
           <a:xfrm>
-            <a:off x="4594860" y="2606040"/>
-            <a:ext cx="2971800" cy="457200"/>
+            <a:off x="1691640" y="3154680"/>
+            <a:ext cx="3566160" cy="457200"/>
           </a:xfrm>
           <a:prstGeom prst="rect">
             <a:avLst/>
@@ -5450,14 +5569,14 @@
               <a:buNone/>
             </a:pPr>
             <a:r>
-              <a:rPr lang="en-US" sz="2000" b="1" dirty="0">
+              <a:rPr lang="en-US" sz="1800" b="1" dirty="0">
                 <a:solidFill>
                   <a:schemeClr val="tx2"/>
                 </a:solidFill>
               </a:rPr>
-              <a:t>build-angular sobra</a:t>
-            </a:r>
-            <a:endParaRPr lang="en-US" sz="2000" dirty="0"/>
+              <a:t>Instalar e iniciar sin pasos extra</a:t>
+            </a:r>
+            <a:endParaRPr lang="en-US" sz="1800" dirty="0"/>
           </a:p>
         </p:txBody>
       </p:sp>
@@ -5469,8 +5588,8 @@
         </p:nvSpPr>
         <p:spPr>
           <a:xfrm>
-            <a:off x="4594860" y="3108960"/>
-            <a:ext cx="2971800" cy="640080"/>
+            <a:off x="1691640" y="3611880"/>
+            <a:ext cx="3566160" cy="685800"/>
           </a:xfrm>
           <a:prstGeom prst="rect">
             <a:avLst/>
@@ -5491,7 +5610,7 @@
                   <a:schemeClr val="tx1"/>
                 </a:solidFill>
               </a:rPr>
-              <a:t>Indican instalar antes:</a:t>
+              <a:t>No instalar @angular-devkit/build-angular: el template ya lo trae</a:t>
             </a:r>
             <a:endParaRPr lang="en-US" sz="1400" dirty="0"/>
           </a:p>
@@ -5499,14 +5618,36 @@
       </p:sp>
       <p:sp>
         <p:nvSpPr>
-          <p:cNvPr id="15" name="Text 11"/>
+          <p:cNvPr id="15" name="nxfix-Instalar e iniciar sin pasos extra-fondo"/>
+          <p:cNvSpPr/>
+          <p:nvPr/>
+        </p:nvSpPr>
+        <p:spPr>
+          <a:xfrm>
+            <a:off x="5440680" y="3081528"/>
+            <a:ext cx="6035040" cy="1243584"/>
+          </a:xfrm>
+          <a:prstGeom prst="roundRect">
+            <a:avLst>
+              <a:gd name="adj" fmla="val 5882"/>
+            </a:avLst>
+          </a:prstGeom>
+          <a:solidFill>
+            <a:schemeClr val="tx2"/>
+          </a:solidFill>
+          <a:ln/>
+        </p:spPr>
+      </p:sp>
+      <p:sp>
+        <p:nvSpPr>
+          <p:cNvPr id="16" name="nxfix-Instalar e iniciar sin pasos extra-codigo"/>
           <p:cNvSpPr txBox="1"/>
           <p:nvPr/>
         </p:nvSpPr>
         <p:spPr>
           <a:xfrm>
-            <a:off x="4549140" y="3749040"/>
-            <a:ext cx="3063240" cy="731520"/>
+            <a:off x="5669280" y="3246120"/>
+            <a:ext cx="5577840" cy="914400"/>
           </a:xfrm>
           <a:prstGeom prst="rect">
             <a:avLst/>
@@ -5519,90 +5660,80 @@
           <a:lstStyle/>
           <a:p>
             <a:pPr indent="0" marL="0">
+              <a:spcAft>
+                <a:spcPts val="200"/>
+              </a:spcAft>
               <a:buNone/>
             </a:pPr>
             <a:r>
               <a:rPr lang="en-US" sz="1300" dirty="0">
                 <a:solidFill>
-                  <a:schemeClr val="accent5"/>
+                  <a:schemeClr val="bg1"/>
                 </a:solidFill>
                 <a:latin typeface="Courier New" pitchFamily="34" charset="0"/>
                 <a:ea typeface="Courier New" pitchFamily="34" charset="-122"/>
                 <a:cs typeface="Courier New" pitchFamily="34" charset="-120"/>
               </a:rPr>
-              <a:t>npm i -D</a:t>
+              <a:t>cd template</a:t>
             </a:r>
             <a:endParaRPr lang="en-US" sz="1300" dirty="0"/>
           </a:p>
           <a:p>
             <a:pPr indent="0" marL="0">
+              <a:spcAft>
+                <a:spcPts val="200"/>
+              </a:spcAft>
               <a:buNone/>
             </a:pPr>
             <a:r>
               <a:rPr lang="en-US" sz="1300" dirty="0">
                 <a:solidFill>
-                  <a:schemeClr val="accent5"/>
+                  <a:schemeClr val="bg1"/>
                 </a:solidFill>
                 <a:latin typeface="Courier New" pitchFamily="34" charset="0"/>
                 <a:ea typeface="Courier New" pitchFamily="34" charset="-122"/>
                 <a:cs typeface="Courier New" pitchFamily="34" charset="-120"/>
               </a:rPr>
-              <a:t>@angular-devkit/build-angular</a:t>
+              <a:t>npm install</a:t>
             </a:r>
             <a:endParaRPr lang="en-US" sz="1300" dirty="0"/>
           </a:p>
-        </p:txBody>
-      </p:sp>
-      <p:sp>
-        <p:nvSpPr>
-          <p:cNvPr id="16" name="Text 12"/>
-          <p:cNvSpPr txBox="1"/>
-          <p:nvPr/>
-        </p:nvSpPr>
-        <p:spPr>
-          <a:xfrm>
-            <a:off x="4594860" y="4526280"/>
-            <a:ext cx="2971800" cy="1371600"/>
-          </a:xfrm>
-          <a:prstGeom prst="rect">
-            <a:avLst/>
-          </a:prstGeom>
-          <a:noFill/>
-          <a:ln/>
-        </p:spPr>
-        <p:txBody>
-          <a:bodyPr wrap="square" lIns="0" tIns="0" rIns="0" bIns="0" rtlCol="0" anchor="t"/>
-          <a:lstStyle/>
-          <a:p>
-            <a:pPr indent="0" marL="0">
-              <a:buNone/>
-            </a:pPr>
-            <a:r>
-              <a:rPr lang="en-US" sz="1400" dirty="0">
-                <a:solidFill>
-                  <a:schemeClr val="tx1"/>
-                </a:solidFill>
-              </a:rPr>
-              <a:t>El template ya lo trae (19.2.15). Sin versión instala la última y rompe todo.</a:t>
-            </a:r>
-            <a:endParaRPr lang="en-US" sz="1400" dirty="0"/>
-          </a:p>
-        </p:txBody>
-      </p:sp>
-      <p:sp>
-        <p:nvSpPr>
-          <p:cNvPr id="17" name="trampa-Node 22 o 24"/>
+          <a:p>
+            <a:pPr indent="0" marL="0">
+              <a:spcAft>
+                <a:spcPts val="200"/>
+              </a:spcAft>
+              <a:buNone/>
+            </a:pPr>
+            <a:r>
+              <a:rPr lang="en-US" sz="1300" dirty="0">
+                <a:solidFill>
+                  <a:schemeClr val="bg1"/>
+                </a:solidFill>
+                <a:latin typeface="Courier New" pitchFamily="34" charset="0"/>
+                <a:ea typeface="Courier New" pitchFamily="34" charset="-122"/>
+                <a:cs typeface="Courier New" pitchFamily="34" charset="-120"/>
+              </a:rPr>
+              <a:t>npm start</a:t>
+            </a:r>
+            <a:endParaRPr lang="en-US" sz="1300" dirty="0"/>
+          </a:p>
+        </p:txBody>
+      </p:sp>
+      <p:sp>
+        <p:nvSpPr>
+          <p:cNvPr id="17" name="nxfix-Node 24, no 22"/>
           <p:cNvSpPr/>
           <p:nvPr/>
         </p:nvSpPr>
         <p:spPr>
           <a:xfrm>
-            <a:off x="8092440" y="1417320"/>
-            <a:ext cx="3520440" cy="4663440"/>
+            <a:off x="548640" y="4572000"/>
+            <a:ext cx="11064240" cy="1463040"/>
           </a:xfrm>
           <a:prstGeom prst="roundRect">
             <a:avLst>
-              <a:gd name="adj" fmla="val 2597"/>
+              <a:gd name="adj" fmla="val 6250"/>
             </a:avLst>
           </a:prstGeom>
           <a:solidFill>
@@ -5613,27 +5744,27 @@
       </p:sp>
       <p:sp>
         <p:nvSpPr>
-          <p:cNvPr id="18" name="trampa-Node 22 o 24-circulo"/>
+          <p:cNvPr id="18" name="nxfix-Node 24, no 22-circulo"/>
           <p:cNvSpPr/>
           <p:nvPr/>
         </p:nvSpPr>
         <p:spPr>
           <a:xfrm>
-            <a:off x="8366760" y="1691640"/>
+            <a:off x="777240" y="4937760"/>
             <a:ext cx="731520" cy="731520"/>
           </a:xfrm>
           <a:prstGeom prst="ellipse">
             <a:avLst/>
           </a:prstGeom>
           <a:solidFill>
-            <a:schemeClr val="accent5"/>
+            <a:schemeClr val="accent3"/>
           </a:solidFill>
           <a:ln/>
         </p:spPr>
       </p:sp>
       <p:pic>
         <p:nvPicPr>
-          <p:cNvPr id="19" name="trampa-Node 22 o 24-icono" descr="preencoded.png">    </p:cNvPr>
+          <p:cNvPr id="19" name="nxfix-Node 24, no 22-icono" descr="preencoded.png">    </p:cNvPr>
           <p:cNvPicPr>
             <a:picLocks noChangeAspect="1"/>
           </p:cNvPicPr>
@@ -5647,7 +5778,7 @@
         </p:blipFill>
         <p:spPr>
           <a:xfrm>
-            <a:off x="8549640" y="1874520"/>
+            <a:off x="960120" y="5120640"/>
             <a:ext cx="365760" cy="365760"/>
           </a:xfrm>
           <a:prstGeom prst="rect">
@@ -5663,8 +5794,8 @@
         </p:nvSpPr>
         <p:spPr>
           <a:xfrm>
-            <a:off x="8366760" y="2606040"/>
-            <a:ext cx="2971800" cy="457200"/>
+            <a:off x="1691640" y="4754880"/>
+            <a:ext cx="3566160" cy="457200"/>
           </a:xfrm>
           <a:prstGeom prst="rect">
             <a:avLst/>
@@ -5680,14 +5811,14 @@
               <a:buNone/>
             </a:pPr>
             <a:r>
-              <a:rPr lang="en-US" sz="2000" b="1" dirty="0">
+              <a:rPr lang="en-US" sz="1800" b="1" dirty="0">
                 <a:solidFill>
                   <a:schemeClr val="tx2"/>
                 </a:solidFill>
               </a:rPr>
-              <a:t>Node 22 o 24</a:t>
-            </a:r>
-            <a:endParaRPr lang="en-US" sz="2000" dirty="0"/>
+              <a:t>Node 24, no 22</a:t>
+            </a:r>
+            <a:endParaRPr lang="en-US" sz="1800" dirty="0"/>
           </a:p>
         </p:txBody>
       </p:sp>
@@ -5699,8 +5830,8 @@
         </p:nvSpPr>
         <p:spPr>
           <a:xfrm>
-            <a:off x="8366760" y="3108960"/>
-            <a:ext cx="2971800" cy="640080"/>
+            <a:off x="1691640" y="5212080"/>
+            <a:ext cx="3566160" cy="685800"/>
           </a:xfrm>
           <a:prstGeom prst="rect">
             <a:avLst/>
@@ -5721,7 +5852,7 @@
                   <a:schemeClr val="tx1"/>
                 </a:solidFill>
               </a:rPr>
-              <a:t>El blog pide Node 22.x; el .nvmrc del repo pide:</a:t>
+              <a:t>El .nvmrc del repositorio de generadores pide 24.11.1</a:t>
             </a:r>
             <a:endParaRPr lang="en-US" sz="1400" dirty="0"/>
           </a:p>
@@ -5729,14 +5860,36 @@
       </p:sp>
       <p:sp>
         <p:nvSpPr>
-          <p:cNvPr id="22" name="Text 17"/>
+          <p:cNvPr id="22" name="nxfix-Node 24, no 22-fondo"/>
+          <p:cNvSpPr/>
+          <p:nvPr/>
+        </p:nvSpPr>
+        <p:spPr>
+          <a:xfrm>
+            <a:off x="5440680" y="4681728"/>
+            <a:ext cx="6035040" cy="1243584"/>
+          </a:xfrm>
+          <a:prstGeom prst="roundRect">
+            <a:avLst>
+              <a:gd name="adj" fmla="val 5882"/>
+            </a:avLst>
+          </a:prstGeom>
+          <a:solidFill>
+            <a:schemeClr val="tx2"/>
+          </a:solidFill>
+          <a:ln/>
+        </p:spPr>
+      </p:sp>
+      <p:sp>
+        <p:nvSpPr>
+          <p:cNvPr id="23" name="nxfix-Node 24, no 22-codigo"/>
           <p:cNvSpPr txBox="1"/>
           <p:nvPr/>
         </p:nvSpPr>
         <p:spPr>
           <a:xfrm>
-            <a:off x="8321040" y="3749040"/>
-            <a:ext cx="3063240" cy="731520"/>
+            <a:off x="5669280" y="4846320"/>
+            <a:ext cx="5577840" cy="914400"/>
           </a:xfrm>
           <a:prstGeom prst="rect">
             <a:avLst/>
@@ -5749,56 +5902,80 @@
           <a:lstStyle/>
           <a:p>
             <a:pPr indent="0" marL="0">
+              <a:spcAft>
+                <a:spcPts val="200"/>
+              </a:spcAft>
               <a:buNone/>
             </a:pPr>
             <a:r>
               <a:rPr lang="en-US" sz="1300" dirty="0">
                 <a:solidFill>
-                  <a:schemeClr val="accent5"/>
+                  <a:schemeClr val="bg1"/>
                 </a:solidFill>
                 <a:latin typeface="Courier New" pitchFamily="34" charset="0"/>
                 <a:ea typeface="Courier New" pitchFamily="34" charset="-122"/>
                 <a:cs typeface="Courier New" pitchFamily="34" charset="-120"/>
               </a:rPr>
-              <a:t>24.11.1</a:t>
+              <a:t>nvm install 24</a:t>
             </a:r>
             <a:endParaRPr lang="en-US" sz="1300" dirty="0"/>
           </a:p>
-        </p:txBody>
-      </p:sp>
-      <p:sp>
-        <p:nvSpPr>
-          <p:cNvPr id="23" name="Text 18"/>
-          <p:cNvSpPr txBox="1"/>
-          <p:nvPr/>
-        </p:nvSpPr>
-        <p:spPr>
-          <a:xfrm>
-            <a:off x="8366760" y="4526280"/>
-            <a:ext cx="2971800" cy="1371600"/>
-          </a:xfrm>
-          <a:prstGeom prst="rect">
-            <a:avLst/>
-          </a:prstGeom>
-          <a:noFill/>
-          <a:ln/>
-        </p:spPr>
-        <p:txBody>
-          <a:bodyPr wrap="square" lIns="0" tIns="0" rIns="0" bIns="0" rtlCol="0" anchor="t"/>
-          <a:lstStyle/>
-          <a:p>
-            <a:pPr indent="0" marL="0">
-              <a:buNone/>
-            </a:pPr>
-            <a:r>
-              <a:rPr lang="en-US" sz="1400" dirty="0">
-                <a:solidFill>
-                  <a:schemeClr val="tx1"/>
-                </a:solidFill>
-              </a:rPr>
-              <a:t>Probado de punta a punta solo con Node 24.19.0.</a:t>
-            </a:r>
-            <a:endParaRPr lang="en-US" sz="1400" dirty="0"/>
+          <a:p>
+            <a:pPr indent="0" marL="0">
+              <a:spcAft>
+                <a:spcPts val="200"/>
+              </a:spcAft>
+              <a:buNone/>
+            </a:pPr>
+            <a:r>
+              <a:rPr lang="en-US" sz="1300" dirty="0">
+                <a:solidFill>
+                  <a:schemeClr val="bg1"/>
+                </a:solidFill>
+                <a:latin typeface="Courier New" pitchFamily="34" charset="0"/>
+                <a:ea typeface="Courier New" pitchFamily="34" charset="-122"/>
+                <a:cs typeface="Courier New" pitchFamily="34" charset="-120"/>
+              </a:rPr>
+              <a:t>nvm use 24</a:t>
+            </a:r>
+            <a:endParaRPr lang="en-US" sz="1300" dirty="0"/>
+          </a:p>
+          <a:p>
+            <a:pPr indent="0" marL="0">
+              <a:spcAft>
+                <a:spcPts val="200"/>
+              </a:spcAft>
+              <a:buNone/>
+            </a:pPr>
+            <a:r>
+              <a:rPr lang="en-US" sz="1300" dirty="0">
+                <a:solidFill>
+                  <a:schemeClr val="bg1"/>
+                </a:solidFill>
+                <a:latin typeface="Courier New" pitchFamily="34" charset="0"/>
+                <a:ea typeface="Courier New" pitchFamily="34" charset="-122"/>
+                <a:cs typeface="Courier New" pitchFamily="34" charset="-120"/>
+              </a:rPr>
+              <a:t>node -v      </a:t>
+            </a:r>
+            <a:pPr indent="0" marL="0">
+              <a:spcAft>
+                <a:spcPts val="200"/>
+              </a:spcAft>
+              <a:buNone/>
+            </a:pPr>
+            <a:r>
+              <a:rPr lang="en-US" sz="1300" dirty="0">
+                <a:solidFill>
+                  <a:schemeClr val="accent1"/>
+                </a:solidFill>
+                <a:latin typeface="Courier New" pitchFamily="34" charset="0"/>
+                <a:ea typeface="Courier New" pitchFamily="34" charset="-122"/>
+                <a:cs typeface="Courier New" pitchFamily="34" charset="-120"/>
+              </a:rPr>
+              <a:t># v24.x</a:t>
+            </a:r>
+            <a:endParaRPr lang="en-US" sz="1300" dirty="0"/>
           </a:p>
         </p:txBody>
       </p:sp>
@@ -6160,7 +6337,7 @@
         </p:nvSpPr>
         <p:spPr>
           <a:xfrm>
-            <a:off x="548640" y="1371600"/>
+            <a:off x="548640" y="1325880"/>
             <a:ext cx="3108960" cy="347472"/>
           </a:xfrm>
           <a:prstGeom prst="roundRect">
@@ -6182,7 +6359,7 @@
         </p:nvSpPr>
         <p:spPr>
           <a:xfrm>
-            <a:off x="548640" y="1371600"/>
+            <a:off x="548640" y="1325880"/>
             <a:ext cx="3108960" cy="347472"/>
           </a:xfrm>
           <a:prstGeom prst="rect">
@@ -6218,12 +6395,12 @@
         </p:nvSpPr>
         <p:spPr>
           <a:xfrm>
-            <a:off x="548640" y="1874520"/>
-            <a:ext cx="5394960" cy="4206240"/>
+            <a:off x="548640" y="1737360"/>
+            <a:ext cx="11064240" cy="1783080"/>
           </a:xfrm>
           <a:prstGeom prst="roundRect">
             <a:avLst>
-              <a:gd name="adj" fmla="val 1739"/>
+              <a:gd name="adj" fmla="val 4103"/>
             </a:avLst>
           </a:prstGeom>
           <a:solidFill>
@@ -6240,8 +6417,8 @@
         </p:nvSpPr>
         <p:spPr>
           <a:xfrm>
-            <a:off x="777240" y="2039112"/>
-            <a:ext cx="4937760" cy="3877056"/>
+            <a:off x="777240" y="1901952"/>
+            <a:ext cx="10607040" cy="1453896"/>
           </a:xfrm>
           <a:prstGeom prst="rect">
             <a:avLst/>
@@ -6260,7 +6437,7 @@
               <a:buNone/>
             </a:pPr>
             <a:r>
-              <a:rPr lang="en-US" sz="1400" dirty="0">
+              <a:rPr lang="en-US" sz="1300" dirty="0">
                 <a:solidFill>
                   <a:schemeClr val="bg1"/>
                 </a:solidFill>
@@ -6270,7 +6447,7 @@
               </a:rPr>
               <a:t>nvm use 24</a:t>
             </a:r>
-            <a:endParaRPr lang="en-US" sz="1400" dirty="0"/>
+            <a:endParaRPr lang="en-US" sz="1300" dirty="0"/>
           </a:p>
           <a:p>
             <a:pPr indent="0" marL="0">
@@ -6280,7 +6457,7 @@
               <a:buNone/>
             </a:pPr>
             <a:r>
-              <a:rPr lang="en-US" sz="1400" dirty="0">
+              <a:rPr lang="en-US" sz="1300" dirty="0">
                 <a:solidFill>
                   <a:schemeClr val="bg1"/>
                 </a:solidFill>
@@ -6288,9 +6465,9 @@
                 <a:ea typeface="Courier New" pitchFamily="34" charset="-122"/>
                 <a:cs typeface="Courier New" pitchFamily="34" charset="-120"/>
               </a:rPr>
-              <a:t>git clone --depth 1 --branch 8.0.0 `</a:t>
-            </a:r>
-            <a:endParaRPr lang="en-US" sz="1400" dirty="0"/>
+              <a:t>git clone --depth 1 --branch 8.0.0 https://github.com/Alfresco/alfresco-content-app.git aca</a:t>
+            </a:r>
+            <a:endParaRPr lang="en-US" sz="1300" dirty="0"/>
           </a:p>
           <a:p>
             <a:pPr indent="0" marL="0">
@@ -6300,7 +6477,7 @@
               <a:buNone/>
             </a:pPr>
             <a:r>
-              <a:rPr lang="en-US" sz="1400" dirty="0">
+              <a:rPr lang="en-US" sz="1300" dirty="0">
                 <a:solidFill>
                   <a:schemeClr val="bg1"/>
                 </a:solidFill>
@@ -6308,9 +6485,9 @@
                 <a:ea typeface="Courier New" pitchFamily="34" charset="-122"/>
                 <a:cs typeface="Courier New" pitchFamily="34" charset="-120"/>
               </a:rPr>
-              <a:t>  https://github.com/Alfresco/`</a:t>
-            </a:r>
-            <a:endParaRPr lang="en-US" sz="1400" dirty="0"/>
+              <a:t>cd aca</a:t>
+            </a:r>
+            <a:endParaRPr lang="en-US" sz="1300" dirty="0"/>
           </a:p>
           <a:p>
             <a:pPr indent="0" marL="0">
@@ -6320,7 +6497,7 @@
               <a:buNone/>
             </a:pPr>
             <a:r>
-              <a:rPr lang="en-US" sz="1400" dirty="0">
+              <a:rPr lang="en-US" sz="1300" dirty="0">
                 <a:solidFill>
                   <a:schemeClr val="bg1"/>
                 </a:solidFill>
@@ -6328,9 +6505,9 @@
                 <a:ea typeface="Courier New" pitchFamily="34" charset="-122"/>
                 <a:cs typeface="Courier New" pitchFamily="34" charset="-120"/>
               </a:rPr>
-              <a:t>  alfresco-content-app.git aca</a:t>
-            </a:r>
-            <a:endParaRPr lang="en-US" sz="1400" dirty="0"/>
+              <a:t>Set-Content .env 'BASE_URL="http://localhost:8080"' -Encoding utf8</a:t>
+            </a:r>
+            <a:endParaRPr lang="en-US" sz="1300" dirty="0"/>
           </a:p>
           <a:p>
             <a:pPr indent="0" marL="0">
@@ -6340,7 +6517,7 @@
               <a:buNone/>
             </a:pPr>
             <a:r>
-              <a:rPr lang="en-US" sz="1400" dirty="0">
+              <a:rPr lang="en-US" sz="1300" dirty="0">
                 <a:solidFill>
                   <a:schemeClr val="bg1"/>
                 </a:solidFill>
@@ -6348,11 +6525,8 @@
                 <a:ea typeface="Courier New" pitchFamily="34" charset="-122"/>
                 <a:cs typeface="Courier New" pitchFamily="34" charset="-120"/>
               </a:rPr>
-              <a:t>cd aca</a:t>
-            </a:r>
-            <a:endParaRPr lang="en-US" sz="1400" dirty="0"/>
-          </a:p>
-          <a:p>
+              <a:t>npm install       </a:t>
+            </a:r>
             <a:pPr indent="0" marL="0">
               <a:spcAft>
                 <a:spcPts val="200"/>
@@ -6360,17 +6534,17 @@
               <a:buNone/>
             </a:pPr>
             <a:r>
-              <a:rPr lang="en-US" sz="1400" dirty="0">
-                <a:solidFill>
-                  <a:schemeClr val="bg1"/>
+              <a:rPr lang="en-US" sz="1300" dirty="0">
+                <a:solidFill>
+                  <a:schemeClr val="accent1"/>
                 </a:solidFill>
                 <a:latin typeface="Courier New" pitchFamily="34" charset="0"/>
                 <a:ea typeface="Courier New" pitchFamily="34" charset="-122"/>
                 <a:cs typeface="Courier New" pitchFamily="34" charset="-120"/>
               </a:rPr>
-              <a:t>Set-Content .env `</a:t>
-            </a:r>
-            <a:endParaRPr lang="en-US" sz="1400" dirty="0"/>
+              <a:t># ~40 s</a:t>
+            </a:r>
+            <a:endParaRPr lang="en-US" sz="1300" dirty="0"/>
           </a:p>
           <a:p>
             <a:pPr indent="0" marL="0">
@@ -6380,7 +6554,7 @@
               <a:buNone/>
             </a:pPr>
             <a:r>
-              <a:rPr lang="en-US" sz="1400" dirty="0">
+              <a:rPr lang="en-US" sz="1300" dirty="0">
                 <a:solidFill>
                   <a:schemeClr val="bg1"/>
                 </a:solidFill>
@@ -6388,11 +6562,8 @@
                 <a:ea typeface="Courier New" pitchFamily="34" charset="-122"/>
                 <a:cs typeface="Courier New" pitchFamily="34" charset="-120"/>
               </a:rPr>
-              <a:t>  'BASE_URL="http://localhost:8080"'</a:t>
-            </a:r>
-            <a:endParaRPr lang="en-US" sz="1400" dirty="0"/>
-          </a:p>
-          <a:p>
+              <a:t>npm start         </a:t>
+            </a:r>
             <a:pPr indent="0" marL="0">
               <a:spcAft>
                 <a:spcPts val="200"/>
@@ -6400,71 +6571,17 @@
               <a:buNone/>
             </a:pPr>
             <a:r>
-              <a:rPr lang="en-US" sz="1400" dirty="0">
-                <a:solidFill>
-                  <a:schemeClr val="bg1"/>
+              <a:rPr lang="en-US" sz="1300" dirty="0">
+                <a:solidFill>
+                  <a:schemeClr val="accent1"/>
                 </a:solidFill>
                 <a:latin typeface="Courier New" pitchFamily="34" charset="0"/>
                 <a:ea typeface="Courier New" pitchFamily="34" charset="-122"/>
                 <a:cs typeface="Courier New" pitchFamily="34" charset="-120"/>
               </a:rPr>
-              <a:t>npm install       </a:t>
-            </a:r>
-            <a:pPr indent="0" marL="0">
-              <a:spcAft>
-                <a:spcPts val="200"/>
-              </a:spcAft>
-              <a:buNone/>
-            </a:pPr>
-            <a:r>
-              <a:rPr lang="en-US" sz="1400" dirty="0">
-                <a:solidFill>
-                  <a:schemeClr val="accent1"/>
-                </a:solidFill>
-                <a:latin typeface="Courier New" pitchFamily="34" charset="0"/>
-                <a:ea typeface="Courier New" pitchFamily="34" charset="-122"/>
-                <a:cs typeface="Courier New" pitchFamily="34" charset="-120"/>
-              </a:rPr>
-              <a:t># ~40 s</a:t>
-            </a:r>
-            <a:endParaRPr lang="en-US" sz="1400" dirty="0"/>
-          </a:p>
-          <a:p>
-            <a:pPr indent="0" marL="0">
-              <a:spcAft>
-                <a:spcPts val="200"/>
-              </a:spcAft>
-              <a:buNone/>
-            </a:pPr>
-            <a:r>
-              <a:rPr lang="en-US" sz="1400" dirty="0">
-                <a:solidFill>
-                  <a:schemeClr val="bg1"/>
-                </a:solidFill>
-                <a:latin typeface="Courier New" pitchFamily="34" charset="0"/>
-                <a:ea typeface="Courier New" pitchFamily="34" charset="-122"/>
-                <a:cs typeface="Courier New" pitchFamily="34" charset="-120"/>
-              </a:rPr>
-              <a:t>npm start         </a:t>
-            </a:r>
-            <a:pPr indent="0" marL="0">
-              <a:spcAft>
-                <a:spcPts val="200"/>
-              </a:spcAft>
-              <a:buNone/>
-            </a:pPr>
-            <a:r>
-              <a:rPr lang="en-US" sz="1400" dirty="0">
-                <a:solidFill>
-                  <a:schemeClr val="accent1"/>
-                </a:solidFill>
-                <a:latin typeface="Courier New" pitchFamily="34" charset="0"/>
-                <a:ea typeface="Courier New" pitchFamily="34" charset="-122"/>
-                <a:cs typeface="Courier New" pitchFamily="34" charset="-120"/>
-              </a:rPr>
-              <a:t># nx serve content-ce</a:t>
-            </a:r>
-            <a:endParaRPr lang="en-US" sz="1400" dirty="0"/>
+              <a:t># http://localhost:4200</a:t>
+            </a:r>
+            <a:endParaRPr lang="en-US" sz="1300" dirty="0"/>
           </a:p>
         </p:txBody>
       </p:sp>
@@ -6476,7 +6593,7 @@
         </p:nvSpPr>
         <p:spPr>
           <a:xfrm>
-            <a:off x="6217920" y="1371600"/>
+            <a:off x="548640" y="3703320"/>
             <a:ext cx="3291840" cy="347472"/>
           </a:xfrm>
           <a:prstGeom prst="roundRect">
@@ -6498,7 +6615,7 @@
         </p:nvSpPr>
         <p:spPr>
           <a:xfrm>
-            <a:off x="6217920" y="1371600"/>
+            <a:off x="548640" y="3703320"/>
             <a:ext cx="3291840" cy="347472"/>
           </a:xfrm>
           <a:prstGeom prst="rect">
@@ -6534,12 +6651,12 @@
         </p:nvSpPr>
         <p:spPr>
           <a:xfrm>
-            <a:off x="6217920" y="1874520"/>
-            <a:ext cx="5394960" cy="4206240"/>
+            <a:off x="548640" y="4114800"/>
+            <a:ext cx="11064240" cy="2011680"/>
           </a:xfrm>
           <a:prstGeom prst="roundRect">
             <a:avLst>
-              <a:gd name="adj" fmla="val 1739"/>
+              <a:gd name="adj" fmla="val 3636"/>
             </a:avLst>
           </a:prstGeom>
           <a:solidFill>
@@ -6556,8 +6673,8 @@
         </p:nvSpPr>
         <p:spPr>
           <a:xfrm>
-            <a:off x="6446520" y="2039112"/>
-            <a:ext cx="4937760" cy="3877056"/>
+            <a:off x="777240" y="4279392"/>
+            <a:ext cx="10607040" cy="1682496"/>
           </a:xfrm>
           <a:prstGeom prst="rect">
             <a:avLst/>
@@ -6576,7 +6693,7 @@
               <a:buNone/>
             </a:pPr>
             <a:r>
-              <a:rPr lang="en-US" sz="1400" dirty="0">
+              <a:rPr lang="en-US" sz="1300" dirty="0">
                 <a:solidFill>
                   <a:schemeClr val="bg1"/>
                 </a:solidFill>
@@ -6593,7 +6710,7 @@
               <a:buNone/>
             </a:pPr>
             <a:r>
-              <a:rPr lang="en-US" sz="1400" dirty="0">
+              <a:rPr lang="en-US" sz="1300" dirty="0">
                 <a:solidFill>
                   <a:schemeClr val="accent1"/>
                 </a:solidFill>
@@ -6603,7 +6720,7 @@
               </a:rPr>
               <a:t># &gt;= 24.13.1</a:t>
             </a:r>
-            <a:endParaRPr lang="en-US" sz="1400" dirty="0"/>
+            <a:endParaRPr lang="en-US" sz="1300" dirty="0"/>
           </a:p>
           <a:p>
             <a:pPr indent="0" marL="0">
@@ -6613,7 +6730,7 @@
               <a:buNone/>
             </a:pPr>
             <a:r>
-              <a:rPr lang="en-US" sz="1400" dirty="0">
+              <a:rPr lang="en-US" sz="1300" dirty="0">
                 <a:solidFill>
                   <a:schemeClr val="bg1"/>
                 </a:solidFill>
@@ -6630,7 +6747,7 @@
               <a:buNone/>
             </a:pPr>
             <a:r>
-              <a:rPr lang="en-US" sz="1400" dirty="0">
+              <a:rPr lang="en-US" sz="1300" dirty="0">
                 <a:solidFill>
                   <a:schemeClr val="accent1"/>
                 </a:solidFill>
@@ -6640,7 +6757,7 @@
               </a:rPr>
               <a:t># activa pnpm 11</a:t>
             </a:r>
-            <a:endParaRPr lang="en-US" sz="1400" dirty="0"/>
+            <a:endParaRPr lang="en-US" sz="1300" dirty="0"/>
           </a:p>
           <a:p>
             <a:pPr indent="0" marL="0">
@@ -6650,7 +6767,7 @@
               <a:buNone/>
             </a:pPr>
             <a:r>
-              <a:rPr lang="en-US" sz="1400" dirty="0">
+              <a:rPr lang="en-US" sz="1300" dirty="0">
                 <a:solidFill>
                   <a:schemeClr val="bg1"/>
                 </a:solidFill>
@@ -6658,9 +6775,9 @@
                 <a:ea typeface="Courier New" pitchFamily="34" charset="-122"/>
                 <a:cs typeface="Courier New" pitchFamily="34" charset="-120"/>
               </a:rPr>
-              <a:t>git clone --depth 1 `</a:t>
-            </a:r>
-            <a:endParaRPr lang="en-US" sz="1400" dirty="0"/>
+              <a:t>git clone --depth 1 https://github.com/Alfresco/alfresco-content-app.git aca</a:t>
+            </a:r>
+            <a:endParaRPr lang="en-US" sz="1300" dirty="0"/>
           </a:p>
           <a:p>
             <a:pPr indent="0" marL="0">
@@ -6670,7 +6787,7 @@
               <a:buNone/>
             </a:pPr>
             <a:r>
-              <a:rPr lang="en-US" sz="1400" dirty="0">
+              <a:rPr lang="en-US" sz="1300" dirty="0">
                 <a:solidFill>
                   <a:schemeClr val="bg1"/>
                 </a:solidFill>
@@ -6678,9 +6795,9 @@
                 <a:ea typeface="Courier New" pitchFamily="34" charset="-122"/>
                 <a:cs typeface="Courier New" pitchFamily="34" charset="-120"/>
               </a:rPr>
-              <a:t>  https://github.com/Alfresco/`</a:t>
-            </a:r>
-            <a:endParaRPr lang="en-US" sz="1400" dirty="0"/>
+              <a:t>cd aca</a:t>
+            </a:r>
+            <a:endParaRPr lang="en-US" sz="1300" dirty="0"/>
           </a:p>
           <a:p>
             <a:pPr indent="0" marL="0">
@@ -6690,7 +6807,7 @@
               <a:buNone/>
             </a:pPr>
             <a:r>
-              <a:rPr lang="en-US" sz="1400" dirty="0">
+              <a:rPr lang="en-US" sz="1300" dirty="0">
                 <a:solidFill>
                   <a:schemeClr val="bg1"/>
                 </a:solidFill>
@@ -6698,9 +6815,9 @@
                 <a:ea typeface="Courier New" pitchFamily="34" charset="-122"/>
                 <a:cs typeface="Courier New" pitchFamily="34" charset="-120"/>
               </a:rPr>
-              <a:t>  alfresco-content-app.git aca</a:t>
-            </a:r>
-            <a:endParaRPr lang="en-US" sz="1400" dirty="0"/>
+              <a:t>Set-Content .env 'BASE_URL="http://localhost:8080"' -Encoding utf8</a:t>
+            </a:r>
+            <a:endParaRPr lang="en-US" sz="1300" dirty="0"/>
           </a:p>
           <a:p>
             <a:pPr indent="0" marL="0">
@@ -6710,7 +6827,7 @@
               <a:buNone/>
             </a:pPr>
             <a:r>
-              <a:rPr lang="en-US" sz="1400" dirty="0">
+              <a:rPr lang="en-US" sz="1300" dirty="0">
                 <a:solidFill>
                   <a:schemeClr val="bg1"/>
                 </a:solidFill>
@@ -6718,9 +6835,9 @@
                 <a:ea typeface="Courier New" pitchFamily="34" charset="-122"/>
                 <a:cs typeface="Courier New" pitchFamily="34" charset="-120"/>
               </a:rPr>
-              <a:t>cd aca</a:t>
-            </a:r>
-            <a:endParaRPr lang="en-US" sz="1400" dirty="0"/>
+              <a:t>pnpm install</a:t>
+            </a:r>
+            <a:endParaRPr lang="en-US" sz="1300" dirty="0"/>
           </a:p>
           <a:p>
             <a:pPr indent="0" marL="0">
@@ -6730,74 +6847,17 @@
               <a:buNone/>
             </a:pPr>
             <a:r>
-              <a:rPr lang="en-US" sz="1400" dirty="0">
-                <a:solidFill>
-                  <a:schemeClr val="accent1"/>
+              <a:rPr lang="en-US" sz="1300" dirty="0">
+                <a:solidFill>
+                  <a:schemeClr val="bg1"/>
                 </a:solidFill>
                 <a:latin typeface="Courier New" pitchFamily="34" charset="0"/>
                 <a:ea typeface="Courier New" pitchFamily="34" charset="-122"/>
                 <a:cs typeface="Courier New" pitchFamily="34" charset="-120"/>
               </a:rPr>
-              <a:t># mismo .env con BASE_URL</a:t>
-            </a:r>
-            <a:endParaRPr lang="en-US" sz="1400" dirty="0"/>
-          </a:p>
-          <a:p>
-            <a:pPr indent="0" marL="0">
-              <a:spcAft>
-                <a:spcPts val="200"/>
-              </a:spcAft>
-              <a:buNone/>
-            </a:pPr>
-            <a:r>
-              <a:rPr lang="en-US" sz="1400" dirty="0">
-                <a:solidFill>
-                  <a:schemeClr val="bg1"/>
-                </a:solidFill>
-                <a:latin typeface="Courier New" pitchFamily="34" charset="0"/>
-                <a:ea typeface="Courier New" pitchFamily="34" charset="-122"/>
-                <a:cs typeface="Courier New" pitchFamily="34" charset="-120"/>
-              </a:rPr>
-              <a:t>pnpm install      </a:t>
-            </a:r>
-            <a:pPr indent="0" marL="0">
-              <a:spcAft>
-                <a:spcPts val="200"/>
-              </a:spcAft>
-              <a:buNone/>
-            </a:pPr>
-            <a:r>
-              <a:rPr lang="en-US" sz="1400" dirty="0">
-                <a:solidFill>
-                  <a:schemeClr val="accent1"/>
-                </a:solidFill>
-                <a:latin typeface="Courier New" pitchFamily="34" charset="0"/>
-                <a:ea typeface="Courier New" pitchFamily="34" charset="-122"/>
-                <a:cs typeface="Courier New" pitchFamily="34" charset="-120"/>
-              </a:rPr>
-              <a:t># npm queda bloqueado</a:t>
-            </a:r>
-            <a:endParaRPr lang="en-US" sz="1400" dirty="0"/>
-          </a:p>
-          <a:p>
-            <a:pPr indent="0" marL="0">
-              <a:spcAft>
-                <a:spcPts val="200"/>
-              </a:spcAft>
-              <a:buNone/>
-            </a:pPr>
-            <a:r>
-              <a:rPr lang="en-US" sz="1400" dirty="0">
-                <a:solidFill>
-                  <a:schemeClr val="bg1"/>
-                </a:solidFill>
-                <a:latin typeface="Courier New" pitchFamily="34" charset="0"/>
-                <a:ea typeface="Courier New" pitchFamily="34" charset="-122"/>
-                <a:cs typeface="Courier New" pitchFamily="34" charset="-120"/>
-              </a:rPr>
               <a:t>pnpm start</a:t>
             </a:r>
-            <a:endParaRPr lang="en-US" sz="1400" dirty="0"/>
+            <a:endParaRPr lang="en-US" sz="1300" dirty="0"/>
           </a:p>
         </p:txBody>
       </p:sp>
@@ -6924,7 +6984,7 @@
           </p:nvPr>
         </p:nvGraphicFramePr>
         <p:xfrm>
-          <a:off x="548640" y="1417320"/>
+          <a:off x="548640" y="1371600"/>
           <a:ext cx="11064240" cy="914400"/>
         </p:xfrm>
         <a:graphic>
@@ -6936,7 +6996,7 @@
                 <a:gridCol w="4572000"/>
                 <a:gridCol w="5029200"/>
               </a:tblGrid>
-              <a:tr h="548640">
+              <a:tr h="502920">
                 <a:tc>
                   <a:txBody>
                     <a:bodyPr/>
@@ -6948,7 +7008,7 @@
                       <a:endParaRPr lang="en-US" sz="1600" dirty="0"/>
                     </a:p>
                   </a:txBody>
-                  <a:tcPr marL="109728" marR="109728" marT="0" marB="0" anchor="ctr">
+                  <a:tcPr marL="91440" marR="91440" marT="0" marB="0" anchor="ctr">
                     <a:lnL w="9525" cap="flat" cmpd="sng" algn="ctr">
                       <a:solidFill>
                         <a:srgbClr val="D5DEE3"/>
@@ -7009,7 +7069,7 @@
                       <a:endParaRPr lang="en-US" sz="1600" dirty="0"/>
                     </a:p>
                   </a:txBody>
-                  <a:tcPr marL="109728" marR="109728" marT="0" marB="0" anchor="ctr">
+                  <a:tcPr marL="91440" marR="91440" marT="0" marB="0" anchor="ctr">
                     <a:lnL w="9525" cap="flat" cmpd="sng" algn="ctr">
                       <a:solidFill>
                         <a:srgbClr val="D5DEE3"/>
@@ -7065,12 +7125,12 @@
                             <a:srgbClr val="FFFFFF"/>
                           </a:solidFill>
                         </a:rPr>
-                        <a:t>Realidad (probado)</a:t>
+                        <a:t>Lo que funciona (probado)</a:t>
                       </a:r>
                       <a:endParaRPr lang="en-US" sz="1600" dirty="0"/>
                     </a:p>
                   </a:txBody>
-                  <a:tcPr marL="109728" marR="109728" marT="0" marB="0" anchor="ctr">
+                  <a:tcPr marL="91440" marR="91440" marT="0" marB="0" anchor="ctr">
                     <a:lnL w="9525" cap="flat" cmpd="sng" algn="ctr">
                       <a:solidFill>
                         <a:srgbClr val="D5DEE3"/>
@@ -7113,7 +7173,7 @@
                   </a:tcPr>
                 </a:tc>
               </a:tr>
-              <a:tr h="685800">
+              <a:tr h="594360">
                 <a:tc>
                   <a:txBody>
                     <a:bodyPr/>
@@ -7133,7 +7193,7 @@
                       <a:endParaRPr lang="en-US" sz="1600" dirty="0"/>
                     </a:p>
                   </a:txBody>
-                  <a:tcPr marL="109728" marR="109728" marT="0" marB="0" anchor="ctr">
+                  <a:tcPr marL="91440" marR="91440" marT="0" marB="0" anchor="ctr">
                     <a:lnL w="9525" cap="flat" cmpd="sng" algn="ctr">
                       <a:solidFill>
                         <a:srgbClr val="D5DEE3"/>
@@ -7191,7 +7251,7 @@
                       <a:endParaRPr lang="en-US" sz="1600" dirty="0"/>
                     </a:p>
                   </a:txBody>
-                  <a:tcPr marL="109728" marR="109728" marT="0" marB="0" anchor="ctr">
+                  <a:tcPr marL="91440" marR="91440" marT="0" marB="0" anchor="ctr">
                     <a:lnL w="9525" cap="flat" cmpd="sng" algn="ctr">
                       <a:solidFill>
                         <a:srgbClr val="D5DEE3"/>
@@ -7249,7 +7309,7 @@
                       <a:endParaRPr lang="en-US" sz="1600" dirty="0"/>
                     </a:p>
                   </a:txBody>
-                  <a:tcPr marL="109728" marR="109728" marT="0" marB="0" anchor="ctr">
+                  <a:tcPr marL="91440" marR="91440" marT="0" marB="0" anchor="ctr">
                     <a:lnL w="9525" cap="flat" cmpd="sng" algn="ctr">
                       <a:solidFill>
                         <a:srgbClr val="D5DEE3"/>
@@ -7289,7 +7349,7 @@
                   </a:tcPr>
                 </a:tc>
               </a:tr>
-              <a:tr h="685800">
+              <a:tr h="594360">
                 <a:tc>
                   <a:txBody>
                     <a:bodyPr/>
@@ -7309,7 +7369,7 @@
                       <a:endParaRPr lang="en-US" sz="1600" dirty="0"/>
                     </a:p>
                   </a:txBody>
-                  <a:tcPr marL="109728" marR="109728" marT="0" marB="0" anchor="ctr">
+                  <a:tcPr marL="91440" marR="91440" marT="0" marB="0" anchor="ctr">
                     <a:lnL w="9525" cap="flat" cmpd="sng" algn="ctr">
                       <a:solidFill>
                         <a:srgbClr val="D5DEE3"/>
@@ -7367,7 +7427,7 @@
                       <a:endParaRPr lang="en-US" sz="1600" dirty="0"/>
                     </a:p>
                   </a:txBody>
-                  <a:tcPr marL="109728" marR="109728" marT="0" marB="0" anchor="ctr">
+                  <a:tcPr marL="91440" marR="91440" marT="0" marB="0" anchor="ctr">
                     <a:lnL w="9525" cap="flat" cmpd="sng" algn="ctr">
                       <a:solidFill>
                         <a:srgbClr val="D5DEE3"/>
@@ -7425,7 +7485,7 @@
                       <a:endParaRPr lang="en-US" sz="1600" dirty="0"/>
                     </a:p>
                   </a:txBody>
-                  <a:tcPr marL="109728" marR="109728" marT="0" marB="0" anchor="ctr">
+                  <a:tcPr marL="91440" marR="91440" marT="0" marB="0" anchor="ctr">
                     <a:lnL w="9525" cap="flat" cmpd="sng" algn="ctr">
                       <a:solidFill>
                         <a:srgbClr val="D5DEE3"/>
@@ -7465,7 +7525,7 @@
                   </a:tcPr>
                 </a:tc>
               </a:tr>
-              <a:tr h="1005840">
+              <a:tr h="914400">
                 <a:tc>
                   <a:txBody>
                     <a:bodyPr/>
@@ -7485,7 +7545,7 @@
                       <a:endParaRPr lang="en-US" sz="1600" dirty="0"/>
                     </a:p>
                   </a:txBody>
-                  <a:tcPr marL="109728" marR="109728" marT="0" marB="0" anchor="ctr">
+                  <a:tcPr marL="91440" marR="91440" marT="0" marB="0" anchor="ctr">
                     <a:lnL w="9525" cap="flat" cmpd="sng" algn="ctr">
                       <a:solidFill>
                         <a:srgbClr val="D5DEE3"/>
@@ -7543,7 +7603,7 @@
                       <a:endParaRPr lang="en-US" sz="1600" dirty="0"/>
                     </a:p>
                   </a:txBody>
-                  <a:tcPr marL="109728" marR="109728" marT="0" marB="0" anchor="ctr">
+                  <a:tcPr marL="91440" marR="91440" marT="0" marB="0" anchor="ctr">
                     <a:lnL w="9525" cap="flat" cmpd="sng" algn="ctr">
                       <a:solidFill>
                         <a:srgbClr val="D5DEE3"/>
@@ -7601,7 +7661,7 @@
                       <a:endParaRPr lang="en-US" sz="1600" dirty="0"/>
                     </a:p>
                   </a:txBody>
-                  <a:tcPr marL="109728" marR="109728" marT="0" marB="0" anchor="ctr">
+                  <a:tcPr marL="91440" marR="91440" marT="0" marB="0" anchor="ctr">
                     <a:lnL w="9525" cap="flat" cmpd="sng" algn="ctr">
                       <a:solidFill>
                         <a:srgbClr val="D5DEE3"/>
@@ -7653,12 +7713,12 @@
         </p:nvSpPr>
         <p:spPr>
           <a:xfrm>
-            <a:off x="548640" y="4572000"/>
-            <a:ext cx="11064240" cy="1508760"/>
+            <a:off x="548640" y="4206240"/>
+            <a:ext cx="11064240" cy="1874520"/>
           </a:xfrm>
           <a:prstGeom prst="roundRect">
             <a:avLst>
-              <a:gd name="adj" fmla="val 6061"/>
+              <a:gd name="adj" fmla="val 4878"/>
             </a:avLst>
           </a:prstGeom>
           <a:solidFill>
@@ -7675,8 +7735,8 @@
         </p:nvSpPr>
         <p:spPr>
           <a:xfrm>
-            <a:off x="822960" y="4937760"/>
-            <a:ext cx="731520" cy="731520"/>
+            <a:off x="777240" y="4434840"/>
+            <a:ext cx="640080" cy="640080"/>
           </a:xfrm>
           <a:prstGeom prst="ellipse">
             <a:avLst/>
@@ -7703,8 +7763,8 @@
         </p:blipFill>
         <p:spPr>
           <a:xfrm>
-            <a:off x="1005840" y="5120640"/>
-            <a:ext cx="365760" cy="365760"/>
+            <a:off x="937260" y="4594860"/>
+            <a:ext cx="320040" cy="320040"/>
           </a:xfrm>
           <a:prstGeom prst="rect">
             <a:avLst/>
@@ -7719,8 +7779,8 @@
         </p:nvSpPr>
         <p:spPr>
           <a:xfrm>
-            <a:off x="1828800" y="4754880"/>
-            <a:ext cx="9509760" cy="1143000"/>
+            <a:off x="1600200" y="4343400"/>
+            <a:ext cx="9784080" cy="411480"/>
           </a:xfrm>
           <a:prstGeom prst="rect">
             <a:avLst/>
@@ -7741,20 +7801,109 @@
                   <a:schemeClr val="tx2"/>
                 </a:solidFill>
               </a:rPr>
-              <a:t>En la consola aparece «error loading discovery document». </a:t>
-            </a:r>
-            <a:pPr indent="0" marL="0">
-              <a:buNone/>
-            </a:pPr>
-            <a:r>
-              <a:rPr lang="en-US" sz="1600" dirty="0">
+              <a:t>Consola: «error loading discovery document» con authType BASIC</a:t>
+            </a:r>
+            <a:endParaRPr lang="en-US" sz="1600" dirty="0"/>
+          </a:p>
+        </p:txBody>
+      </p:sp>
+      <p:sp>
+        <p:nvSpPr>
+          <p:cNvPr id="8" name="Text 4"/>
+          <p:cNvSpPr txBox="1"/>
+          <p:nvPr/>
+        </p:nvSpPr>
+        <p:spPr>
+          <a:xfrm>
+            <a:off x="1600200" y="4754880"/>
+            <a:ext cx="9784080" cy="411480"/>
+          </a:xfrm>
+          <a:prstGeom prst="rect">
+            <a:avLst/>
+          </a:prstGeom>
+          <a:noFill/>
+          <a:ln/>
+        </p:spPr>
+        <p:txBody>
+          <a:bodyPr wrap="square" lIns="0" tIns="0" rIns="0" bIns="0" rtlCol="0" anchor="ctr"/>
+          <a:lstStyle/>
+          <a:p>
+            <a:pPr indent="0" marL="0">
+              <a:buNone/>
+            </a:pPr>
+            <a:r>
+              <a:rPr lang="en-US" sz="1400" dirty="0">
                 <a:solidFill>
                   <a:schemeClr val="tx1"/>
                 </a:solidFill>
               </a:rPr>
-              <a:t>Es normal: ACA intenta leer la configuración OAuth de un Keycloak que no existe. Con authType BASIC no afecta al login.</a:t>
-            </a:r>
-            <a:endParaRPr lang="en-US" sz="1600" dirty="0"/>
+              <a:t>ACA busca un servidor OAuth (Keycloak) por el bloque oauth2. Borrarlo elimina el error (el comando está en las notas):</a:t>
+            </a:r>
+            <a:endParaRPr lang="en-US" sz="1400" dirty="0"/>
+          </a:p>
+        </p:txBody>
+      </p:sp>
+      <p:sp>
+        <p:nvSpPr>
+          <p:cNvPr id="9" name="hyland-fix-fondo"/>
+          <p:cNvSpPr/>
+          <p:nvPr/>
+        </p:nvSpPr>
+        <p:spPr>
+          <a:xfrm>
+            <a:off x="1600200" y="5212080"/>
+            <a:ext cx="9829800" cy="731520"/>
+          </a:xfrm>
+          <a:prstGeom prst="roundRect">
+            <a:avLst>
+              <a:gd name="adj" fmla="val 10000"/>
+            </a:avLst>
+          </a:prstGeom>
+          <a:solidFill>
+            <a:schemeClr val="tx2"/>
+          </a:solidFill>
+          <a:ln/>
+        </p:spPr>
+      </p:sp>
+      <p:sp>
+        <p:nvSpPr>
+          <p:cNvPr id="10" name="hyland-fix-codigo"/>
+          <p:cNvSpPr txBox="1"/>
+          <p:nvPr/>
+        </p:nvSpPr>
+        <p:spPr>
+          <a:xfrm>
+            <a:off x="1828800" y="5376672"/>
+            <a:ext cx="9372600" cy="402336"/>
+          </a:xfrm>
+          <a:prstGeom prst="rect">
+            <a:avLst/>
+          </a:prstGeom>
+          <a:noFill/>
+          <a:ln/>
+        </p:spPr>
+        <p:txBody>
+          <a:bodyPr wrap="square" lIns="0" tIns="0" rIns="0" bIns="0" rtlCol="0" anchor="t"/>
+          <a:lstStyle/>
+          <a:p>
+            <a:pPr indent="0" marL="0">
+              <a:spcAft>
+                <a:spcPts val="200"/>
+              </a:spcAft>
+              <a:buNone/>
+            </a:pPr>
+            <a:r>
+              <a:rPr lang="en-US" sz="1300" dirty="0">
+                <a:solidFill>
+                  <a:schemeClr val="accent1"/>
+                </a:solidFill>
+                <a:latin typeface="Courier New" pitchFamily="34" charset="0"/>
+                <a:ea typeface="Courier New" pitchFamily="34" charset="-122"/>
+                <a:cs typeface="Courier New" pitchFamily="34" charset="-120"/>
+              </a:rPr>
+              <a:t>// app/src/app.config.json → borrar el bloque completo:  "oauth2": { ... },</a:t>
+            </a:r>
+            <a:endParaRPr lang="en-US" sz="1300" dirty="0"/>
           </a:p>
         </p:txBody>
       </p:sp>
@@ -7875,7 +8024,7 @@
         <p:spPr>
           <a:xfrm>
             <a:off x="548640" y="1417320"/>
-            <a:ext cx="5760720" cy="4663440"/>
+            <a:ext cx="5486400" cy="4663440"/>
           </a:xfrm>
           <a:prstGeom prst="roundRect">
             <a:avLst>
@@ -7897,7 +8046,7 @@
         <p:spPr>
           <a:xfrm>
             <a:off x="777240" y="1581912"/>
-            <a:ext cx="5303520" cy="4334256"/>
+            <a:ext cx="5029200" cy="4334256"/>
           </a:xfrm>
           <a:prstGeom prst="rect">
             <a:avLst/>
@@ -8158,7 +8307,24 @@
                 <a:ea typeface="Courier New" pitchFamily="34" charset="-122"/>
                 <a:cs typeface="Courier New" pitchFamily="34" charset="-120"/>
               </a:rPr>
-              <a:t>   └─ aca-shared/</a:t>
+              <a:t>   └─ ext/               </a:t>
+            </a:r>
+            <a:pPr indent="0" marL="0">
+              <a:spcAft>
+                <a:spcPts val="200"/>
+              </a:spcAft>
+              <a:buNone/>
+            </a:pPr>
+            <a:r>
+              <a:rPr lang="en-US" sz="1400" dirty="0">
+                <a:solidFill>
+                  <a:schemeClr val="accent1"/>
+                </a:solidFill>
+                <a:latin typeface="Courier New" pitchFamily="34" charset="0"/>
+                <a:ea typeface="Courier New" pitchFamily="34" charset="-122"/>
+                <a:cs typeface="Courier New" pitchFamily="34" charset="-120"/>
+              </a:rPr>
+              <a:t># tu extensión</a:t>
             </a:r>
             <a:endParaRPr lang="en-US" sz="1400" dirty="0"/>
           </a:p>
@@ -8172,8 +8338,8 @@
         </p:nvSpPr>
         <p:spPr>
           <a:xfrm>
-            <a:off x="6675120" y="1417320"/>
-            <a:ext cx="4937760" cy="457200"/>
+            <a:off x="6309360" y="1417320"/>
+            <a:ext cx="5303520" cy="457200"/>
           </a:xfrm>
           <a:prstGeom prst="rect">
             <a:avLst/>
@@ -8189,14 +8355,14 @@
               <a:buNone/>
             </a:pPr>
             <a:r>
-              <a:rPr lang="en-US" sz="2000" b="1" dirty="0">
+              <a:rPr lang="en-US" sz="1800" b="1" dirty="0">
                 <a:solidFill>
                   <a:schemeClr val="tx2"/>
                 </a:solidFill>
               </a:rPr>
-              <a:t>Crear una extensión</a:t>
-            </a:r>
-            <a:endParaRPr lang="en-US" sz="2000" dirty="0"/>
+              <a:t>Crear una extensión (desde la raíz de ACA 8.0.0)</a:t>
+            </a:r>
+            <a:endParaRPr lang="en-US" sz="1800" dirty="0"/>
           </a:p>
         </p:txBody>
       </p:sp>
@@ -8208,12 +8374,12 @@
         </p:nvSpPr>
         <p:spPr>
           <a:xfrm>
-            <a:off x="6675120" y="1920240"/>
-            <a:ext cx="4937760" cy="1920240"/>
+            <a:off x="6309360" y="1920240"/>
+            <a:ext cx="5303520" cy="2148840"/>
           </a:xfrm>
           <a:prstGeom prst="roundRect">
             <a:avLst>
-              <a:gd name="adj" fmla="val 3810"/>
+              <a:gd name="adj" fmla="val 3404"/>
             </a:avLst>
           </a:prstGeom>
           <a:solidFill>
@@ -8230,8 +8396,8 @@
         </p:nvSpPr>
         <p:spPr>
           <a:xfrm>
-            <a:off x="6903720" y="2084832"/>
-            <a:ext cx="4480560" cy="1591056"/>
+            <a:off x="6537960" y="2084832"/>
+            <a:ext cx="4846320" cy="1819656"/>
           </a:xfrm>
           <a:prstGeom prst="rect">
             <a:avLst/>
@@ -8250,7 +8416,7 @@
               <a:buNone/>
             </a:pPr>
             <a:r>
-              <a:rPr lang="en-US" sz="1400" dirty="0">
+              <a:rPr lang="en-US" sz="1300" dirty="0">
                 <a:solidFill>
                   <a:schemeClr val="bg1"/>
                 </a:solidFill>
@@ -8260,7 +8426,7 @@
               </a:rPr>
               <a:t>npx nx add @alfresco/aca-generators</a:t>
             </a:r>
-            <a:endParaRPr lang="en-US" sz="1400" dirty="0"/>
+            <a:endParaRPr lang="en-US" sz="1300" dirty="0"/>
           </a:p>
           <a:p>
             <a:pPr indent="0" marL="0">
@@ -8270,7 +8436,7 @@
               <a:buNone/>
             </a:pPr>
             <a:r>
-              <a:rPr lang="en-US" sz="1400" dirty="0">
+              <a:rPr lang="en-US" sz="1300" dirty="0">
                 <a:solidFill>
                   <a:schemeClr val="bg1"/>
                 </a:solidFill>
@@ -8278,9 +8444,9 @@
                 <a:ea typeface="Courier New" pitchFamily="34" charset="-122"/>
                 <a:cs typeface="Courier New" pitchFamily="34" charset="-120"/>
               </a:rPr>
-              <a:t>npx nx g `</a:t>
-            </a:r>
-            <a:endParaRPr lang="en-US" sz="1400" dirty="0"/>
+              <a:t>npx nx g @alfresco/aca-generators:aca-extension `</a:t>
+            </a:r>
+            <a:endParaRPr lang="en-US" sz="1300" dirty="0"/>
           </a:p>
           <a:p>
             <a:pPr indent="0" marL="0">
@@ -8290,7 +8456,7 @@
               <a:buNone/>
             </a:pPr>
             <a:r>
-              <a:rPr lang="en-US" sz="1400" dirty="0">
+              <a:rPr lang="en-US" sz="1300" dirty="0">
                 <a:solidFill>
                   <a:schemeClr val="bg1"/>
                 </a:solidFill>
@@ -8298,9 +8464,49 @@
                 <a:ea typeface="Courier New" pitchFamily="34" charset="-122"/>
                 <a:cs typeface="Courier New" pitchFamily="34" charset="-120"/>
               </a:rPr>
-              <a:t>  @alfresco/aca-generators:aca-extension</a:t>
-            </a:r>
-            <a:endParaRPr lang="en-US" sz="1400" dirty="0"/>
+              <a:t>  --name=ext --directory=ext</a:t>
+            </a:r>
+            <a:endParaRPr lang="en-US" sz="1300" dirty="0"/>
+          </a:p>
+          <a:p>
+            <a:pPr indent="0" marL="0">
+              <a:spcAft>
+                <a:spcPts val="200"/>
+              </a:spcAft>
+              <a:buNone/>
+            </a:pPr>
+            <a:r>
+              <a:rPr lang="en-US" sz="1300" dirty="0">
+                <a:solidFill>
+                  <a:schemeClr val="bg1"/>
+                </a:solidFill>
+                <a:latin typeface="Courier New" pitchFamily="34" charset="0"/>
+                <a:ea typeface="Courier New" pitchFamily="34" charset="-122"/>
+                <a:cs typeface="Courier New" pitchFamily="34" charset="-120"/>
+              </a:rPr>
+              <a:t>npm install</a:t>
+            </a:r>
+            <a:endParaRPr lang="en-US" sz="1300" dirty="0"/>
+          </a:p>
+          <a:p>
+            <a:pPr indent="0" marL="0">
+              <a:spcAft>
+                <a:spcPts val="200"/>
+              </a:spcAft>
+              <a:buNone/>
+            </a:pPr>
+            <a:r>
+              <a:rPr lang="en-US" sz="1300" dirty="0">
+                <a:solidFill>
+                  <a:schemeClr val="bg1"/>
+                </a:solidFill>
+                <a:latin typeface="Courier New" pitchFamily="34" charset="0"/>
+                <a:ea typeface="Courier New" pitchFamily="34" charset="-122"/>
+                <a:cs typeface="Courier New" pitchFamily="34" charset="-120"/>
+              </a:rPr>
+              <a:t>npm start</a:t>
+            </a:r>
+            <a:endParaRPr lang="en-US" sz="1300" dirty="0"/>
           </a:p>
         </p:txBody>
       </p:sp>
@@ -8312,8 +8518,8 @@
         </p:nvSpPr>
         <p:spPr>
           <a:xfrm>
-            <a:off x="6675120" y="4069080"/>
-            <a:ext cx="4937760" cy="1463040"/>
+            <a:off x="6309360" y="4251960"/>
+            <a:ext cx="5303520" cy="1371600"/>
           </a:xfrm>
           <a:prstGeom prst="rect">
             <a:avLst/>
@@ -8338,7 +8544,7 @@
                   <a:schemeClr val="tx1"/>
                 </a:solidFill>
               </a:rPr>
-              <a:t>Crea projects/ext y registra la librería</a:t>
+              <a:t>Crea projects/ext y la registra en extensions.module.ts</a:t>
             </a:r>
             <a:endParaRPr lang="en-US" sz="1500" dirty="0"/>
           </a:p>
@@ -8356,7 +8562,7 @@
                   <a:schemeClr val="tx1"/>
                 </a:solidFill>
               </a:rPr>
-              <a:t>Nuevo ítem de menú que lleva a #/ext</a:t>
+              <a:t>Agrega un ítem de menú que lleva a #/ext</a:t>
             </a:r>
             <a:endParaRPr lang="en-US" sz="1500" dirty="0"/>
           </a:p>
@@ -8388,8 +8594,8 @@
         </p:nvSpPr>
         <p:spPr>
           <a:xfrm>
-            <a:off x="6675120" y="5623560"/>
-            <a:ext cx="4937760" cy="411480"/>
+            <a:off x="6309360" y="5669280"/>
+            <a:ext cx="5303520" cy="365760"/>
           </a:xfrm>
           <a:prstGeom prst="rect">
             <a:avLst/>
@@ -8410,7 +8616,7 @@
                   <a:schemeClr val="accent6"/>
                 </a:solidFill>
               </a:rPr>
-              <a:t>Pasos del README del generador; no probado en el curso.</a:t>
+              <a:t>Comprobado: genera, instala y compila (nx build content-ce).</a:t>
             </a:r>
             <a:endParaRPr lang="en-US" sz="1300" dirty="0"/>
           </a:p>
@@ -8774,12 +8980,12 @@
         </p:nvSpPr>
         <p:spPr>
           <a:xfrm>
-            <a:off x="548640" y="1417320"/>
-            <a:ext cx="7589520" cy="4663440"/>
+            <a:off x="548640" y="1371600"/>
+            <a:ext cx="11064240" cy="3200400"/>
           </a:xfrm>
           <a:prstGeom prst="roundRect">
             <a:avLst>
-              <a:gd name="adj" fmla="val 1569"/>
+              <a:gd name="adj" fmla="val 2286"/>
             </a:avLst>
           </a:prstGeom>
           <a:solidFill>
@@ -8796,8 +9002,8 @@
         </p:nvSpPr>
         <p:spPr>
           <a:xfrm>
-            <a:off x="777240" y="1581912"/>
-            <a:ext cx="7132320" cy="4334256"/>
+            <a:off x="777240" y="1536192"/>
+            <a:ext cx="10607040" cy="2871216"/>
           </a:xfrm>
           <a:prstGeom prst="rect">
             <a:avLst/>
@@ -8824,7 +9030,7 @@
                 <a:ea typeface="Courier New" pitchFamily="34" charset="-122"/>
                 <a:cs typeface="Courier New" pitchFamily="34" charset="-120"/>
               </a:rPr>
-              <a:t>nvm use 24                      </a:t>
+              <a:t>nvm use 24                                  </a:t>
             </a:r>
             <a:pPr indent="0" marL="0">
               <a:spcAft>
@@ -8861,7 +9067,7 @@
                 <a:ea typeface="Courier New" pitchFamily="34" charset="-122"/>
                 <a:cs typeface="Courier New" pitchFamily="34" charset="-120"/>
               </a:rPr>
-              <a:t>npx @angular/cli@latest new mi-app `</a:t>
+              <a:t>npx @angular/cli@latest new mi-app --style=scss --ssr=false --ai-config=none</a:t>
             </a:r>
             <a:endParaRPr lang="en-US" sz="1400" dirty="0"/>
           </a:p>
@@ -8881,7 +9087,7 @@
                 <a:ea typeface="Courier New" pitchFamily="34" charset="-122"/>
                 <a:cs typeface="Courier New" pitchFamily="34" charset="-120"/>
               </a:rPr>
-              <a:t>  --style=scss --ssr=false --ai-config=none</a:t>
+              <a:t>cd mi-app</a:t>
             </a:r>
             <a:endParaRPr lang="en-US" sz="1400" dirty="0"/>
           </a:p>
@@ -8901,7 +9107,7 @@
                 <a:ea typeface="Courier New" pitchFamily="34" charset="-122"/>
                 <a:cs typeface="Courier New" pitchFamily="34" charset="-120"/>
               </a:rPr>
-              <a:t>cd mi-app</a:t>
+              <a:t>Set-Content .npmrc 'legacy-peer-deps=true' -Encoding ascii</a:t>
             </a:r>
             <a:endParaRPr lang="en-US" sz="1400" dirty="0"/>
           </a:p>
@@ -8921,7 +9127,7 @@
                 <a:ea typeface="Courier New" pitchFamily="34" charset="-122"/>
                 <a:cs typeface="Courier New" pitchFamily="34" charset="-120"/>
               </a:rPr>
-              <a:t>"legacy-peer-deps=true" | Out-File .npmrc</a:t>
+              <a:t>npx ng add @angular/material@22 --skip-confirmation --defaults</a:t>
             </a:r>
             <a:endParaRPr lang="en-US" sz="1400" dirty="0"/>
           </a:p>
@@ -8941,7 +9147,7 @@
                 <a:ea typeface="Courier New" pitchFamily="34" charset="-122"/>
                 <a:cs typeface="Courier New" pitchFamily="34" charset="-120"/>
               </a:rPr>
-              <a:t>npx ng add @angular/material@22</a:t>
+              <a:t>npm install @alfresco/adf-core@9.0.0 @alfresco/adf-extensions@9.0.0 `</a:t>
             </a:r>
             <a:endParaRPr lang="en-US" sz="1400" dirty="0"/>
           </a:p>
@@ -8961,7 +9167,7 @@
                 <a:ea typeface="Courier New" pitchFamily="34" charset="-122"/>
                 <a:cs typeface="Courier New" pitchFamily="34" charset="-120"/>
               </a:rPr>
-              <a:t>npm install @alfresco/adf-core@9.0.0 `</a:t>
+              <a:t>  @alfresco/js-api@10.0.0 @ngx-translate/core@17 @mat-datetimepicker/core@12 `</a:t>
             </a:r>
             <a:endParaRPr lang="en-US" sz="1400" dirty="0"/>
           </a:p>
@@ -8981,7 +9187,7 @@
                 <a:ea typeface="Courier New" pitchFamily="34" charset="-122"/>
                 <a:cs typeface="Courier New" pitchFamily="34" charset="-120"/>
               </a:rPr>
-              <a:t>  @alfresco/adf-extensions@9.0.0 `</a:t>
+              <a:t>  @angular/material-date-fns-adapter@22 @angular/animations@22 date-fns@2 `</a:t>
             </a:r>
             <a:endParaRPr lang="en-US" sz="1400" dirty="0"/>
           </a:p>
@@ -9001,27 +9207,104 @@
                 <a:ea typeface="Courier New" pitchFamily="34" charset="-122"/>
                 <a:cs typeface="Courier New" pitchFamily="34" charset="-120"/>
               </a:rPr>
-              <a:t>  @alfresco/js-api@10.0.0 @ngx-translate/core@17 `</a:t>
+              <a:t>  angular-oauth2-oidc@19 minimatch@10 pdfjs-dist cropperjs zone.js</a:t>
             </a:r>
             <a:endParaRPr lang="en-US" sz="1400" dirty="0"/>
           </a:p>
-          <a:p>
-            <a:pPr indent="0" marL="0">
-              <a:spcAft>
-                <a:spcPts val="200"/>
-              </a:spcAft>
-              <a:buNone/>
-            </a:pPr>
-            <a:r>
-              <a:rPr lang="en-US" sz="1400" dirty="0">
-                <a:solidFill>
-                  <a:schemeClr val="bg1"/>
+        </p:txBody>
+      </p:sp>
+      <p:sp>
+        <p:nvSpPr>
+          <p:cNvPr id="5" name="manwhy-legacy-peer-deps"/>
+          <p:cNvSpPr/>
+          <p:nvPr/>
+        </p:nvSpPr>
+        <p:spPr>
+          <a:xfrm>
+            <a:off x="548640" y="4800600"/>
+            <a:ext cx="3566160" cy="1280160"/>
+          </a:xfrm>
+          <a:prstGeom prst="roundRect">
+            <a:avLst>
+              <a:gd name="adj" fmla="val 7143"/>
+            </a:avLst>
+          </a:prstGeom>
+          <a:solidFill>
+            <a:schemeClr val="bg2"/>
+          </a:solidFill>
+          <a:ln/>
+        </p:spPr>
+      </p:sp>
+      <p:sp>
+        <p:nvSpPr>
+          <p:cNvPr id="6" name="Text 4"/>
+          <p:cNvSpPr txBox="1"/>
+          <p:nvPr/>
+        </p:nvSpPr>
+        <p:spPr>
+          <a:xfrm>
+            <a:off x="731520" y="4892040"/>
+            <a:ext cx="3200400" cy="411480"/>
+          </a:xfrm>
+          <a:prstGeom prst="rect">
+            <a:avLst/>
+          </a:prstGeom>
+          <a:noFill/>
+          <a:ln/>
+        </p:spPr>
+        <p:txBody>
+          <a:bodyPr wrap="square" lIns="0" tIns="0" rIns="0" bIns="0" rtlCol="0" anchor="ctr"/>
+          <a:lstStyle/>
+          <a:p>
+            <a:pPr indent="0" marL="0">
+              <a:buNone/>
+            </a:pPr>
+            <a:r>
+              <a:rPr lang="en-US" sz="1600" b="1" dirty="0">
+                <a:solidFill>
+                  <a:schemeClr val="accent1"/>
                 </a:solidFill>
                 <a:latin typeface="Courier New" pitchFamily="34" charset="0"/>
                 <a:ea typeface="Courier New" pitchFamily="34" charset="-122"/>
                 <a:cs typeface="Courier New" pitchFamily="34" charset="-120"/>
               </a:rPr>
-              <a:t>  @angular/animations@22 zone.js ...</a:t>
+              <a:t>legacy-peer-deps</a:t>
+            </a:r>
+            <a:endParaRPr lang="en-US" sz="1600" dirty="0"/>
+          </a:p>
+        </p:txBody>
+      </p:sp>
+      <p:sp>
+        <p:nvSpPr>
+          <p:cNvPr id="7" name="Text 5"/>
+          <p:cNvSpPr txBox="1"/>
+          <p:nvPr/>
+        </p:nvSpPr>
+        <p:spPr>
+          <a:xfrm>
+            <a:off x="731520" y="5303520"/>
+            <a:ext cx="3200400" cy="685800"/>
+          </a:xfrm>
+          <a:prstGeom prst="rect">
+            <a:avLst/>
+          </a:prstGeom>
+          <a:noFill/>
+          <a:ln/>
+        </p:spPr>
+        <p:txBody>
+          <a:bodyPr wrap="square" lIns="0" tIns="0" rIns="0" bIns="0" rtlCol="0" anchor="t"/>
+          <a:lstStyle/>
+          <a:p>
+            <a:pPr indent="0" marL="0">
+              <a:buNone/>
+            </a:pPr>
+            <a:r>
+              <a:rPr lang="en-US" sz="1400" dirty="0">
+                <a:solidFill>
+                  <a:schemeClr val="tx1"/>
+                </a:solidFill>
+              </a:rPr>
+              <a:t>evita ERESOLVE: los peers de ADF están desalineados</a:t>
             </a:r>
             <a:endParaRPr lang="en-US" sz="1400" dirty="0"/>
           </a:p>
@@ -9029,18 +9312,18 @@
       </p:sp>
       <p:sp>
         <p:nvSpPr>
-          <p:cNvPr id="5" name="manwhy-legacy-peer-deps"/>
+          <p:cNvPr id="8" name="manwhy-ng add material"/>
           <p:cNvSpPr/>
           <p:nvPr/>
         </p:nvSpPr>
         <p:spPr>
           <a:xfrm>
-            <a:off x="8503920" y="1417320"/>
-            <a:ext cx="3108960" cy="1417320"/>
+            <a:off x="4297680" y="4800600"/>
+            <a:ext cx="3566160" cy="1280160"/>
           </a:xfrm>
           <a:prstGeom prst="roundRect">
             <a:avLst>
-              <a:gd name="adj" fmla="val 6452"/>
+              <a:gd name="adj" fmla="val 7143"/>
             </a:avLst>
           </a:prstGeom>
           <a:solidFill>
@@ -9051,14 +9334,14 @@
       </p:sp>
       <p:sp>
         <p:nvSpPr>
-          <p:cNvPr id="6" name="Text 4"/>
+          <p:cNvPr id="9" name="Text 7"/>
           <p:cNvSpPr txBox="1"/>
           <p:nvPr/>
         </p:nvSpPr>
         <p:spPr>
           <a:xfrm>
-            <a:off x="8686800" y="1554480"/>
-            <a:ext cx="2743200" cy="411480"/>
+            <a:off x="4480560" y="4892040"/>
+            <a:ext cx="3200400" cy="411480"/>
           </a:xfrm>
           <a:prstGeom prst="rect">
             <a:avLst/>
@@ -9082,7 +9365,7 @@
                 <a:ea typeface="Courier New" pitchFamily="34" charset="-122"/>
                 <a:cs typeface="Courier New" pitchFamily="34" charset="-120"/>
               </a:rPr>
-              <a:t>legacy-peer-deps</a:t>
+              <a:t>ng add material</a:t>
             </a:r>
             <a:endParaRPr lang="en-US" sz="1600" dirty="0"/>
           </a:p>
@@ -9090,14 +9373,14 @@
       </p:sp>
       <p:sp>
         <p:nvSpPr>
-          <p:cNvPr id="7" name="Text 5"/>
+          <p:cNvPr id="10" name="Text 8"/>
           <p:cNvSpPr txBox="1"/>
           <p:nvPr/>
         </p:nvSpPr>
         <p:spPr>
           <a:xfrm>
-            <a:off x="8686800" y="1965960"/>
-            <a:ext cx="2743200" cy="731520"/>
+            <a:off x="4480560" y="5303520"/>
+            <a:ext cx="3200400" cy="685800"/>
           </a:xfrm>
           <a:prstGeom prst="rect">
             <a:avLst/>
@@ -9118,7 +9401,7 @@
                   <a:schemeClr val="tx1"/>
                 </a:solidFill>
               </a:rPr>
-              <a:t>peers de ADF desalineados (ERESOLVE)</a:t>
+              <a:t>tema de Material, fuente Roboto y Material Icons</a:t>
             </a:r>
             <a:endParaRPr lang="en-US" sz="1400" dirty="0"/>
           </a:p>
@@ -9126,18 +9409,18 @@
       </p:sp>
       <p:sp>
         <p:nvSpPr>
-          <p:cNvPr id="8" name="manwhy-ng add material"/>
+          <p:cNvPr id="11" name="manwhy-zone.js"/>
           <p:cNvSpPr/>
           <p:nvPr/>
         </p:nvSpPr>
         <p:spPr>
           <a:xfrm>
-            <a:off x="8503920" y="3040380"/>
-            <a:ext cx="3108960" cy="1417320"/>
+            <a:off x="8046720" y="4800600"/>
+            <a:ext cx="3566160" cy="1280160"/>
           </a:xfrm>
           <a:prstGeom prst="roundRect">
             <a:avLst>
-              <a:gd name="adj" fmla="val 6452"/>
+              <a:gd name="adj" fmla="val 7143"/>
             </a:avLst>
           </a:prstGeom>
           <a:solidFill>
@@ -9148,14 +9431,14 @@
       </p:sp>
       <p:sp>
         <p:nvSpPr>
-          <p:cNvPr id="9" name="Text 7"/>
+          <p:cNvPr id="12" name="Text 10"/>
           <p:cNvSpPr txBox="1"/>
           <p:nvPr/>
         </p:nvSpPr>
         <p:spPr>
           <a:xfrm>
-            <a:off x="8686800" y="3177540"/>
-            <a:ext cx="2743200" cy="411480"/>
+            <a:off x="8229600" y="4892040"/>
+            <a:ext cx="3200400" cy="411480"/>
           </a:xfrm>
           <a:prstGeom prst="rect">
             <a:avLst/>
@@ -9179,7 +9462,7 @@
                 <a:ea typeface="Courier New" pitchFamily="34" charset="-122"/>
                 <a:cs typeface="Courier New" pitchFamily="34" charset="-120"/>
               </a:rPr>
-              <a:t>ng add material</a:t>
+              <a:t>zone.js</a:t>
             </a:r>
             <a:endParaRPr lang="en-US" sz="1600" dirty="0"/>
           </a:p>
@@ -9187,14 +9470,14 @@
       </p:sp>
       <p:sp>
         <p:nvSpPr>
-          <p:cNvPr id="10" name="Text 8"/>
+          <p:cNvPr id="13" name="Text 11"/>
           <p:cNvSpPr txBox="1"/>
           <p:nvPr/>
         </p:nvSpPr>
         <p:spPr>
           <a:xfrm>
-            <a:off x="8686800" y="3589020"/>
-            <a:ext cx="2743200" cy="731520"/>
+            <a:off x="8229600" y="5303520"/>
+            <a:ext cx="3200400" cy="685800"/>
           </a:xfrm>
           <a:prstGeom prst="rect">
             <a:avLst/>
@@ -9215,104 +9498,7 @@
                   <a:schemeClr val="tx1"/>
                 </a:solidFill>
               </a:rPr>
-              <a:t>tema, Roboto y Material Icons</a:t>
-            </a:r>
-            <a:endParaRPr lang="en-US" sz="1400" dirty="0"/>
-          </a:p>
-        </p:txBody>
-      </p:sp>
-      <p:sp>
-        <p:nvSpPr>
-          <p:cNvPr id="11" name="manwhy-zone.js"/>
-          <p:cNvSpPr/>
-          <p:nvPr/>
-        </p:nvSpPr>
-        <p:spPr>
-          <a:xfrm>
-            <a:off x="8503920" y="4663440"/>
-            <a:ext cx="3108960" cy="1417320"/>
-          </a:xfrm>
-          <a:prstGeom prst="roundRect">
-            <a:avLst>
-              <a:gd name="adj" fmla="val 6452"/>
-            </a:avLst>
-          </a:prstGeom>
-          <a:solidFill>
-            <a:schemeClr val="bg2"/>
-          </a:solidFill>
-          <a:ln/>
-        </p:spPr>
-      </p:sp>
-      <p:sp>
-        <p:nvSpPr>
-          <p:cNvPr id="12" name="Text 10"/>
-          <p:cNvSpPr txBox="1"/>
-          <p:nvPr/>
-        </p:nvSpPr>
-        <p:spPr>
-          <a:xfrm>
-            <a:off x="8686800" y="4800600"/>
-            <a:ext cx="2743200" cy="411480"/>
-          </a:xfrm>
-          <a:prstGeom prst="rect">
-            <a:avLst/>
-          </a:prstGeom>
-          <a:noFill/>
-          <a:ln/>
-        </p:spPr>
-        <p:txBody>
-          <a:bodyPr wrap="square" lIns="0" tIns="0" rIns="0" bIns="0" rtlCol="0" anchor="ctr"/>
-          <a:lstStyle/>
-          <a:p>
-            <a:pPr indent="0" marL="0">
-              <a:buNone/>
-            </a:pPr>
-            <a:r>
-              <a:rPr lang="en-US" sz="1600" b="1" dirty="0">
-                <a:solidFill>
-                  <a:schemeClr val="accent1"/>
-                </a:solidFill>
-                <a:latin typeface="Courier New" pitchFamily="34" charset="0"/>
-                <a:ea typeface="Courier New" pitchFamily="34" charset="-122"/>
-                <a:cs typeface="Courier New" pitchFamily="34" charset="-120"/>
-              </a:rPr>
-              <a:t>zone.js</a:t>
-            </a:r>
-            <a:endParaRPr lang="en-US" sz="1600" dirty="0"/>
-          </a:p>
-        </p:txBody>
-      </p:sp>
-      <p:sp>
-        <p:nvSpPr>
-          <p:cNvPr id="13" name="Text 11"/>
-          <p:cNvSpPr txBox="1"/>
-          <p:nvPr/>
-        </p:nvSpPr>
-        <p:spPr>
-          <a:xfrm>
-            <a:off x="8686800" y="5212080"/>
-            <a:ext cx="2743200" cy="731520"/>
-          </a:xfrm>
-          <a:prstGeom prst="rect">
-            <a:avLst/>
-          </a:prstGeom>
-          <a:noFill/>
-          <a:ln/>
-        </p:spPr>
-        <p:txBody>
-          <a:bodyPr wrap="square" lIns="0" tIns="0" rIns="0" bIns="0" rtlCol="0" anchor="t"/>
-          <a:lstStyle/>
-          <a:p>
-            <a:pPr indent="0" marL="0">
-              <a:buNone/>
-            </a:pPr>
-            <a:r>
-              <a:rPr lang="en-US" sz="1400" dirty="0">
-                <a:solidFill>
-                  <a:schemeClr val="tx1"/>
-                </a:solidFill>
-              </a:rPr>
-              <a:t>Angular 21+ nace sin zone.js</a:t>
+              <a:t>Angular 21+ crea el proyecto sin zone.js y ADF lo usa</a:t>
             </a:r>
             <a:endParaRPr lang="en-US" sz="1400" dirty="0"/>
           </a:p>
@@ -10612,7 +10798,7 @@
                   <a:schemeClr val="tx2"/>
                 </a:solidFill>
               </a:rPr>
-              <a:t>Angular 22: configurar ADF 9</a:t>
+              <a:t>Angular 22: configurar ADF 9 en el código</a:t>
             </a:r>
             <a:endParaRPr lang="en-US" sz="3400" dirty="0"/>
           </a:p>
@@ -10620,18 +10806,18 @@
       </p:sp>
       <p:sp>
         <p:nvSpPr>
-          <p:cNvPr id="3" name="manconfig-fondo"/>
+          <p:cNvPr id="3" name="mancfg-fondo"/>
           <p:cNvSpPr/>
           <p:nvPr/>
         </p:nvSpPr>
         <p:spPr>
           <a:xfrm>
-            <a:off x="548640" y="1417320"/>
-            <a:ext cx="6583680" cy="4663440"/>
+            <a:off x="548640" y="1371600"/>
+            <a:ext cx="11064240" cy="2514600"/>
           </a:xfrm>
           <a:prstGeom prst="roundRect">
             <a:avLst>
-              <a:gd name="adj" fmla="val 1569"/>
+              <a:gd name="adj" fmla="val 2909"/>
             </a:avLst>
           </a:prstGeom>
           <a:solidFill>
@@ -10642,14 +10828,14 @@
       </p:sp>
       <p:sp>
         <p:nvSpPr>
-          <p:cNvPr id="4" name="manconfig-codigo"/>
+          <p:cNvPr id="4" name="mancfg-codigo"/>
           <p:cNvSpPr txBox="1"/>
           <p:nvPr/>
         </p:nvSpPr>
         <p:spPr>
           <a:xfrm>
-            <a:off x="777240" y="1581912"/>
-            <a:ext cx="6126480" cy="4334256"/>
+            <a:off x="777240" y="1536192"/>
+            <a:ext cx="10607040" cy="2185416"/>
           </a:xfrm>
           <a:prstGeom prst="rect">
             <a:avLst/>
@@ -10668,9 +10854,9 @@
               <a:buNone/>
             </a:pPr>
             <a:r>
-              <a:rPr lang="en-US" sz="1400" dirty="0">
-                <a:solidFill>
-                  <a:schemeClr val="bg1"/>
+              <a:rPr lang="en-US" sz="1200" dirty="0">
+                <a:solidFill>
+                  <a:schemeClr val="accent1"/>
                 </a:solidFill>
                 <a:latin typeface="Courier New" pitchFamily="34" charset="0"/>
                 <a:ea typeface="Courier New" pitchFamily="34" charset="-122"/>
@@ -10678,7 +10864,7 @@
               </a:rPr>
               <a:t>// src/app/app.config.ts</a:t>
             </a:r>
-            <a:endParaRPr lang="en-US" sz="1400" dirty="0"/>
+            <a:endParaRPr lang="en-US" sz="1200" dirty="0"/>
           </a:p>
           <a:p>
             <a:pPr indent="0" marL="0">
@@ -10688,7 +10874,7 @@
               <a:buNone/>
             </a:pPr>
             <a:r>
-              <a:rPr lang="en-US" sz="1400" dirty="0">
+              <a:rPr lang="en-US" sz="1200" dirty="0">
                 <a:solidFill>
                   <a:schemeClr val="bg1"/>
                 </a:solidFill>
@@ -10696,9 +10882,9 @@
                 <a:ea typeface="Courier New" pitchFamily="34" charset="-122"/>
                 <a:cs typeface="Courier New" pitchFamily="34" charset="-120"/>
               </a:rPr>
-              <a:t>export const appConfig: ApplicationConfig = {</a:t>
-            </a:r>
-            <a:endParaRPr lang="en-US" sz="1400" dirty="0"/>
+              <a:t>import { ApplicationConfig, provideZoneChangeDetection } from '@angular/core';</a:t>
+            </a:r>
+            <a:endParaRPr lang="en-US" sz="1200" dirty="0"/>
           </a:p>
           <a:p>
             <a:pPr indent="0" marL="0">
@@ -10708,7 +10894,7 @@
               <a:buNone/>
             </a:pPr>
             <a:r>
-              <a:rPr lang="en-US" sz="1400" dirty="0">
+              <a:rPr lang="en-US" sz="1200" dirty="0">
                 <a:solidFill>
                   <a:schemeClr val="bg1"/>
                 </a:solidFill>
@@ -10716,9 +10902,9 @@
                 <a:ea typeface="Courier New" pitchFamily="34" charset="-122"/>
                 <a:cs typeface="Courier New" pitchFamily="34" charset="-120"/>
               </a:rPr>
-              <a:t>  providers: [</a:t>
-            </a:r>
-            <a:endParaRPr lang="en-US" sz="1400" dirty="0"/>
+              <a:t>import { provideRouter } from '@angular/router';</a:t>
+            </a:r>
+            <a:endParaRPr lang="en-US" sz="1200" dirty="0"/>
           </a:p>
           <a:p>
             <a:pPr indent="0" marL="0">
@@ -10728,7 +10914,7 @@
               <a:buNone/>
             </a:pPr>
             <a:r>
-              <a:rPr lang="en-US" sz="1400" dirty="0">
+              <a:rPr lang="en-US" sz="1200" dirty="0">
                 <a:solidFill>
                   <a:schemeClr val="bg1"/>
                 </a:solidFill>
@@ -10736,9 +10922,9 @@
                 <a:ea typeface="Courier New" pitchFamily="34" charset="-122"/>
                 <a:cs typeface="Courier New" pitchFamily="34" charset="-120"/>
               </a:rPr>
-              <a:t>    provideZoneChangeDetection(),</a:t>
-            </a:r>
-            <a:endParaRPr lang="en-US" sz="1400" dirty="0"/>
+              <a:t>import { provideAnimations } from '@angular/platform-browser/animations';</a:t>
+            </a:r>
+            <a:endParaRPr lang="en-US" sz="1200" dirty="0"/>
           </a:p>
           <a:p>
             <a:pPr indent="0" marL="0">
@@ -10748,7 +10934,7 @@
               <a:buNone/>
             </a:pPr>
             <a:r>
-              <a:rPr lang="en-US" sz="1400" dirty="0">
+              <a:rPr lang="en-US" sz="1200" dirty="0">
                 <a:solidFill>
                   <a:schemeClr val="bg1"/>
                 </a:solidFill>
@@ -10756,9 +10942,9 @@
                 <a:ea typeface="Courier New" pitchFamily="34" charset="-122"/>
                 <a:cs typeface="Courier New" pitchFamily="34" charset="-120"/>
               </a:rPr>
-              <a:t>    provideRouter(routes),</a:t>
-            </a:r>
-            <a:endParaRPr lang="en-US" sz="1400" dirty="0"/>
+              <a:t>import { provideAppConfig, provideCoreAuth, provideI18N } from '@alfresco/adf-core';</a:t>
+            </a:r>
+            <a:endParaRPr lang="en-US" sz="1200" dirty="0"/>
           </a:p>
           <a:p>
             <a:pPr indent="0" marL="0">
@@ -10768,7 +10954,7 @@
               <a:buNone/>
             </a:pPr>
             <a:r>
-              <a:rPr lang="en-US" sz="1400" dirty="0">
+              <a:rPr lang="en-US" sz="1200" dirty="0">
                 <a:solidFill>
                   <a:schemeClr val="bg1"/>
                 </a:solidFill>
@@ -10776,9 +10962,9 @@
                 <a:ea typeface="Courier New" pitchFamily="34" charset="-122"/>
                 <a:cs typeface="Courier New" pitchFamily="34" charset="-120"/>
               </a:rPr>
-              <a:t>    provideAnimations(),</a:t>
-            </a:r>
-            <a:endParaRPr lang="en-US" sz="1400" dirty="0"/>
+              <a:t> </a:t>
+            </a:r>
+            <a:endParaRPr lang="en-US" sz="1200" dirty="0"/>
           </a:p>
           <a:p>
             <a:pPr indent="0" marL="0">
@@ -10788,7 +10974,7 @@
               <a:buNone/>
             </a:pPr>
             <a:r>
-              <a:rPr lang="en-US" sz="1400" dirty="0">
+              <a:rPr lang="en-US" sz="1200" dirty="0">
                 <a:solidFill>
                   <a:schemeClr val="bg1"/>
                 </a:solidFill>
@@ -10796,9 +10982,9 @@
                 <a:ea typeface="Courier New" pitchFamily="34" charset="-122"/>
                 <a:cs typeface="Courier New" pitchFamily="34" charset="-120"/>
               </a:rPr>
-              <a:t>    provideAppConfig(),   // /app.config.json</a:t>
-            </a:r>
-            <a:endParaRPr lang="en-US" sz="1400" dirty="0"/>
+              <a:t>export const appConfig: ApplicationConfig = {</a:t>
+            </a:r>
+            <a:endParaRPr lang="en-US" sz="1200" dirty="0"/>
           </a:p>
           <a:p>
             <a:pPr indent="0" marL="0">
@@ -10808,7 +10994,7 @@
               <a:buNone/>
             </a:pPr>
             <a:r>
-              <a:rPr lang="en-US" sz="1400" dirty="0">
+              <a:rPr lang="en-US" sz="1200" dirty="0">
                 <a:solidFill>
                   <a:schemeClr val="bg1"/>
                 </a:solidFill>
@@ -10816,9 +11002,9 @@
                 <a:ea typeface="Courier New" pitchFamily="34" charset="-122"/>
                 <a:cs typeface="Courier New" pitchFamily="34" charset="-120"/>
               </a:rPr>
-              <a:t>    provideI18N(),        // traducciones</a:t>
-            </a:r>
-            <a:endParaRPr lang="en-US" sz="1400" dirty="0"/>
+              <a:t>  providers: [provideZoneChangeDetection(), provideRouter([]), provideAnimations(),</a:t>
+            </a:r>
+            <a:endParaRPr lang="en-US" sz="1200" dirty="0"/>
           </a:p>
           <a:p>
             <a:pPr indent="0" marL="0">
@@ -10828,7 +11014,7 @@
               <a:buNone/>
             </a:pPr>
             <a:r>
-              <a:rPr lang="en-US" sz="1400" dirty="0">
+              <a:rPr lang="en-US" sz="1200" dirty="0">
                 <a:solidFill>
                   <a:schemeClr val="bg1"/>
                 </a:solidFill>
@@ -10836,9 +11022,9 @@
                 <a:ea typeface="Courier New" pitchFamily="34" charset="-122"/>
                 <a:cs typeface="Courier New" pitchFamily="34" charset="-120"/>
               </a:rPr>
-              <a:t>    provideCoreAuth()     // BASIC u OAuth</a:t>
-            </a:r>
-            <a:endParaRPr lang="en-US" sz="1400" dirty="0"/>
+              <a:t>              provideAppConfig(), provideI18N(), provideCoreAuth()]</a:t>
+            </a:r>
+            <a:endParaRPr lang="en-US" sz="1200" dirty="0"/>
           </a:p>
           <a:p>
             <a:pPr indent="0" marL="0">
@@ -10848,7 +11034,7 @@
               <a:buNone/>
             </a:pPr>
             <a:r>
-              <a:rPr lang="en-US" sz="1400" dirty="0">
+              <a:rPr lang="en-US" sz="1200" dirty="0">
                 <a:solidFill>
                   <a:schemeClr val="bg1"/>
                 </a:solidFill>
@@ -10856,10 +11042,54 @@
                 <a:ea typeface="Courier New" pitchFamily="34" charset="-122"/>
                 <a:cs typeface="Courier New" pitchFamily="34" charset="-120"/>
               </a:rPr>
-              <a:t>  ]</a:t>
-            </a:r>
-            <a:endParaRPr lang="en-US" sz="1400" dirty="0"/>
-          </a:p>
+              <a:t>};</a:t>
+            </a:r>
+            <a:endParaRPr lang="en-US" sz="1200" dirty="0"/>
+          </a:p>
+        </p:txBody>
+      </p:sp>
+      <p:sp>
+        <p:nvSpPr>
+          <p:cNvPr id="5" name="mancmp-fondo"/>
+          <p:cNvSpPr/>
+          <p:nvPr/>
+        </p:nvSpPr>
+        <p:spPr>
+          <a:xfrm>
+            <a:off x="548640" y="4023360"/>
+            <a:ext cx="11064240" cy="2057400"/>
+          </a:xfrm>
+          <a:prstGeom prst="roundRect">
+            <a:avLst>
+              <a:gd name="adj" fmla="val 3556"/>
+            </a:avLst>
+          </a:prstGeom>
+          <a:solidFill>
+            <a:schemeClr val="tx2"/>
+          </a:solidFill>
+          <a:ln/>
+        </p:spPr>
+      </p:sp>
+      <p:sp>
+        <p:nvSpPr>
+          <p:cNvPr id="6" name="mancmp-codigo"/>
+          <p:cNvSpPr txBox="1"/>
+          <p:nvPr/>
+        </p:nvSpPr>
+        <p:spPr>
+          <a:xfrm>
+            <a:off x="777240" y="4187952"/>
+            <a:ext cx="10607040" cy="1728216"/>
+          </a:xfrm>
+          <a:prstGeom prst="rect">
+            <a:avLst/>
+          </a:prstGeom>
+          <a:noFill/>
+          <a:ln/>
+        </p:spPr>
+        <p:txBody>
+          <a:bodyPr wrap="square" lIns="0" tIns="0" rIns="0" bIns="0" rtlCol="0" anchor="t"/>
+          <a:lstStyle/>
           <a:p>
             <a:pPr indent="0" marL="0">
               <a:spcAft>
@@ -10868,413 +11098,137 @@
               <a:buNone/>
             </a:pPr>
             <a:r>
-              <a:rPr lang="en-US" sz="1400" dirty="0">
-                <a:solidFill>
-                  <a:schemeClr val="bg1"/>
+              <a:rPr lang="en-US" sz="1200" dirty="0">
+                <a:solidFill>
+                  <a:schemeClr val="accent1"/>
                 </a:solidFill>
                 <a:latin typeface="Courier New" pitchFamily="34" charset="0"/>
                 <a:ea typeface="Courier New" pitchFamily="34" charset="-122"/>
                 <a:cs typeface="Courier New" pitchFamily="34" charset="-120"/>
               </a:rPr>
-              <a:t>};</a:t>
-            </a:r>
-            <a:endParaRPr lang="en-US" sz="1400" dirty="0"/>
-          </a:p>
-        </p:txBody>
-      </p:sp>
-      <p:sp>
-        <p:nvSpPr>
-          <p:cNvPr id="5" name="Text 3"/>
-          <p:cNvSpPr txBox="1"/>
-          <p:nvPr/>
-        </p:nvSpPr>
-        <p:spPr>
-          <a:xfrm>
-            <a:off x="7498080" y="1417320"/>
-            <a:ext cx="4114800" cy="457200"/>
-          </a:xfrm>
-          <a:prstGeom prst="rect">
-            <a:avLst/>
-          </a:prstGeom>
-          <a:noFill/>
-          <a:ln/>
-        </p:spPr>
-        <p:txBody>
-          <a:bodyPr wrap="square" lIns="0" tIns="0" rIns="0" bIns="0" rtlCol="0" anchor="ctr"/>
-          <a:lstStyle/>
-          <a:p>
-            <a:pPr indent="0" marL="0">
-              <a:buNone/>
-            </a:pPr>
-            <a:r>
-              <a:rPr lang="en-US" sz="2000" b="1" dirty="0">
-                <a:solidFill>
-                  <a:schemeClr val="tx2"/>
-                </a:solidFill>
-              </a:rPr>
-              <a:t>Además</a:t>
-            </a:r>
-            <a:endParaRPr lang="en-US" sz="2000" dirty="0"/>
-          </a:p>
-        </p:txBody>
-      </p:sp>
-      <p:pic>
-        <p:nvPicPr>
-          <p:cNvPr id="6" name="check-2.15" descr="preencoded.png">    </p:cNvPr>
-          <p:cNvPicPr>
-            <a:picLocks noChangeAspect="1"/>
-          </p:cNvPicPr>
-          <p:nvPr/>
-        </p:nvPicPr>
-        <p:blipFill>
-          <a:blip r:embed="rId1"/>
-          <a:stretch>
-            <a:fillRect/>
-          </a:stretch>
-        </p:blipFill>
-        <p:spPr>
-          <a:xfrm>
-            <a:off x="7498080" y="2029968"/>
-            <a:ext cx="292608" cy="292608"/>
-          </a:xfrm>
-          <a:prstGeom prst="rect">
-            <a:avLst/>
-          </a:prstGeom>
-        </p:spPr>
-      </p:pic>
-      <p:sp>
-        <p:nvSpPr>
-          <p:cNvPr id="7" name="Text 4"/>
-          <p:cNvSpPr txBox="1"/>
-          <p:nvPr/>
-        </p:nvSpPr>
-        <p:spPr>
-          <a:xfrm>
-            <a:off x="7909560" y="1965960"/>
-            <a:ext cx="3703320" cy="420624"/>
-          </a:xfrm>
-          <a:prstGeom prst="rect">
-            <a:avLst/>
-          </a:prstGeom>
-          <a:noFill/>
-          <a:ln/>
-        </p:spPr>
-        <p:txBody>
-          <a:bodyPr wrap="square" lIns="0" tIns="0" rIns="0" bIns="0" rtlCol="0" anchor="ctr"/>
-          <a:lstStyle/>
-          <a:p>
-            <a:pPr indent="0" marL="0">
-              <a:buNone/>
-            </a:pPr>
-            <a:r>
-              <a:rPr lang="en-US" sz="1500" dirty="0">
-                <a:solidFill>
-                  <a:schemeClr val="tx1"/>
-                </a:solidFill>
-              </a:rPr>
-              <a:t>angular.json → polyfills: ["zone.js"]</a:t>
-            </a:r>
-            <a:endParaRPr lang="en-US" sz="1500" dirty="0"/>
-          </a:p>
-        </p:txBody>
-      </p:sp>
-      <p:pic>
-        <p:nvPicPr>
-          <p:cNvPr id="8" name="check-2.87" descr="preencoded.png">    </p:cNvPr>
-          <p:cNvPicPr>
-            <a:picLocks noChangeAspect="1"/>
-          </p:cNvPicPr>
-          <p:nvPr/>
-        </p:nvPicPr>
-        <p:blipFill>
-          <a:blip r:embed="rId2"/>
-          <a:stretch>
-            <a:fillRect/>
-          </a:stretch>
-        </p:blipFill>
-        <p:spPr>
-          <a:xfrm>
-            <a:off x="7498080" y="2688336"/>
-            <a:ext cx="292608" cy="292608"/>
-          </a:xfrm>
-          <a:prstGeom prst="rect">
-            <a:avLst/>
-          </a:prstGeom>
-        </p:spPr>
-      </p:pic>
-      <p:sp>
-        <p:nvSpPr>
-          <p:cNvPr id="9" name="Text 5"/>
-          <p:cNvSpPr txBox="1"/>
-          <p:nvPr/>
-        </p:nvSpPr>
-        <p:spPr>
-          <a:xfrm>
-            <a:off x="7909560" y="2624328"/>
-            <a:ext cx="3703320" cy="420624"/>
-          </a:xfrm>
-          <a:prstGeom prst="rect">
-            <a:avLst/>
-          </a:prstGeom>
-          <a:noFill/>
-          <a:ln/>
-        </p:spPr>
-        <p:txBody>
-          <a:bodyPr wrap="square" lIns="0" tIns="0" rIns="0" bIns="0" rtlCol="0" anchor="ctr"/>
-          <a:lstStyle/>
-          <a:p>
-            <a:pPr indent="0" marL="0">
-              <a:buNone/>
-            </a:pPr>
-            <a:r>
-              <a:rPr lang="en-US" sz="1500" dirty="0">
-                <a:solidFill>
-                  <a:schemeClr val="tx1"/>
-                </a:solidFill>
-              </a:rPr>
-              <a:t>public/app.config.json con ecmHost y authType</a:t>
-            </a:r>
-            <a:endParaRPr lang="en-US" sz="1500" dirty="0"/>
-          </a:p>
-        </p:txBody>
-      </p:sp>
-      <p:pic>
-        <p:nvPicPr>
-          <p:cNvPr id="10" name="check-3.59" descr="preencoded.png">    </p:cNvPr>
-          <p:cNvPicPr>
-            <a:picLocks noChangeAspect="1"/>
-          </p:cNvPicPr>
-          <p:nvPr/>
-        </p:nvPicPr>
-        <p:blipFill>
-          <a:blip r:embed="rId3"/>
-          <a:stretch>
-            <a:fillRect/>
-          </a:stretch>
-        </p:blipFill>
-        <p:spPr>
-          <a:xfrm>
-            <a:off x="7498080" y="3346704"/>
-            <a:ext cx="292608" cy="292608"/>
-          </a:xfrm>
-          <a:prstGeom prst="rect">
-            <a:avLst/>
-          </a:prstGeom>
-        </p:spPr>
-      </p:pic>
-      <p:sp>
-        <p:nvSpPr>
-          <p:cNvPr id="11" name="Text 6"/>
-          <p:cNvSpPr txBox="1"/>
-          <p:nvPr/>
-        </p:nvSpPr>
-        <p:spPr>
-          <a:xfrm>
-            <a:off x="7909560" y="3282696"/>
-            <a:ext cx="3703320" cy="420624"/>
-          </a:xfrm>
-          <a:prstGeom prst="rect">
-            <a:avLst/>
-          </a:prstGeom>
-          <a:noFill/>
-          <a:ln/>
-        </p:spPr>
-        <p:txBody>
-          <a:bodyPr wrap="square" lIns="0" tIns="0" rIns="0" bIns="0" rtlCol="0" anchor="ctr"/>
-          <a:lstStyle/>
-          <a:p>
-            <a:pPr indent="0" marL="0">
-              <a:buNone/>
-            </a:pPr>
-            <a:r>
-              <a:rPr lang="en-US" sz="1500" dirty="0">
-                <a:solidFill>
-                  <a:schemeClr val="tx1"/>
-                </a:solidFill>
-              </a:rPr>
-              <a:t>Assets de adf-core/bundles/assets</a:t>
-            </a:r>
-            <a:endParaRPr lang="en-US" sz="1500" dirty="0"/>
-          </a:p>
-        </p:txBody>
-      </p:sp>
-      <p:pic>
-        <p:nvPicPr>
-          <p:cNvPr id="12" name="check-4.31" descr="preencoded.png">    </p:cNvPr>
-          <p:cNvPicPr>
-            <a:picLocks noChangeAspect="1"/>
-          </p:cNvPicPr>
-          <p:nvPr/>
-        </p:nvPicPr>
-        <p:blipFill>
-          <a:blip r:embed="rId4"/>
-          <a:stretch>
-            <a:fillRect/>
-          </a:stretch>
-        </p:blipFill>
-        <p:spPr>
-          <a:xfrm>
-            <a:off x="7498080" y="4005072"/>
-            <a:ext cx="292608" cy="292608"/>
-          </a:xfrm>
-          <a:prstGeom prst="rect">
-            <a:avLst/>
-          </a:prstGeom>
-        </p:spPr>
-      </p:pic>
-      <p:sp>
-        <p:nvSpPr>
-          <p:cNvPr id="13" name="Text 7"/>
-          <p:cNvSpPr txBox="1"/>
-          <p:nvPr/>
-        </p:nvSpPr>
-        <p:spPr>
-          <a:xfrm>
-            <a:off x="7909560" y="3941064"/>
-            <a:ext cx="3703320" cy="420624"/>
-          </a:xfrm>
-          <a:prstGeom prst="rect">
-            <a:avLst/>
-          </a:prstGeom>
-          <a:noFill/>
-          <a:ln/>
-        </p:spPr>
-        <p:txBody>
-          <a:bodyPr wrap="square" lIns="0" tIns="0" rIns="0" bIns="0" rtlCol="0" anchor="ctr"/>
-          <a:lstStyle/>
-          <a:p>
-            <a:pPr indent="0" marL="0">
-              <a:buNone/>
-            </a:pPr>
-            <a:r>
-              <a:rPr lang="en-US" sz="1500" dirty="0">
-                <a:solidFill>
-                  <a:schemeClr val="tx1"/>
-                </a:solidFill>
-              </a:rPr>
-              <a:t>proxy.conf.json → /alfresco a :8080</a:t>
-            </a:r>
-            <a:endParaRPr lang="en-US" sz="1500" dirty="0"/>
-          </a:p>
-        </p:txBody>
-      </p:sp>
-      <p:pic>
-        <p:nvPicPr>
-          <p:cNvPr id="14" name="check-5.029999999999999" descr="preencoded.png">    </p:cNvPr>
-          <p:cNvPicPr>
-            <a:picLocks noChangeAspect="1"/>
-          </p:cNvPicPr>
-          <p:nvPr/>
-        </p:nvPicPr>
-        <p:blipFill>
-          <a:blip r:embed="rId5"/>
-          <a:stretch>
-            <a:fillRect/>
-          </a:stretch>
-        </p:blipFill>
-        <p:spPr>
-          <a:xfrm>
-            <a:off x="7498080" y="4663440"/>
-            <a:ext cx="292608" cy="292608"/>
-          </a:xfrm>
-          <a:prstGeom prst="rect">
-            <a:avLst/>
-          </a:prstGeom>
-        </p:spPr>
-      </p:pic>
-      <p:sp>
-        <p:nvSpPr>
-          <p:cNvPr id="15" name="Text 8"/>
-          <p:cNvSpPr txBox="1"/>
-          <p:nvPr/>
-        </p:nvSpPr>
-        <p:spPr>
-          <a:xfrm>
-            <a:off x="7909560" y="4599432"/>
-            <a:ext cx="3703320" cy="420624"/>
-          </a:xfrm>
-          <a:prstGeom prst="rect">
-            <a:avLst/>
-          </a:prstGeom>
-          <a:noFill/>
-          <a:ln/>
-        </p:spPr>
-        <p:txBody>
-          <a:bodyPr wrap="square" lIns="0" tIns="0" rIns="0" bIns="0" rtlCol="0" anchor="ctr"/>
-          <a:lstStyle/>
-          <a:p>
-            <a:pPr indent="0" marL="0">
-              <a:buNone/>
-            </a:pPr>
-            <a:r>
-              <a:rPr lang="en-US" sz="1500" dirty="0">
-                <a:solidFill>
-                  <a:schemeClr val="tx1"/>
-                </a:solidFill>
-              </a:rPr>
-              <a:t>Subir el budget de producción (ADF &gt; 1 MB)</a:t>
-            </a:r>
-            <a:endParaRPr lang="en-US" sz="1500" dirty="0"/>
-          </a:p>
-        </p:txBody>
-      </p:sp>
-      <p:pic>
-        <p:nvPicPr>
-          <p:cNvPr id="16" name="check-5.749999999999999" descr="preencoded.png">    </p:cNvPr>
-          <p:cNvPicPr>
-            <a:picLocks noChangeAspect="1"/>
-          </p:cNvPicPr>
-          <p:nvPr/>
-        </p:nvPicPr>
-        <p:blipFill>
-          <a:blip r:embed="rId6"/>
-          <a:stretch>
-            <a:fillRect/>
-          </a:stretch>
-        </p:blipFill>
-        <p:spPr>
-          <a:xfrm>
-            <a:off x="7498080" y="5321808"/>
-            <a:ext cx="292608" cy="292608"/>
-          </a:xfrm>
-          <a:prstGeom prst="rect">
-            <a:avLst/>
-          </a:prstGeom>
-        </p:spPr>
-      </p:pic>
-      <p:sp>
-        <p:nvSpPr>
-          <p:cNvPr id="17" name="Text 9"/>
-          <p:cNvSpPr txBox="1"/>
-          <p:nvPr/>
-        </p:nvSpPr>
-        <p:spPr>
-          <a:xfrm>
-            <a:off x="7909560" y="5257800"/>
-            <a:ext cx="3703320" cy="420624"/>
-          </a:xfrm>
-          <a:prstGeom prst="rect">
-            <a:avLst/>
-          </a:prstGeom>
-          <a:noFill/>
-          <a:ln/>
-        </p:spPr>
-        <p:txBody>
-          <a:bodyPr wrap="square" lIns="0" tIns="0" rIns="0" bIns="0" rtlCol="0" anchor="ctr"/>
-          <a:lstStyle/>
-          <a:p>
-            <a:pPr indent="0" marL="0">
-              <a:buNone/>
-            </a:pPr>
-            <a:r>
-              <a:rPr lang="en-US" sz="1500" dirty="0">
-                <a:solidFill>
-                  <a:schemeClr val="tx1"/>
-                </a:solidFill>
-              </a:rPr>
-              <a:t>Componente: imports: [LoginComponent]</a:t>
-            </a:r>
-            <a:endParaRPr lang="en-US" sz="1500" dirty="0"/>
+              <a:t>// src/app/app.ts</a:t>
+            </a:r>
+            <a:endParaRPr lang="en-US" sz="1200" dirty="0"/>
+          </a:p>
+          <a:p>
+            <a:pPr indent="0" marL="0">
+              <a:spcAft>
+                <a:spcPts val="200"/>
+              </a:spcAft>
+              <a:buNone/>
+            </a:pPr>
+            <a:r>
+              <a:rPr lang="en-US" sz="1200" dirty="0">
+                <a:solidFill>
+                  <a:schemeClr val="bg1"/>
+                </a:solidFill>
+                <a:latin typeface="Courier New" pitchFamily="34" charset="0"/>
+                <a:ea typeface="Courier New" pitchFamily="34" charset="-122"/>
+                <a:cs typeface="Courier New" pitchFamily="34" charset="-120"/>
+              </a:rPr>
+              <a:t>import { Component } from '@angular/core';</a:t>
+            </a:r>
+            <a:endParaRPr lang="en-US" sz="1200" dirty="0"/>
+          </a:p>
+          <a:p>
+            <a:pPr indent="0" marL="0">
+              <a:spcAft>
+                <a:spcPts val="200"/>
+              </a:spcAft>
+              <a:buNone/>
+            </a:pPr>
+            <a:r>
+              <a:rPr lang="en-US" sz="1200" dirty="0">
+                <a:solidFill>
+                  <a:schemeClr val="bg1"/>
+                </a:solidFill>
+                <a:latin typeface="Courier New" pitchFamily="34" charset="0"/>
+                <a:ea typeface="Courier New" pitchFamily="34" charset="-122"/>
+                <a:cs typeface="Courier New" pitchFamily="34" charset="-120"/>
+              </a:rPr>
+              <a:t>import { LoginComponent } from '@alfresco/adf-core';</a:t>
+            </a:r>
+            <a:endParaRPr lang="en-US" sz="1200" dirty="0"/>
+          </a:p>
+          <a:p>
+            <a:pPr indent="0" marL="0">
+              <a:spcAft>
+                <a:spcPts val="200"/>
+              </a:spcAft>
+              <a:buNone/>
+            </a:pPr>
+            <a:r>
+              <a:rPr lang="en-US" sz="1200" dirty="0">
+                <a:solidFill>
+                  <a:schemeClr val="bg1"/>
+                </a:solidFill>
+                <a:latin typeface="Courier New" pitchFamily="34" charset="0"/>
+                <a:ea typeface="Courier New" pitchFamily="34" charset="-122"/>
+                <a:cs typeface="Courier New" pitchFamily="34" charset="-120"/>
+              </a:rPr>
+              <a:t> </a:t>
+            </a:r>
+            <a:endParaRPr lang="en-US" sz="1200" dirty="0"/>
+          </a:p>
+          <a:p>
+            <a:pPr indent="0" marL="0">
+              <a:spcAft>
+                <a:spcPts val="200"/>
+              </a:spcAft>
+              <a:buNone/>
+            </a:pPr>
+            <a:r>
+              <a:rPr lang="en-US" sz="1200" dirty="0">
+                <a:solidFill>
+                  <a:schemeClr val="bg1"/>
+                </a:solidFill>
+                <a:latin typeface="Courier New" pitchFamily="34" charset="0"/>
+                <a:ea typeface="Courier New" pitchFamily="34" charset="-122"/>
+                <a:cs typeface="Courier New" pitchFamily="34" charset="-120"/>
+              </a:rPr>
+              <a:t>@Component({ selector: 'app-root', imports: [LoginComponent],</a:t>
+            </a:r>
+            <a:endParaRPr lang="en-US" sz="1200" dirty="0"/>
+          </a:p>
+          <a:p>
+            <a:pPr indent="0" marL="0">
+              <a:spcAft>
+                <a:spcPts val="200"/>
+              </a:spcAft>
+              <a:buNone/>
+            </a:pPr>
+            <a:r>
+              <a:rPr lang="en-US" sz="1200" dirty="0">
+                <a:solidFill>
+                  <a:schemeClr val="bg1"/>
+                </a:solidFill>
+                <a:latin typeface="Courier New" pitchFamily="34" charset="0"/>
+                <a:ea typeface="Courier New" pitchFamily="34" charset="-122"/>
+                <a:cs typeface="Courier New" pitchFamily="34" charset="-120"/>
+              </a:rPr>
+              <a:t>             template: '&lt;adf-login&gt;&lt;/adf-login&gt;' })</a:t>
+            </a:r>
+            <a:endParaRPr lang="en-US" sz="1200" dirty="0"/>
+          </a:p>
+          <a:p>
+            <a:pPr indent="0" marL="0">
+              <a:spcAft>
+                <a:spcPts val="200"/>
+              </a:spcAft>
+              <a:buNone/>
+            </a:pPr>
+            <a:r>
+              <a:rPr lang="en-US" sz="1200" dirty="0">
+                <a:solidFill>
+                  <a:schemeClr val="bg1"/>
+                </a:solidFill>
+                <a:latin typeface="Courier New" pitchFamily="34" charset="0"/>
+                <a:ea typeface="Courier New" pitchFamily="34" charset="-122"/>
+                <a:cs typeface="Courier New" pitchFamily="34" charset="-120"/>
+              </a:rPr>
+              <a:t>export class App {}</a:t>
+            </a:r>
+            <a:endParaRPr lang="en-US" sz="1200" dirty="0"/>
           </a:p>
         </p:txBody>
       </p:sp>
@@ -11380,7 +11334,7 @@
                   <a:schemeClr val="tx2"/>
                 </a:solidFill>
               </a:rPr>
-              <a:t>Cinco errores reales y su solución</a:t>
+              <a:t>Angular 22: archivos y ajustes de angular.json</a:t>
             </a:r>
             <a:endParaRPr lang="en-US" sz="3400" dirty="0"/>
           </a:p>
@@ -11388,60 +11342,36 @@
       </p:sp>
       <p:sp>
         <p:nvSpPr>
-          <p:cNvPr id="3" name="error-1.5"/>
+          <p:cNvPr id="3" name="manfiles-fondo"/>
           <p:cNvSpPr/>
           <p:nvPr/>
         </p:nvSpPr>
         <p:spPr>
           <a:xfrm>
             <a:off x="548640" y="1371600"/>
-            <a:ext cx="11064240" cy="841248"/>
+            <a:ext cx="5440680" cy="1417320"/>
           </a:xfrm>
           <a:prstGeom prst="roundRect">
             <a:avLst>
-              <a:gd name="adj" fmla="val 10870"/>
+              <a:gd name="adj" fmla="val 5161"/>
             </a:avLst>
           </a:prstGeom>
           <a:solidFill>
-            <a:schemeClr val="bg2"/>
+            <a:schemeClr val="tx2"/>
           </a:solidFill>
           <a:ln/>
         </p:spPr>
       </p:sp>
-      <p:pic>
-        <p:nvPicPr>
-          <p:cNvPr id="4" name="error-icono-1.5" descr="preencoded.png">    </p:cNvPr>
-          <p:cNvPicPr>
-            <a:picLocks noChangeAspect="1"/>
-          </p:cNvPicPr>
-          <p:nvPr/>
-        </p:nvPicPr>
-        <p:blipFill>
-          <a:blip r:embed="rId1"/>
-          <a:stretch>
-            <a:fillRect/>
-          </a:stretch>
-        </p:blipFill>
-        <p:spPr>
-          <a:xfrm>
-            <a:off x="777240" y="1609344"/>
-            <a:ext cx="365760" cy="365760"/>
-          </a:xfrm>
-          <a:prstGeom prst="rect">
-            <a:avLst/>
-          </a:prstGeom>
-        </p:spPr>
-      </p:pic>
-      <p:sp>
-        <p:nvSpPr>
-          <p:cNvPr id="5" name="Text 2"/>
+      <p:sp>
+        <p:nvSpPr>
+          <p:cNvPr id="4" name="manfiles-codigo"/>
           <p:cNvSpPr txBox="1"/>
           <p:nvPr/>
         </p:nvSpPr>
         <p:spPr>
           <a:xfrm>
-            <a:off x="1325880" y="1371600"/>
-            <a:ext cx="5120640" cy="841248"/>
+            <a:off x="777240" y="1536192"/>
+            <a:ext cx="4983480" cy="1088136"/>
           </a:xfrm>
           <a:prstGeom prst="rect">
             <a:avLst/>
@@ -11450,116 +11380,122 @@
           <a:ln/>
         </p:spPr>
         <p:txBody>
-          <a:bodyPr wrap="square" lIns="0" tIns="0" rIns="0" bIns="0" rtlCol="0" anchor="ctr"/>
+          <a:bodyPr wrap="square" lIns="0" tIns="0" rIns="0" bIns="0" rtlCol="0" anchor="t"/>
           <a:lstStyle/>
           <a:p>
             <a:pPr indent="0" marL="0">
-              <a:buNone/>
-            </a:pPr>
-            <a:r>
-              <a:rPr lang="en-US" sz="1500" b="1" dirty="0">
-                <a:solidFill>
-                  <a:schemeClr val="tx2"/>
-                </a:solidFill>
-              </a:rPr>
-              <a:t>Página en blanco + «app.config.json contains validation errors»</a:t>
-            </a:r>
-            <a:endParaRPr lang="en-US" sz="1500" dirty="0"/>
-          </a:p>
-        </p:txBody>
-      </p:sp>
-      <p:sp>
-        <p:nvSpPr>
-          <p:cNvPr id="6" name="Text 3"/>
-          <p:cNvSpPr txBox="1"/>
-          <p:nvPr/>
-        </p:nvSpPr>
-        <p:spPr>
-          <a:xfrm>
-            <a:off x="6583680" y="1371600"/>
-            <a:ext cx="4846320" cy="841248"/>
-          </a:xfrm>
-          <a:prstGeom prst="rect">
-            <a:avLst/>
-          </a:prstGeom>
-          <a:noFill/>
-          <a:ln/>
-        </p:spPr>
-        <p:txBody>
-          <a:bodyPr wrap="square" lIns="0" tIns="0" rIns="0" bIns="0" rtlCol="0" anchor="ctr"/>
-          <a:lstStyle/>
-          <a:p>
-            <a:pPr indent="0" marL="0">
-              <a:buNone/>
-            </a:pPr>
-            <a:r>
-              <a:rPr lang="en-US" sz="1500" dirty="0">
-                <a:solidFill>
-                  <a:schemeClr val="tx1"/>
-                </a:solidFill>
-              </a:rPr>
-              <a:t>El archivo no está en la raíz: Angular 14–17 en src/ (y en assets), 18+ en public/</a:t>
-            </a:r>
-            <a:endParaRPr lang="en-US" sz="1500" dirty="0"/>
-          </a:p>
-        </p:txBody>
-      </p:sp>
-      <p:sp>
-        <p:nvSpPr>
-          <p:cNvPr id="7" name="error-2.54"/>
+              <a:spcAft>
+                <a:spcPts val="200"/>
+              </a:spcAft>
+              <a:buNone/>
+            </a:pPr>
+            <a:r>
+              <a:rPr lang="en-US" sz="1200" dirty="0">
+                <a:solidFill>
+                  <a:schemeClr val="accent1"/>
+                </a:solidFill>
+                <a:latin typeface="Courier New" pitchFamily="34" charset="0"/>
+                <a:ea typeface="Courier New" pitchFamily="34" charset="-122"/>
+                <a:cs typeface="Courier New" pitchFamily="34" charset="-120"/>
+              </a:rPr>
+              <a:t>// public/app.config.json</a:t>
+            </a:r>
+            <a:endParaRPr lang="en-US" sz="1200" dirty="0"/>
+          </a:p>
+          <a:p>
+            <a:pPr indent="0" marL="0">
+              <a:spcAft>
+                <a:spcPts val="200"/>
+              </a:spcAft>
+              <a:buNone/>
+            </a:pPr>
+            <a:r>
+              <a:rPr lang="en-US" sz="1200" dirty="0">
+                <a:solidFill>
+                  <a:schemeClr val="bg1"/>
+                </a:solidFill>
+                <a:latin typeface="Courier New" pitchFamily="34" charset="0"/>
+                <a:ea typeface="Courier New" pitchFamily="34" charset="-122"/>
+                <a:cs typeface="Courier New" pitchFamily="34" charset="-120"/>
+              </a:rPr>
+              <a:t>{ "ecmHost": "http://localhost:4200",</a:t>
+            </a:r>
+            <a:endParaRPr lang="en-US" sz="1200" dirty="0"/>
+          </a:p>
+          <a:p>
+            <a:pPr indent="0" marL="0">
+              <a:spcAft>
+                <a:spcPts val="200"/>
+              </a:spcAft>
+              <a:buNone/>
+            </a:pPr>
+            <a:r>
+              <a:rPr lang="en-US" sz="1200" dirty="0">
+                <a:solidFill>
+                  <a:schemeClr val="bg1"/>
+                </a:solidFill>
+                <a:latin typeface="Courier New" pitchFamily="34" charset="0"/>
+                <a:ea typeface="Courier New" pitchFamily="34" charset="-122"/>
+                <a:cs typeface="Courier New" pitchFamily="34" charset="-120"/>
+              </a:rPr>
+              <a:t>  "providers": "ECM", "authType": "BASIC",</a:t>
+            </a:r>
+            <a:endParaRPr lang="en-US" sz="1200" dirty="0"/>
+          </a:p>
+          <a:p>
+            <a:pPr indent="0" marL="0">
+              <a:spcAft>
+                <a:spcPts val="200"/>
+              </a:spcAft>
+              <a:buNone/>
+            </a:pPr>
+            <a:r>
+              <a:rPr lang="en-US" sz="1200" dirty="0">
+                <a:solidFill>
+                  <a:schemeClr val="bg1"/>
+                </a:solidFill>
+                <a:latin typeface="Courier New" pitchFamily="34" charset="0"/>
+                <a:ea typeface="Courier New" pitchFamily="34" charset="-122"/>
+                <a:cs typeface="Courier New" pitchFamily="34" charset="-120"/>
+              </a:rPr>
+              <a:t>  "loginRoute": "login" }</a:t>
+            </a:r>
+            <a:endParaRPr lang="en-US" sz="1200" dirty="0"/>
+          </a:p>
+        </p:txBody>
+      </p:sp>
+      <p:sp>
+        <p:nvSpPr>
+          <p:cNvPr id="5" name="manproxy-fondo"/>
           <p:cNvSpPr/>
           <p:nvPr/>
         </p:nvSpPr>
         <p:spPr>
           <a:xfrm>
-            <a:off x="548640" y="2322576"/>
-            <a:ext cx="11064240" cy="841248"/>
+            <a:off x="6172200" y="1371600"/>
+            <a:ext cx="5440680" cy="1417320"/>
           </a:xfrm>
           <a:prstGeom prst="roundRect">
             <a:avLst>
-              <a:gd name="adj" fmla="val 10870"/>
+              <a:gd name="adj" fmla="val 5161"/>
             </a:avLst>
           </a:prstGeom>
           <a:solidFill>
-            <a:schemeClr val="bg2"/>
+            <a:schemeClr val="tx2"/>
           </a:solidFill>
           <a:ln/>
         </p:spPr>
       </p:sp>
-      <p:pic>
-        <p:nvPicPr>
-          <p:cNvPr id="8" name="error-icono-2.54" descr="preencoded.png">    </p:cNvPr>
-          <p:cNvPicPr>
-            <a:picLocks noChangeAspect="1"/>
-          </p:cNvPicPr>
-          <p:nvPr/>
-        </p:nvPicPr>
-        <p:blipFill>
-          <a:blip r:embed="rId2"/>
-          <a:stretch>
-            <a:fillRect/>
-          </a:stretch>
-        </p:blipFill>
-        <p:spPr>
-          <a:xfrm>
-            <a:off x="777240" y="2560320"/>
-            <a:ext cx="365760" cy="365760"/>
-          </a:xfrm>
-          <a:prstGeom prst="rect">
-            <a:avLst/>
-          </a:prstGeom>
-        </p:spPr>
-      </p:pic>
-      <p:sp>
-        <p:nvSpPr>
-          <p:cNvPr id="9" name="Text 5"/>
+      <p:sp>
+        <p:nvSpPr>
+          <p:cNvPr id="6" name="manproxy-codigo"/>
           <p:cNvSpPr txBox="1"/>
           <p:nvPr/>
         </p:nvSpPr>
         <p:spPr>
           <a:xfrm>
-            <a:off x="1325880" y="2322576"/>
-            <a:ext cx="5120640" cy="841248"/>
+            <a:off x="6400800" y="1536192"/>
+            <a:ext cx="4983480" cy="1088136"/>
           </a:xfrm>
           <a:prstGeom prst="rect">
             <a:avLst/>
@@ -11568,116 +11504,122 @@
           <a:ln/>
         </p:spPr>
         <p:txBody>
-          <a:bodyPr wrap="square" lIns="0" tIns="0" rIns="0" bIns="0" rtlCol="0" anchor="ctr"/>
+          <a:bodyPr wrap="square" lIns="0" tIns="0" rIns="0" bIns="0" rtlCol="0" anchor="t"/>
           <a:lstStyle/>
           <a:p>
             <a:pPr indent="0" marL="0">
-              <a:buNone/>
-            </a:pPr>
-            <a:r>
-              <a:rPr lang="en-US" sz="1500" b="1" dirty="0">
-                <a:solidFill>
-                  <a:schemeClr val="tx2"/>
-                </a:solidFill>
-              </a:rPr>
-              <a:t>NullInjectorError: No provider for RedirectAuthService</a:t>
-            </a:r>
-            <a:endParaRPr lang="en-US" sz="1500" dirty="0"/>
-          </a:p>
-        </p:txBody>
-      </p:sp>
-      <p:sp>
-        <p:nvSpPr>
-          <p:cNvPr id="10" name="Text 6"/>
-          <p:cNvSpPr txBox="1"/>
-          <p:nvPr/>
-        </p:nvSpPr>
-        <p:spPr>
-          <a:xfrm>
-            <a:off x="6583680" y="2322576"/>
-            <a:ext cx="4846320" cy="841248"/>
-          </a:xfrm>
-          <a:prstGeom prst="rect">
-            <a:avLst/>
-          </a:prstGeom>
-          <a:noFill/>
-          <a:ln/>
-        </p:spPr>
-        <p:txBody>
-          <a:bodyPr wrap="square" lIns="0" tIns="0" rIns="0" bIns="0" rtlCol="0" anchor="ctr"/>
-          <a:lstStyle/>
-          <a:p>
-            <a:pPr indent="0" marL="0">
-              <a:buNone/>
-            </a:pPr>
-            <a:r>
-              <a:rPr lang="en-US" sz="1500" dirty="0">
-                <a:solidFill>
-                  <a:schemeClr val="tx1"/>
-                </a:solidFill>
-              </a:rPr>
-              <a:t>ADF 6/7: falta AuthModule.forRoot({ useHash: true })</a:t>
-            </a:r>
-            <a:endParaRPr lang="en-US" sz="1500" dirty="0"/>
-          </a:p>
-        </p:txBody>
-      </p:sp>
-      <p:sp>
-        <p:nvSpPr>
-          <p:cNvPr id="11" name="error-3.58"/>
+              <a:spcAft>
+                <a:spcPts val="200"/>
+              </a:spcAft>
+              <a:buNone/>
+            </a:pPr>
+            <a:r>
+              <a:rPr lang="en-US" sz="1200" dirty="0">
+                <a:solidFill>
+                  <a:schemeClr val="accent1"/>
+                </a:solidFill>
+                <a:latin typeface="Courier New" pitchFamily="34" charset="0"/>
+                <a:ea typeface="Courier New" pitchFamily="34" charset="-122"/>
+                <a:cs typeface="Courier New" pitchFamily="34" charset="-120"/>
+              </a:rPr>
+              <a:t>// proxy.conf.json (raíz del proyecto)</a:t>
+            </a:r>
+            <a:endParaRPr lang="en-US" sz="1200" dirty="0"/>
+          </a:p>
+          <a:p>
+            <a:pPr indent="0" marL="0">
+              <a:spcAft>
+                <a:spcPts val="200"/>
+              </a:spcAft>
+              <a:buNone/>
+            </a:pPr>
+            <a:r>
+              <a:rPr lang="en-US" sz="1200" dirty="0">
+                <a:solidFill>
+                  <a:schemeClr val="bg1"/>
+                </a:solidFill>
+                <a:latin typeface="Courier New" pitchFamily="34" charset="0"/>
+                <a:ea typeface="Courier New" pitchFamily="34" charset="-122"/>
+                <a:cs typeface="Courier New" pitchFamily="34" charset="-120"/>
+              </a:rPr>
+              <a:t>{ "/alfresco": {</a:t>
+            </a:r>
+            <a:endParaRPr lang="en-US" sz="1200" dirty="0"/>
+          </a:p>
+          <a:p>
+            <a:pPr indent="0" marL="0">
+              <a:spcAft>
+                <a:spcPts val="200"/>
+              </a:spcAft>
+              <a:buNone/>
+            </a:pPr>
+            <a:r>
+              <a:rPr lang="en-US" sz="1200" dirty="0">
+                <a:solidFill>
+                  <a:schemeClr val="bg1"/>
+                </a:solidFill>
+                <a:latin typeface="Courier New" pitchFamily="34" charset="0"/>
+                <a:ea typeface="Courier New" pitchFamily="34" charset="-122"/>
+                <a:cs typeface="Courier New" pitchFamily="34" charset="-120"/>
+              </a:rPr>
+              <a:t>    "target": "http://localhost:8080",</a:t>
+            </a:r>
+            <a:endParaRPr lang="en-US" sz="1200" dirty="0"/>
+          </a:p>
+          <a:p>
+            <a:pPr indent="0" marL="0">
+              <a:spcAft>
+                <a:spcPts val="200"/>
+              </a:spcAft>
+              <a:buNone/>
+            </a:pPr>
+            <a:r>
+              <a:rPr lang="en-US" sz="1200" dirty="0">
+                <a:solidFill>
+                  <a:schemeClr val="bg1"/>
+                </a:solidFill>
+                <a:latin typeface="Courier New" pitchFamily="34" charset="0"/>
+                <a:ea typeface="Courier New" pitchFamily="34" charset="-122"/>
+                <a:cs typeface="Courier New" pitchFamily="34" charset="-120"/>
+              </a:rPr>
+              <a:t>    "secure": false, "changeOrigin": true } }</a:t>
+            </a:r>
+            <a:endParaRPr lang="en-US" sz="1200" dirty="0"/>
+          </a:p>
+        </p:txBody>
+      </p:sp>
+      <p:sp>
+        <p:nvSpPr>
+          <p:cNvPr id="7" name="manangular-fondo"/>
           <p:cNvSpPr/>
           <p:nvPr/>
         </p:nvSpPr>
         <p:spPr>
           <a:xfrm>
-            <a:off x="548640" y="3273552"/>
-            <a:ext cx="11064240" cy="841248"/>
+            <a:off x="548640" y="2971800"/>
+            <a:ext cx="11064240" cy="3108960"/>
           </a:xfrm>
           <a:prstGeom prst="roundRect">
             <a:avLst>
-              <a:gd name="adj" fmla="val 10870"/>
+              <a:gd name="adj" fmla="val 2353"/>
             </a:avLst>
           </a:prstGeom>
           <a:solidFill>
-            <a:schemeClr val="bg2"/>
+            <a:schemeClr val="tx2"/>
           </a:solidFill>
           <a:ln/>
         </p:spPr>
       </p:sp>
-      <p:pic>
-        <p:nvPicPr>
-          <p:cNvPr id="12" name="error-icono-3.58" descr="preencoded.png">    </p:cNvPr>
-          <p:cNvPicPr>
-            <a:picLocks noChangeAspect="1"/>
-          </p:cNvPicPr>
-          <p:nvPr/>
-        </p:nvPicPr>
-        <p:blipFill>
-          <a:blip r:embed="rId3"/>
-          <a:stretch>
-            <a:fillRect/>
-          </a:stretch>
-        </p:blipFill>
-        <p:spPr>
-          <a:xfrm>
-            <a:off x="777240" y="3511296"/>
-            <a:ext cx="365760" cy="365760"/>
-          </a:xfrm>
-          <a:prstGeom prst="rect">
-            <a:avLst/>
-          </a:prstGeom>
-        </p:spPr>
-      </p:pic>
-      <p:sp>
-        <p:nvSpPr>
-          <p:cNvPr id="13" name="Text 8"/>
+      <p:sp>
+        <p:nvSpPr>
+          <p:cNvPr id="8" name="manangular-codigo"/>
           <p:cNvSpPr txBox="1"/>
           <p:nvPr/>
         </p:nvSpPr>
         <p:spPr>
           <a:xfrm>
-            <a:off x="1325880" y="3273552"/>
-            <a:ext cx="5120640" cy="841248"/>
+            <a:off x="777240" y="3136392"/>
+            <a:ext cx="10607040" cy="2779776"/>
           </a:xfrm>
           <a:prstGeom prst="rect">
             <a:avLst/>
@@ -11686,293 +11628,187 @@
           <a:ln/>
         </p:spPr>
         <p:txBody>
-          <a:bodyPr wrap="square" lIns="0" tIns="0" rIns="0" bIns="0" rtlCol="0" anchor="ctr"/>
+          <a:bodyPr wrap="square" lIns="0" tIns="0" rIns="0" bIns="0" rtlCol="0" anchor="t"/>
           <a:lstStyle/>
           <a:p>
             <a:pPr indent="0" marL="0">
-              <a:buNone/>
-            </a:pPr>
-            <a:r>
-              <a:rPr lang="en-US" sz="1500" b="1" dirty="0">
-                <a:solidFill>
-                  <a:schemeClr val="tx2"/>
-                </a:solidFill>
-              </a:rPr>
-              <a:t>Errores TS dentro de node_modules (Angular 14/16)</a:t>
-            </a:r>
-            <a:endParaRPr lang="en-US" sz="1500" dirty="0"/>
-          </a:p>
-        </p:txBody>
-      </p:sp>
-      <p:sp>
-        <p:nvSpPr>
-          <p:cNvPr id="14" name="Text 9"/>
-          <p:cNvSpPr txBox="1"/>
-          <p:nvPr/>
-        </p:nvSpPr>
-        <p:spPr>
-          <a:xfrm>
-            <a:off x="6583680" y="3273552"/>
-            <a:ext cx="4846320" cy="841248"/>
-          </a:xfrm>
-          <a:prstGeom prst="rect">
-            <a:avLst/>
-          </a:prstGeom>
-          <a:noFill/>
-          <a:ln/>
-        </p:spPr>
-        <p:txBody>
-          <a:bodyPr wrap="square" lIns="0" tIns="0" rIns="0" bIns="0" rtlCol="0" anchor="ctr"/>
-          <a:lstStyle/>
-          <a:p>
-            <a:pPr indent="0" marL="0">
-              <a:buNone/>
-            </a:pPr>
-            <a:r>
-              <a:rPr lang="en-US" sz="1500" dirty="0">
-                <a:solidFill>
-                  <a:schemeClr val="tx1"/>
-                </a:solidFill>
-              </a:rPr>
-              <a:t>skipLibCheck: true; en Angular 14 además @types/node@16</a:t>
-            </a:r>
-            <a:endParaRPr lang="en-US" sz="1500" dirty="0"/>
-          </a:p>
-        </p:txBody>
-      </p:sp>
-      <p:sp>
-        <p:nvSpPr>
-          <p:cNvPr id="15" name="error-4.62"/>
-          <p:cNvSpPr/>
-          <p:nvPr/>
-        </p:nvSpPr>
-        <p:spPr>
-          <a:xfrm>
-            <a:off x="548640" y="4224528"/>
-            <a:ext cx="11064240" cy="841248"/>
-          </a:xfrm>
-          <a:prstGeom prst="roundRect">
-            <a:avLst>
-              <a:gd name="adj" fmla="val 10870"/>
-            </a:avLst>
-          </a:prstGeom>
-          <a:solidFill>
-            <a:schemeClr val="bg2"/>
-          </a:solidFill>
-          <a:ln/>
-        </p:spPr>
-      </p:sp>
-      <p:pic>
-        <p:nvPicPr>
-          <p:cNvPr id="16" name="error-icono-4.62" descr="preencoded.png">    </p:cNvPr>
-          <p:cNvPicPr>
-            <a:picLocks noChangeAspect="1"/>
-          </p:cNvPicPr>
-          <p:nvPr/>
-        </p:nvPicPr>
-        <p:blipFill>
-          <a:blip r:embed="rId4"/>
-          <a:stretch>
-            <a:fillRect/>
-          </a:stretch>
-        </p:blipFill>
-        <p:spPr>
-          <a:xfrm>
-            <a:off x="777240" y="4462272"/>
-            <a:ext cx="365760" cy="365760"/>
-          </a:xfrm>
-          <a:prstGeom prst="rect">
-            <a:avLst/>
-          </a:prstGeom>
-        </p:spPr>
-      </p:pic>
-      <p:sp>
-        <p:nvSpPr>
-          <p:cNvPr id="17" name="Text 11"/>
-          <p:cNvSpPr txBox="1"/>
-          <p:nvPr/>
-        </p:nvSpPr>
-        <p:spPr>
-          <a:xfrm>
-            <a:off x="1325880" y="4224528"/>
-            <a:ext cx="5120640" cy="841248"/>
-          </a:xfrm>
-          <a:prstGeom prst="rect">
-            <a:avLst/>
-          </a:prstGeom>
-          <a:noFill/>
-          <a:ln/>
-        </p:spPr>
-        <p:txBody>
-          <a:bodyPr wrap="square" lIns="0" tIns="0" rIns="0" bIns="0" rtlCol="0" anchor="ctr"/>
-          <a:lstStyle/>
-          <a:p>
-            <a:pPr indent="0" marL="0">
-              <a:buNone/>
-            </a:pPr>
-            <a:r>
-              <a:rPr lang="en-US" sz="1500" b="1" dirty="0">
-                <a:solidFill>
-                  <a:schemeClr val="tx2"/>
-                </a:solidFill>
-              </a:rPr>
-              <a:t>bundle initial exceeded maximum budget</a:t>
-            </a:r>
-            <a:endParaRPr lang="en-US" sz="1500" dirty="0"/>
-          </a:p>
-        </p:txBody>
-      </p:sp>
-      <p:sp>
-        <p:nvSpPr>
-          <p:cNvPr id="18" name="Text 12"/>
-          <p:cNvSpPr txBox="1"/>
-          <p:nvPr/>
-        </p:nvSpPr>
-        <p:spPr>
-          <a:xfrm>
-            <a:off x="6583680" y="4224528"/>
-            <a:ext cx="4846320" cy="841248"/>
-          </a:xfrm>
-          <a:prstGeom prst="rect">
-            <a:avLst/>
-          </a:prstGeom>
-          <a:noFill/>
-          <a:ln/>
-        </p:spPr>
-        <p:txBody>
-          <a:bodyPr wrap="square" lIns="0" tIns="0" rIns="0" bIns="0" rtlCol="0" anchor="ctr"/>
-          <a:lstStyle/>
-          <a:p>
-            <a:pPr indent="0" marL="0">
-              <a:buNone/>
-            </a:pPr>
-            <a:r>
-              <a:rPr lang="en-US" sz="1500" dirty="0">
-                <a:solidFill>
-                  <a:schemeClr val="tx1"/>
-                </a:solidFill>
-              </a:rPr>
-              <a:t>Subir los budgets de producción en angular.json</a:t>
-            </a:r>
-            <a:endParaRPr lang="en-US" sz="1500" dirty="0"/>
-          </a:p>
-        </p:txBody>
-      </p:sp>
-      <p:sp>
-        <p:nvSpPr>
-          <p:cNvPr id="19" name="error-5.66"/>
-          <p:cNvSpPr/>
-          <p:nvPr/>
-        </p:nvSpPr>
-        <p:spPr>
-          <a:xfrm>
-            <a:off x="548640" y="5175504"/>
-            <a:ext cx="11064240" cy="841248"/>
-          </a:xfrm>
-          <a:prstGeom prst="roundRect">
-            <a:avLst>
-              <a:gd name="adj" fmla="val 10870"/>
-            </a:avLst>
-          </a:prstGeom>
-          <a:solidFill>
-            <a:schemeClr val="bg2"/>
-          </a:solidFill>
-          <a:ln/>
-        </p:spPr>
-      </p:sp>
-      <p:pic>
-        <p:nvPicPr>
-          <p:cNvPr id="20" name="error-icono-5.66" descr="preencoded.png">    </p:cNvPr>
-          <p:cNvPicPr>
-            <a:picLocks noChangeAspect="1"/>
-          </p:cNvPicPr>
-          <p:nvPr/>
-        </p:nvPicPr>
-        <p:blipFill>
-          <a:blip r:embed="rId5"/>
-          <a:stretch>
-            <a:fillRect/>
-          </a:stretch>
-        </p:blipFill>
-        <p:spPr>
-          <a:xfrm>
-            <a:off x="777240" y="5413248"/>
-            <a:ext cx="365760" cy="365760"/>
-          </a:xfrm>
-          <a:prstGeom prst="rect">
-            <a:avLst/>
-          </a:prstGeom>
-        </p:spPr>
-      </p:pic>
-      <p:sp>
-        <p:nvSpPr>
-          <p:cNvPr id="21" name="Text 14"/>
-          <p:cNvSpPr txBox="1"/>
-          <p:nvPr/>
-        </p:nvSpPr>
-        <p:spPr>
-          <a:xfrm>
-            <a:off x="1325880" y="5175504"/>
-            <a:ext cx="5120640" cy="841248"/>
-          </a:xfrm>
-          <a:prstGeom prst="rect">
-            <a:avLst/>
-          </a:prstGeom>
-          <a:noFill/>
-          <a:ln/>
-        </p:spPr>
-        <p:txBody>
-          <a:bodyPr wrap="square" lIns="0" tIns="0" rIns="0" bIns="0" rtlCol="0" anchor="ctr"/>
-          <a:lstStyle/>
-          <a:p>
-            <a:pPr indent="0" marL="0">
-              <a:buNone/>
-            </a:pPr>
-            <a:r>
-              <a:rPr lang="en-US" sz="1500" b="1" dirty="0">
-                <a:solidFill>
-                  <a:schemeClr val="tx2"/>
-                </a:solidFill>
-              </a:rPr>
-              <a:t>Se ve el texto «visibility» en vez del ícono</a:t>
-            </a:r>
-            <a:endParaRPr lang="en-US" sz="1500" dirty="0"/>
-          </a:p>
-        </p:txBody>
-      </p:sp>
-      <p:sp>
-        <p:nvSpPr>
-          <p:cNvPr id="22" name="Text 15"/>
-          <p:cNvSpPr txBox="1"/>
-          <p:nvPr/>
-        </p:nvSpPr>
-        <p:spPr>
-          <a:xfrm>
-            <a:off x="6583680" y="5175504"/>
-            <a:ext cx="4846320" cy="841248"/>
-          </a:xfrm>
-          <a:prstGeom prst="rect">
-            <a:avLst/>
-          </a:prstGeom>
-          <a:noFill/>
-          <a:ln/>
-        </p:spPr>
-        <p:txBody>
-          <a:bodyPr wrap="square" lIns="0" tIns="0" rIns="0" bIns="0" rtlCol="0" anchor="ctr"/>
-          <a:lstStyle/>
-          <a:p>
-            <a:pPr indent="0" marL="0">
-              <a:buNone/>
-            </a:pPr>
-            <a:r>
-              <a:rPr lang="en-US" sz="1500" dirty="0">
-                <a:solidFill>
-                  <a:schemeClr val="tx1"/>
-                </a:solidFill>
-              </a:rPr>
-              <a:t>Falta Material Icons: ng add @angular/material o el &lt;link&gt;</a:t>
-            </a:r>
-            <a:endParaRPr lang="en-US" sz="1500" dirty="0"/>
+              <a:spcAft>
+                <a:spcPts val="200"/>
+              </a:spcAft>
+              <a:buNone/>
+            </a:pPr>
+            <a:r>
+              <a:rPr lang="en-US" sz="1200" dirty="0">
+                <a:solidFill>
+                  <a:schemeClr val="accent1"/>
+                </a:solidFill>
+                <a:latin typeface="Courier New" pitchFamily="34" charset="0"/>
+                <a:ea typeface="Courier New" pitchFamily="34" charset="-122"/>
+                <a:cs typeface="Courier New" pitchFamily="34" charset="-120"/>
+              </a:rPr>
+              <a:t>// angular.json → projects.mi-app.architect</a:t>
+            </a:r>
+            <a:endParaRPr lang="en-US" sz="1200" dirty="0"/>
+          </a:p>
+          <a:p>
+            <a:pPr indent="0" marL="0">
+              <a:spcAft>
+                <a:spcPts val="200"/>
+              </a:spcAft>
+              <a:buNone/>
+            </a:pPr>
+            <a:r>
+              <a:rPr lang="en-US" sz="1200" dirty="0">
+                <a:solidFill>
+                  <a:schemeClr val="bg1"/>
+                </a:solidFill>
+                <a:latin typeface="Courier New" pitchFamily="34" charset="0"/>
+                <a:ea typeface="Courier New" pitchFamily="34" charset="-122"/>
+                <a:cs typeface="Courier New" pitchFamily="34" charset="-120"/>
+              </a:rPr>
+              <a:t>"build": { "options": {</a:t>
+            </a:r>
+            <a:endParaRPr lang="en-US" sz="1200" dirty="0"/>
+          </a:p>
+          <a:p>
+            <a:pPr indent="0" marL="0">
+              <a:spcAft>
+                <a:spcPts val="200"/>
+              </a:spcAft>
+              <a:buNone/>
+            </a:pPr>
+            <a:r>
+              <a:rPr lang="en-US" sz="1200" dirty="0">
+                <a:solidFill>
+                  <a:schemeClr val="bg1"/>
+                </a:solidFill>
+                <a:latin typeface="Courier New" pitchFamily="34" charset="0"/>
+                <a:ea typeface="Courier New" pitchFamily="34" charset="-122"/>
+                <a:cs typeface="Courier New" pitchFamily="34" charset="-120"/>
+              </a:rPr>
+              <a:t>  "polyfills": ["zone.js"],</a:t>
+            </a:r>
+            <a:endParaRPr lang="en-US" sz="1200" dirty="0"/>
+          </a:p>
+          <a:p>
+            <a:pPr indent="0" marL="0">
+              <a:spcAft>
+                <a:spcPts val="200"/>
+              </a:spcAft>
+              <a:buNone/>
+            </a:pPr>
+            <a:r>
+              <a:rPr lang="en-US" sz="1200" dirty="0">
+                <a:solidFill>
+                  <a:schemeClr val="bg1"/>
+                </a:solidFill>
+                <a:latin typeface="Courier New" pitchFamily="34" charset="0"/>
+                <a:ea typeface="Courier New" pitchFamily="34" charset="-122"/>
+                <a:cs typeface="Courier New" pitchFamily="34" charset="-120"/>
+              </a:rPr>
+              <a:t>  "assets": [ { "glob": "**/*", "input": "public" },</a:t>
+            </a:r>
+            <a:endParaRPr lang="en-US" sz="1200" dirty="0"/>
+          </a:p>
+          <a:p>
+            <a:pPr indent="0" marL="0">
+              <a:spcAft>
+                <a:spcPts val="200"/>
+              </a:spcAft>
+              <a:buNone/>
+            </a:pPr>
+            <a:r>
+              <a:rPr lang="en-US" sz="1200" dirty="0">
+                <a:solidFill>
+                  <a:schemeClr val="bg1"/>
+                </a:solidFill>
+                <a:latin typeface="Courier New" pitchFamily="34" charset="0"/>
+                <a:ea typeface="Courier New" pitchFamily="34" charset="-122"/>
+                <a:cs typeface="Courier New" pitchFamily="34" charset="-120"/>
+              </a:rPr>
+              <a:t>    { "glob": "**/*", "output": "/assets",</a:t>
+            </a:r>
+            <a:endParaRPr lang="en-US" sz="1200" dirty="0"/>
+          </a:p>
+          <a:p>
+            <a:pPr indent="0" marL="0">
+              <a:spcAft>
+                <a:spcPts val="200"/>
+              </a:spcAft>
+              <a:buNone/>
+            </a:pPr>
+            <a:r>
+              <a:rPr lang="en-US" sz="1200" dirty="0">
+                <a:solidFill>
+                  <a:schemeClr val="bg1"/>
+                </a:solidFill>
+                <a:latin typeface="Courier New" pitchFamily="34" charset="0"/>
+                <a:ea typeface="Courier New" pitchFamily="34" charset="-122"/>
+                <a:cs typeface="Courier New" pitchFamily="34" charset="-120"/>
+              </a:rPr>
+              <a:t>      "input": "node_modules/@alfresco/adf-core/bundles/assets" } ] },</a:t>
+            </a:r>
+            <a:endParaRPr lang="en-US" sz="1200" dirty="0"/>
+          </a:p>
+          <a:p>
+            <a:pPr indent="0" marL="0">
+              <a:spcAft>
+                <a:spcPts val="200"/>
+              </a:spcAft>
+              <a:buNone/>
+            </a:pPr>
+            <a:r>
+              <a:rPr lang="en-US" sz="1200" dirty="0">
+                <a:solidFill>
+                  <a:schemeClr val="bg1"/>
+                </a:solidFill>
+                <a:latin typeface="Courier New" pitchFamily="34" charset="0"/>
+                <a:ea typeface="Courier New" pitchFamily="34" charset="-122"/>
+                <a:cs typeface="Courier New" pitchFamily="34" charset="-120"/>
+              </a:rPr>
+              <a:t>  "configurations": { "production": { "budgets": [</a:t>
+            </a:r>
+            <a:endParaRPr lang="en-US" sz="1200" dirty="0"/>
+          </a:p>
+          <a:p>
+            <a:pPr indent="0" marL="0">
+              <a:spcAft>
+                <a:spcPts val="200"/>
+              </a:spcAft>
+              <a:buNone/>
+            </a:pPr>
+            <a:r>
+              <a:rPr lang="en-US" sz="1200" dirty="0">
+                <a:solidFill>
+                  <a:schemeClr val="bg1"/>
+                </a:solidFill>
+                <a:latin typeface="Courier New" pitchFamily="34" charset="0"/>
+                <a:ea typeface="Courier New" pitchFamily="34" charset="-122"/>
+                <a:cs typeface="Courier New" pitchFamily="34" charset="-120"/>
+              </a:rPr>
+              <a:t>    { "type": "initial", "maximumWarning": "4mb", "maximumError": "6mb" } ] } } },</a:t>
+            </a:r>
+            <a:endParaRPr lang="en-US" sz="1200" dirty="0"/>
+          </a:p>
+          <a:p>
+            <a:pPr indent="0" marL="0">
+              <a:spcAft>
+                <a:spcPts val="200"/>
+              </a:spcAft>
+              <a:buNone/>
+            </a:pPr>
+            <a:r>
+              <a:rPr lang="en-US" sz="1200" dirty="0">
+                <a:solidFill>
+                  <a:schemeClr val="bg1"/>
+                </a:solidFill>
+                <a:latin typeface="Courier New" pitchFamily="34" charset="0"/>
+                <a:ea typeface="Courier New" pitchFamily="34" charset="-122"/>
+                <a:cs typeface="Courier New" pitchFamily="34" charset="-120"/>
+              </a:rPr>
+              <a:t>"serve": { "options": { "proxyConfig": "proxy.conf.json" } }</a:t>
+            </a:r>
+            <a:endParaRPr lang="en-US" sz="1200" dirty="0"/>
           </a:p>
         </p:txBody>
       </p:sp>
@@ -12078,6 +11914,941 @@
                   <a:schemeClr val="tx2"/>
                 </a:solidFill>
               </a:rPr>
+              <a:t>Cinco errores reales y cómo se resuelven</a:t>
+            </a:r>
+            <a:endParaRPr lang="en-US" sz="3400" dirty="0"/>
+          </a:p>
+        </p:txBody>
+      </p:sp>
+      <p:sp>
+        <p:nvSpPr>
+          <p:cNvPr id="3" name="error-1.45"/>
+          <p:cNvSpPr/>
+          <p:nvPr/>
+        </p:nvSpPr>
+        <p:spPr>
+          <a:xfrm>
+            <a:off x="548640" y="1325880"/>
+            <a:ext cx="11064240" cy="914400"/>
+          </a:xfrm>
+          <a:prstGeom prst="roundRect">
+            <a:avLst>
+              <a:gd name="adj" fmla="val 10000"/>
+            </a:avLst>
+          </a:prstGeom>
+          <a:solidFill>
+            <a:schemeClr val="bg2"/>
+          </a:solidFill>
+          <a:ln/>
+        </p:spPr>
+      </p:sp>
+      <p:pic>
+        <p:nvPicPr>
+          <p:cNvPr id="4" name="error-1.45-icono" descr="preencoded.png">    </p:cNvPr>
+          <p:cNvPicPr>
+            <a:picLocks noChangeAspect="1"/>
+          </p:cNvPicPr>
+          <p:nvPr/>
+        </p:nvPicPr>
+        <p:blipFill>
+          <a:blip r:embed="rId1"/>
+          <a:stretch>
+            <a:fillRect/>
+          </a:stretch>
+        </p:blipFill>
+        <p:spPr>
+          <a:xfrm>
+            <a:off x="777240" y="1600200"/>
+            <a:ext cx="365760" cy="365760"/>
+          </a:xfrm>
+          <a:prstGeom prst="rect">
+            <a:avLst/>
+          </a:prstGeom>
+        </p:spPr>
+      </p:pic>
+      <p:sp>
+        <p:nvSpPr>
+          <p:cNvPr id="5" name="Text 2"/>
+          <p:cNvSpPr txBox="1"/>
+          <p:nvPr/>
+        </p:nvSpPr>
+        <p:spPr>
+          <a:xfrm>
+            <a:off x="1325880" y="1325880"/>
+            <a:ext cx="3931920" cy="914400"/>
+          </a:xfrm>
+          <a:prstGeom prst="rect">
+            <a:avLst/>
+          </a:prstGeom>
+          <a:noFill/>
+          <a:ln/>
+        </p:spPr>
+        <p:txBody>
+          <a:bodyPr wrap="square" lIns="0" tIns="0" rIns="0" bIns="0" rtlCol="0" anchor="ctr"/>
+          <a:lstStyle/>
+          <a:p>
+            <a:pPr indent="0" marL="0">
+              <a:buNone/>
+            </a:pPr>
+            <a:r>
+              <a:rPr lang="en-US" sz="1500" b="1" dirty="0">
+                <a:solidFill>
+                  <a:schemeClr val="tx2"/>
+                </a:solidFill>
+              </a:rPr>
+              <a:t>Página en blanco y «app.config.json contains validation errors»</a:t>
+            </a:r>
+            <a:endParaRPr lang="en-US" sz="1500" dirty="0"/>
+          </a:p>
+        </p:txBody>
+      </p:sp>
+      <p:sp>
+        <p:nvSpPr>
+          <p:cNvPr id="6" name="error-1.45-fondo"/>
+          <p:cNvSpPr/>
+          <p:nvPr/>
+        </p:nvSpPr>
+        <p:spPr>
+          <a:xfrm>
+            <a:off x="5440680" y="1417320"/>
+            <a:ext cx="6035040" cy="731520"/>
+          </a:xfrm>
+          <a:prstGeom prst="roundRect">
+            <a:avLst>
+              <a:gd name="adj" fmla="val 10000"/>
+            </a:avLst>
+          </a:prstGeom>
+          <a:solidFill>
+            <a:schemeClr val="tx2"/>
+          </a:solidFill>
+          <a:ln/>
+        </p:spPr>
+      </p:sp>
+      <p:sp>
+        <p:nvSpPr>
+          <p:cNvPr id="7" name="error-1.45-codigo"/>
+          <p:cNvSpPr txBox="1"/>
+          <p:nvPr/>
+        </p:nvSpPr>
+        <p:spPr>
+          <a:xfrm>
+            <a:off x="5669280" y="1581912"/>
+            <a:ext cx="5577840" cy="402336"/>
+          </a:xfrm>
+          <a:prstGeom prst="rect">
+            <a:avLst/>
+          </a:prstGeom>
+          <a:noFill/>
+          <a:ln/>
+        </p:spPr>
+        <p:txBody>
+          <a:bodyPr wrap="square" lIns="0" tIns="0" rIns="0" bIns="0" rtlCol="0" anchor="t"/>
+          <a:lstStyle/>
+          <a:p>
+            <a:pPr indent="0" marL="0">
+              <a:spcAft>
+                <a:spcPts val="200"/>
+              </a:spcAft>
+              <a:buNone/>
+            </a:pPr>
+            <a:r>
+              <a:rPr lang="en-US" sz="1300" dirty="0">
+                <a:solidFill>
+                  <a:schemeClr val="accent1"/>
+                </a:solidFill>
+                <a:latin typeface="Courier New" pitchFamily="34" charset="0"/>
+                <a:ea typeface="Courier New" pitchFamily="34" charset="-122"/>
+                <a:cs typeface="Courier New" pitchFamily="34" charset="-120"/>
+              </a:rPr>
+              <a:t># Angular 18+: el archivo va en public/</a:t>
+            </a:r>
+            <a:endParaRPr lang="en-US" sz="1300" dirty="0"/>
+          </a:p>
+          <a:p>
+            <a:pPr indent="0" marL="0">
+              <a:spcAft>
+                <a:spcPts val="200"/>
+              </a:spcAft>
+              <a:buNone/>
+            </a:pPr>
+            <a:r>
+              <a:rPr lang="en-US" sz="1300" dirty="0">
+                <a:solidFill>
+                  <a:schemeClr val="bg1"/>
+                </a:solidFill>
+                <a:latin typeface="Courier New" pitchFamily="34" charset="0"/>
+                <a:ea typeface="Courier New" pitchFamily="34" charset="-122"/>
+                <a:cs typeface="Courier New" pitchFamily="34" charset="-120"/>
+              </a:rPr>
+              <a:t>Move-Item src\assets\app.config.json public\</a:t>
+            </a:r>
+            <a:endParaRPr lang="en-US" sz="1300" dirty="0"/>
+          </a:p>
+        </p:txBody>
+      </p:sp>
+      <p:sp>
+        <p:nvSpPr>
+          <p:cNvPr id="8" name="error-2.55"/>
+          <p:cNvSpPr/>
+          <p:nvPr/>
+        </p:nvSpPr>
+        <p:spPr>
+          <a:xfrm>
+            <a:off x="548640" y="2331720"/>
+            <a:ext cx="11064240" cy="914400"/>
+          </a:xfrm>
+          <a:prstGeom prst="roundRect">
+            <a:avLst>
+              <a:gd name="adj" fmla="val 10000"/>
+            </a:avLst>
+          </a:prstGeom>
+          <a:solidFill>
+            <a:schemeClr val="bg2"/>
+          </a:solidFill>
+          <a:ln/>
+        </p:spPr>
+      </p:sp>
+      <p:pic>
+        <p:nvPicPr>
+          <p:cNvPr id="9" name="error-2.55-icono" descr="preencoded.png">    </p:cNvPr>
+          <p:cNvPicPr>
+            <a:picLocks noChangeAspect="1"/>
+          </p:cNvPicPr>
+          <p:nvPr/>
+        </p:nvPicPr>
+        <p:blipFill>
+          <a:blip r:embed="rId2"/>
+          <a:stretch>
+            <a:fillRect/>
+          </a:stretch>
+        </p:blipFill>
+        <p:spPr>
+          <a:xfrm>
+            <a:off x="777240" y="2606040"/>
+            <a:ext cx="365760" cy="365760"/>
+          </a:xfrm>
+          <a:prstGeom prst="rect">
+            <a:avLst/>
+          </a:prstGeom>
+        </p:spPr>
+      </p:pic>
+      <p:sp>
+        <p:nvSpPr>
+          <p:cNvPr id="10" name="Text 6"/>
+          <p:cNvSpPr txBox="1"/>
+          <p:nvPr/>
+        </p:nvSpPr>
+        <p:spPr>
+          <a:xfrm>
+            <a:off x="1325880" y="2331720"/>
+            <a:ext cx="3931920" cy="914400"/>
+          </a:xfrm>
+          <a:prstGeom prst="rect">
+            <a:avLst/>
+          </a:prstGeom>
+          <a:noFill/>
+          <a:ln/>
+        </p:spPr>
+        <p:txBody>
+          <a:bodyPr wrap="square" lIns="0" tIns="0" rIns="0" bIns="0" rtlCol="0" anchor="ctr"/>
+          <a:lstStyle/>
+          <a:p>
+            <a:pPr indent="0" marL="0">
+              <a:buNone/>
+            </a:pPr>
+            <a:r>
+              <a:rPr lang="en-US" sz="1500" b="1" dirty="0">
+                <a:solidFill>
+                  <a:schemeClr val="tx2"/>
+                </a:solidFill>
+              </a:rPr>
+              <a:t>NullInjectorError: No provider for RedirectAuthService (ADF 6/7)</a:t>
+            </a:r>
+            <a:endParaRPr lang="en-US" sz="1500" dirty="0"/>
+          </a:p>
+        </p:txBody>
+      </p:sp>
+      <p:sp>
+        <p:nvSpPr>
+          <p:cNvPr id="11" name="error-2.55-fondo"/>
+          <p:cNvSpPr/>
+          <p:nvPr/>
+        </p:nvSpPr>
+        <p:spPr>
+          <a:xfrm>
+            <a:off x="5440680" y="2423160"/>
+            <a:ext cx="6035040" cy="731520"/>
+          </a:xfrm>
+          <a:prstGeom prst="roundRect">
+            <a:avLst>
+              <a:gd name="adj" fmla="val 10000"/>
+            </a:avLst>
+          </a:prstGeom>
+          <a:solidFill>
+            <a:schemeClr val="tx2"/>
+          </a:solidFill>
+          <a:ln/>
+        </p:spPr>
+      </p:sp>
+      <p:sp>
+        <p:nvSpPr>
+          <p:cNvPr id="12" name="error-2.55-codigo"/>
+          <p:cNvSpPr txBox="1"/>
+          <p:nvPr/>
+        </p:nvSpPr>
+        <p:spPr>
+          <a:xfrm>
+            <a:off x="5669280" y="2587752"/>
+            <a:ext cx="5577840" cy="402336"/>
+          </a:xfrm>
+          <a:prstGeom prst="rect">
+            <a:avLst/>
+          </a:prstGeom>
+          <a:noFill/>
+          <a:ln/>
+        </p:spPr>
+        <p:txBody>
+          <a:bodyPr wrap="square" lIns="0" tIns="0" rIns="0" bIns="0" rtlCol="0" anchor="t"/>
+          <a:lstStyle/>
+          <a:p>
+            <a:pPr indent="0" marL="0">
+              <a:spcAft>
+                <a:spcPts val="200"/>
+              </a:spcAft>
+              <a:buNone/>
+            </a:pPr>
+            <a:r>
+              <a:rPr lang="en-US" sz="1300" dirty="0">
+                <a:solidFill>
+                  <a:schemeClr val="accent1"/>
+                </a:solidFill>
+                <a:latin typeface="Courier New" pitchFamily="34" charset="0"/>
+                <a:ea typeface="Courier New" pitchFamily="34" charset="-122"/>
+                <a:cs typeface="Courier New" pitchFamily="34" charset="-120"/>
+              </a:rPr>
+              <a:t>// app.module.ts → imports</a:t>
+            </a:r>
+            <a:endParaRPr lang="en-US" sz="1300" dirty="0"/>
+          </a:p>
+          <a:p>
+            <a:pPr indent="0" marL="0">
+              <a:spcAft>
+                <a:spcPts val="200"/>
+              </a:spcAft>
+              <a:buNone/>
+            </a:pPr>
+            <a:r>
+              <a:rPr lang="en-US" sz="1300" dirty="0">
+                <a:solidFill>
+                  <a:schemeClr val="bg1"/>
+                </a:solidFill>
+                <a:latin typeface="Courier New" pitchFamily="34" charset="0"/>
+                <a:ea typeface="Courier New" pitchFamily="34" charset="-122"/>
+                <a:cs typeface="Courier New" pitchFamily="34" charset="-120"/>
+              </a:rPr>
+              <a:t>AuthModule.forRoot({ useHash: true })</a:t>
+            </a:r>
+            <a:endParaRPr lang="en-US" sz="1300" dirty="0"/>
+          </a:p>
+        </p:txBody>
+      </p:sp>
+      <p:sp>
+        <p:nvSpPr>
+          <p:cNvPr id="13" name="error-3.65"/>
+          <p:cNvSpPr/>
+          <p:nvPr/>
+        </p:nvSpPr>
+        <p:spPr>
+          <a:xfrm>
+            <a:off x="548640" y="3337560"/>
+            <a:ext cx="11064240" cy="914400"/>
+          </a:xfrm>
+          <a:prstGeom prst="roundRect">
+            <a:avLst>
+              <a:gd name="adj" fmla="val 10000"/>
+            </a:avLst>
+          </a:prstGeom>
+          <a:solidFill>
+            <a:schemeClr val="bg2"/>
+          </a:solidFill>
+          <a:ln/>
+        </p:spPr>
+      </p:sp>
+      <p:pic>
+        <p:nvPicPr>
+          <p:cNvPr id="14" name="error-3.65-icono" descr="preencoded.png">    </p:cNvPr>
+          <p:cNvPicPr>
+            <a:picLocks noChangeAspect="1"/>
+          </p:cNvPicPr>
+          <p:nvPr/>
+        </p:nvPicPr>
+        <p:blipFill>
+          <a:blip r:embed="rId3"/>
+          <a:stretch>
+            <a:fillRect/>
+          </a:stretch>
+        </p:blipFill>
+        <p:spPr>
+          <a:xfrm>
+            <a:off x="777240" y="3611880"/>
+            <a:ext cx="365760" cy="365760"/>
+          </a:xfrm>
+          <a:prstGeom prst="rect">
+            <a:avLst/>
+          </a:prstGeom>
+        </p:spPr>
+      </p:pic>
+      <p:sp>
+        <p:nvSpPr>
+          <p:cNvPr id="15" name="Text 10"/>
+          <p:cNvSpPr txBox="1"/>
+          <p:nvPr/>
+        </p:nvSpPr>
+        <p:spPr>
+          <a:xfrm>
+            <a:off x="1325880" y="3337560"/>
+            <a:ext cx="3931920" cy="914400"/>
+          </a:xfrm>
+          <a:prstGeom prst="rect">
+            <a:avLst/>
+          </a:prstGeom>
+          <a:noFill/>
+          <a:ln/>
+        </p:spPr>
+        <p:txBody>
+          <a:bodyPr wrap="square" lIns="0" tIns="0" rIns="0" bIns="0" rtlCol="0" anchor="ctr"/>
+          <a:lstStyle/>
+          <a:p>
+            <a:pPr indent="0" marL="0">
+              <a:buNone/>
+            </a:pPr>
+            <a:r>
+              <a:rPr lang="en-US" sz="1500" b="1" dirty="0">
+                <a:solidFill>
+                  <a:schemeClr val="tx2"/>
+                </a:solidFill>
+              </a:rPr>
+              <a:t>Errores TS dentro de node_modules (Angular 14/16)</a:t>
+            </a:r>
+            <a:endParaRPr lang="en-US" sz="1500" dirty="0"/>
+          </a:p>
+        </p:txBody>
+      </p:sp>
+      <p:sp>
+        <p:nvSpPr>
+          <p:cNvPr id="16" name="error-3.65-fondo"/>
+          <p:cNvSpPr/>
+          <p:nvPr/>
+        </p:nvSpPr>
+        <p:spPr>
+          <a:xfrm>
+            <a:off x="5440680" y="3429000"/>
+            <a:ext cx="6035040" cy="731520"/>
+          </a:xfrm>
+          <a:prstGeom prst="roundRect">
+            <a:avLst>
+              <a:gd name="adj" fmla="val 10000"/>
+            </a:avLst>
+          </a:prstGeom>
+          <a:solidFill>
+            <a:schemeClr val="tx2"/>
+          </a:solidFill>
+          <a:ln/>
+        </p:spPr>
+      </p:sp>
+      <p:sp>
+        <p:nvSpPr>
+          <p:cNvPr id="17" name="error-3.65-codigo"/>
+          <p:cNvSpPr txBox="1"/>
+          <p:nvPr/>
+        </p:nvSpPr>
+        <p:spPr>
+          <a:xfrm>
+            <a:off x="5669280" y="3593592"/>
+            <a:ext cx="5577840" cy="402336"/>
+          </a:xfrm>
+          <a:prstGeom prst="rect">
+            <a:avLst/>
+          </a:prstGeom>
+          <a:noFill/>
+          <a:ln/>
+        </p:spPr>
+        <p:txBody>
+          <a:bodyPr wrap="square" lIns="0" tIns="0" rIns="0" bIns="0" rtlCol="0" anchor="t"/>
+          <a:lstStyle/>
+          <a:p>
+            <a:pPr indent="0" marL="0">
+              <a:spcAft>
+                <a:spcPts val="200"/>
+              </a:spcAft>
+              <a:buNone/>
+            </a:pPr>
+            <a:r>
+              <a:rPr lang="en-US" sz="1300" dirty="0">
+                <a:solidFill>
+                  <a:schemeClr val="bg1"/>
+                </a:solidFill>
+                <a:latin typeface="Courier New" pitchFamily="34" charset="0"/>
+                <a:ea typeface="Courier New" pitchFamily="34" charset="-122"/>
+                <a:cs typeface="Courier New" pitchFamily="34" charset="-120"/>
+              </a:rPr>
+              <a:t>npm install -D @types/node@16      </a:t>
+            </a:r>
+            <a:pPr indent="0" marL="0">
+              <a:spcAft>
+                <a:spcPts val="200"/>
+              </a:spcAft>
+              <a:buNone/>
+            </a:pPr>
+            <a:r>
+              <a:rPr lang="en-US" sz="1300" dirty="0">
+                <a:solidFill>
+                  <a:schemeClr val="accent1"/>
+                </a:solidFill>
+                <a:latin typeface="Courier New" pitchFamily="34" charset="0"/>
+                <a:ea typeface="Courier New" pitchFamily="34" charset="-122"/>
+                <a:cs typeface="Courier New" pitchFamily="34" charset="-120"/>
+              </a:rPr>
+              <a:t># Angular 14</a:t>
+            </a:r>
+            <a:endParaRPr lang="en-US" sz="1300" dirty="0"/>
+          </a:p>
+          <a:p>
+            <a:pPr indent="0" marL="0">
+              <a:spcAft>
+                <a:spcPts val="200"/>
+              </a:spcAft>
+              <a:buNone/>
+            </a:pPr>
+            <a:r>
+              <a:rPr lang="en-US" sz="1300" dirty="0">
+                <a:solidFill>
+                  <a:schemeClr val="accent1"/>
+                </a:solidFill>
+                <a:latin typeface="Courier New" pitchFamily="34" charset="0"/>
+                <a:ea typeface="Courier New" pitchFamily="34" charset="-122"/>
+                <a:cs typeface="Courier New" pitchFamily="34" charset="-120"/>
+              </a:rPr>
+              <a:t>// tsconfig.json: "skipLibCheck": true</a:t>
+            </a:r>
+            <a:endParaRPr lang="en-US" sz="1300" dirty="0"/>
+          </a:p>
+        </p:txBody>
+      </p:sp>
+      <p:sp>
+        <p:nvSpPr>
+          <p:cNvPr id="18" name="error-4.75"/>
+          <p:cNvSpPr/>
+          <p:nvPr/>
+        </p:nvSpPr>
+        <p:spPr>
+          <a:xfrm>
+            <a:off x="548640" y="4343400"/>
+            <a:ext cx="11064240" cy="914400"/>
+          </a:xfrm>
+          <a:prstGeom prst="roundRect">
+            <a:avLst>
+              <a:gd name="adj" fmla="val 10000"/>
+            </a:avLst>
+          </a:prstGeom>
+          <a:solidFill>
+            <a:schemeClr val="bg2"/>
+          </a:solidFill>
+          <a:ln/>
+        </p:spPr>
+      </p:sp>
+      <p:pic>
+        <p:nvPicPr>
+          <p:cNvPr id="19" name="error-4.75-icono" descr="preencoded.png">    </p:cNvPr>
+          <p:cNvPicPr>
+            <a:picLocks noChangeAspect="1"/>
+          </p:cNvPicPr>
+          <p:nvPr/>
+        </p:nvPicPr>
+        <p:blipFill>
+          <a:blip r:embed="rId4"/>
+          <a:stretch>
+            <a:fillRect/>
+          </a:stretch>
+        </p:blipFill>
+        <p:spPr>
+          <a:xfrm>
+            <a:off x="777240" y="4617720"/>
+            <a:ext cx="365760" cy="365760"/>
+          </a:xfrm>
+          <a:prstGeom prst="rect">
+            <a:avLst/>
+          </a:prstGeom>
+        </p:spPr>
+      </p:pic>
+      <p:sp>
+        <p:nvSpPr>
+          <p:cNvPr id="20" name="Text 14"/>
+          <p:cNvSpPr txBox="1"/>
+          <p:nvPr/>
+        </p:nvSpPr>
+        <p:spPr>
+          <a:xfrm>
+            <a:off x="1325880" y="4343400"/>
+            <a:ext cx="3931920" cy="914400"/>
+          </a:xfrm>
+          <a:prstGeom prst="rect">
+            <a:avLst/>
+          </a:prstGeom>
+          <a:noFill/>
+          <a:ln/>
+        </p:spPr>
+        <p:txBody>
+          <a:bodyPr wrap="square" lIns="0" tIns="0" rIns="0" bIns="0" rtlCol="0" anchor="ctr"/>
+          <a:lstStyle/>
+          <a:p>
+            <a:pPr indent="0" marL="0">
+              <a:buNone/>
+            </a:pPr>
+            <a:r>
+              <a:rPr lang="en-US" sz="1500" b="1" dirty="0">
+                <a:solidFill>
+                  <a:schemeClr val="tx2"/>
+                </a:solidFill>
+              </a:rPr>
+              <a:t>bundle initial exceeded maximum budget</a:t>
+            </a:r>
+            <a:endParaRPr lang="en-US" sz="1500" dirty="0"/>
+          </a:p>
+        </p:txBody>
+      </p:sp>
+      <p:sp>
+        <p:nvSpPr>
+          <p:cNvPr id="21" name="error-4.75-fondo"/>
+          <p:cNvSpPr/>
+          <p:nvPr/>
+        </p:nvSpPr>
+        <p:spPr>
+          <a:xfrm>
+            <a:off x="5440680" y="4434840"/>
+            <a:ext cx="6035040" cy="731520"/>
+          </a:xfrm>
+          <a:prstGeom prst="roundRect">
+            <a:avLst>
+              <a:gd name="adj" fmla="val 10000"/>
+            </a:avLst>
+          </a:prstGeom>
+          <a:solidFill>
+            <a:schemeClr val="tx2"/>
+          </a:solidFill>
+          <a:ln/>
+        </p:spPr>
+      </p:sp>
+      <p:sp>
+        <p:nvSpPr>
+          <p:cNvPr id="22" name="error-4.75-codigo"/>
+          <p:cNvSpPr txBox="1"/>
+          <p:nvPr/>
+        </p:nvSpPr>
+        <p:spPr>
+          <a:xfrm>
+            <a:off x="5669280" y="4599432"/>
+            <a:ext cx="5577840" cy="402336"/>
+          </a:xfrm>
+          <a:prstGeom prst="rect">
+            <a:avLst/>
+          </a:prstGeom>
+          <a:noFill/>
+          <a:ln/>
+        </p:spPr>
+        <p:txBody>
+          <a:bodyPr wrap="square" lIns="0" tIns="0" rIns="0" bIns="0" rtlCol="0" anchor="t"/>
+          <a:lstStyle/>
+          <a:p>
+            <a:pPr indent="0" marL="0">
+              <a:spcAft>
+                <a:spcPts val="200"/>
+              </a:spcAft>
+              <a:buNone/>
+            </a:pPr>
+            <a:r>
+              <a:rPr lang="en-US" sz="1300" dirty="0">
+                <a:solidFill>
+                  <a:schemeClr val="accent1"/>
+                </a:solidFill>
+                <a:latin typeface="Courier New" pitchFamily="34" charset="0"/>
+                <a:ea typeface="Courier New" pitchFamily="34" charset="-122"/>
+                <a:cs typeface="Courier New" pitchFamily="34" charset="-120"/>
+              </a:rPr>
+              <a:t>// angular.json → budgets (initial)</a:t>
+            </a:r>
+            <a:endParaRPr lang="en-US" sz="1300" dirty="0"/>
+          </a:p>
+          <a:p>
+            <a:pPr indent="0" marL="0">
+              <a:spcAft>
+                <a:spcPts val="200"/>
+              </a:spcAft>
+              <a:buNone/>
+            </a:pPr>
+            <a:r>
+              <a:rPr lang="en-US" sz="1300" dirty="0">
+                <a:solidFill>
+                  <a:schemeClr val="bg1"/>
+                </a:solidFill>
+                <a:latin typeface="Courier New" pitchFamily="34" charset="0"/>
+                <a:ea typeface="Courier New" pitchFamily="34" charset="-122"/>
+                <a:cs typeface="Courier New" pitchFamily="34" charset="-120"/>
+              </a:rPr>
+              <a:t>"maximumWarning": "4mb", "maximumError": "6mb"</a:t>
+            </a:r>
+            <a:endParaRPr lang="en-US" sz="1300" dirty="0"/>
+          </a:p>
+        </p:txBody>
+      </p:sp>
+      <p:sp>
+        <p:nvSpPr>
+          <p:cNvPr id="23" name="error-5.85"/>
+          <p:cNvSpPr/>
+          <p:nvPr/>
+        </p:nvSpPr>
+        <p:spPr>
+          <a:xfrm>
+            <a:off x="548640" y="5349240"/>
+            <a:ext cx="11064240" cy="914400"/>
+          </a:xfrm>
+          <a:prstGeom prst="roundRect">
+            <a:avLst>
+              <a:gd name="adj" fmla="val 10000"/>
+            </a:avLst>
+          </a:prstGeom>
+          <a:solidFill>
+            <a:schemeClr val="bg2"/>
+          </a:solidFill>
+          <a:ln/>
+        </p:spPr>
+      </p:sp>
+      <p:pic>
+        <p:nvPicPr>
+          <p:cNvPr id="24" name="error-5.85-icono" descr="preencoded.png">    </p:cNvPr>
+          <p:cNvPicPr>
+            <a:picLocks noChangeAspect="1"/>
+          </p:cNvPicPr>
+          <p:nvPr/>
+        </p:nvPicPr>
+        <p:blipFill>
+          <a:blip r:embed="rId5"/>
+          <a:stretch>
+            <a:fillRect/>
+          </a:stretch>
+        </p:blipFill>
+        <p:spPr>
+          <a:xfrm>
+            <a:off x="777240" y="5623560"/>
+            <a:ext cx="365760" cy="365760"/>
+          </a:xfrm>
+          <a:prstGeom prst="rect">
+            <a:avLst/>
+          </a:prstGeom>
+        </p:spPr>
+      </p:pic>
+      <p:sp>
+        <p:nvSpPr>
+          <p:cNvPr id="25" name="Text 18"/>
+          <p:cNvSpPr txBox="1"/>
+          <p:nvPr/>
+        </p:nvSpPr>
+        <p:spPr>
+          <a:xfrm>
+            <a:off x="1325880" y="5349240"/>
+            <a:ext cx="3931920" cy="914400"/>
+          </a:xfrm>
+          <a:prstGeom prst="rect">
+            <a:avLst/>
+          </a:prstGeom>
+          <a:noFill/>
+          <a:ln/>
+        </p:spPr>
+        <p:txBody>
+          <a:bodyPr wrap="square" lIns="0" tIns="0" rIns="0" bIns="0" rtlCol="0" anchor="ctr"/>
+          <a:lstStyle/>
+          <a:p>
+            <a:pPr indent="0" marL="0">
+              <a:buNone/>
+            </a:pPr>
+            <a:r>
+              <a:rPr lang="en-US" sz="1500" b="1" dirty="0">
+                <a:solidFill>
+                  <a:schemeClr val="tx2"/>
+                </a:solidFill>
+              </a:rPr>
+              <a:t>Se ve el texto «visibility» en vez del ícono</a:t>
+            </a:r>
+            <a:endParaRPr lang="en-US" sz="1500" dirty="0"/>
+          </a:p>
+        </p:txBody>
+      </p:sp>
+      <p:sp>
+        <p:nvSpPr>
+          <p:cNvPr id="26" name="error-5.85-fondo"/>
+          <p:cNvSpPr/>
+          <p:nvPr/>
+        </p:nvSpPr>
+        <p:spPr>
+          <a:xfrm>
+            <a:off x="5440680" y="5440680"/>
+            <a:ext cx="6035040" cy="731520"/>
+          </a:xfrm>
+          <a:prstGeom prst="roundRect">
+            <a:avLst>
+              <a:gd name="adj" fmla="val 10000"/>
+            </a:avLst>
+          </a:prstGeom>
+          <a:solidFill>
+            <a:schemeClr val="tx2"/>
+          </a:solidFill>
+          <a:ln/>
+        </p:spPr>
+      </p:sp>
+      <p:sp>
+        <p:nvSpPr>
+          <p:cNvPr id="27" name="error-5.85-codigo"/>
+          <p:cNvSpPr txBox="1"/>
+          <p:nvPr/>
+        </p:nvSpPr>
+        <p:spPr>
+          <a:xfrm>
+            <a:off x="5669280" y="5605272"/>
+            <a:ext cx="5577840" cy="402336"/>
+          </a:xfrm>
+          <a:prstGeom prst="rect">
+            <a:avLst/>
+          </a:prstGeom>
+          <a:noFill/>
+          <a:ln/>
+        </p:spPr>
+        <p:txBody>
+          <a:bodyPr wrap="square" lIns="0" tIns="0" rIns="0" bIns="0" rtlCol="0" anchor="t"/>
+          <a:lstStyle/>
+          <a:p>
+            <a:pPr indent="0" marL="0">
+              <a:spcAft>
+                <a:spcPts val="200"/>
+              </a:spcAft>
+              <a:buNone/>
+            </a:pPr>
+            <a:r>
+              <a:rPr lang="en-US" sz="1300" dirty="0">
+                <a:solidFill>
+                  <a:schemeClr val="bg1"/>
+                </a:solidFill>
+                <a:latin typeface="Courier New" pitchFamily="34" charset="0"/>
+                <a:ea typeface="Courier New" pitchFamily="34" charset="-122"/>
+                <a:cs typeface="Courier New" pitchFamily="34" charset="-120"/>
+              </a:rPr>
+              <a:t>npx ng add @angular/material@22 --skip-confirmation</a:t>
+            </a:r>
+            <a:endParaRPr lang="en-US" sz="1300" dirty="0"/>
+          </a:p>
+        </p:txBody>
+      </p:sp>
+      <p:sp>
+        <p:nvSpPr>
+          <p:cNvPr id="25" name="Slide Number Placeholder 0"/>
+          <p:cNvSpPr>
+            <a:spLocks noGrp="1"/>
+          </p:cNvSpPr>
+          <p:nvPr>
+            <p:ph type="sldNum" sz="quarter" idx="4294967295"/>
+          </p:nvPr>
+        </p:nvSpPr>
+        <p:spPr>
+          <a:xfrm>
+            <a:off x="11155680" y="6400800"/>
+            <a:ext cx="457200" cy="274320"/>
+          </a:xfrm>
+          <a:prstGeom prst="rect">
+            <a:avLst/>
+          </a:prstGeom>
+          <a:extLst>
+            <a:ext uri="{C572A759-6A51-4108-AA02-DFA0A04FC94B}">
+              <ma14:wrappingTextBoxFlag xmlns:ma14="http://schemas.microsoft.com/office/mac/drawingml/2011/main" val="0"/>
+            </a:ext>
+          </a:extLst>
+        </p:spPr>
+        <p:txBody>
+          <a:bodyPr/>
+          <a:lstStyle>
+            <a:lvl1pPr>
+              <a:defRPr sz="1000">
+                <a:solidFill>
+                  <a:schemeClr val="accent6"/>
+                </a:solidFill>
+              </a:defRPr>
+            </a:lvl1pPr>
+          </a:lstStyle>
+          <a:p>
+            <a:pPr algn="r"/>
+            <a:fld id="{F7021451-1387-4CA6-816F-3879F97B5CBC}" type="slidenum">
+              <a:rPr b="0" lang="en-US"/>
+              <a:t>22</a:t>
+            </a:fld>
+            <a:endParaRPr lang="en-US"/>
+          </a:p>
+        </p:txBody>
+      </p:sp>
+    </p:spTree>
+  </p:cSld>
+  <p:clrMapOvr>
+    <a:masterClrMapping/>
+  </p:clrMapOvr>
+</p:sld>
+</file>
+
+<file path=ppt/slides/slide23.xml><?xml version="1.0" encoding="utf-8"?>
+<p:sld xmlns:a="http://schemas.openxmlformats.org/drawingml/2006/main" xmlns:r="http://schemas.openxmlformats.org/officeDocument/2006/relationships" xmlns:p="http://schemas.openxmlformats.org/presentationml/2006/main">
+  <p:cSld name="Slide 23">
+    <p:spTree>
+      <p:nvGrpSpPr>
+        <p:cNvPr id="1" name=""/>
+        <p:cNvGrpSpPr/>
+        <p:nvPr/>
+      </p:nvGrpSpPr>
+      <p:grpSpPr>
+        <a:xfrm>
+          <a:off x="0" y="0"/>
+          <a:ext cx="0" cy="0"/>
+          <a:chOff x="0" y="0"/>
+          <a:chExt cx="0" cy="0"/>
+        </a:xfrm>
+      </p:grpSpPr>
+      <p:sp>
+        <p:nvSpPr>
+          <p:cNvPr id="2" name="Text 0"/>
+          <p:cNvSpPr/>
+          <p:nvPr>
+            <p:ph idx="100" type="title" hasCustomPrompt="1"/>
+          </p:nvPr>
+        </p:nvSpPr>
+        <p:spPr>
+          <a:xfrm>
+            <a:off x="548640" y="320040"/>
+            <a:ext cx="11064240" cy="822960"/>
+          </a:xfrm>
+          <a:prstGeom prst="rect">
+            <a:avLst/>
+          </a:prstGeom>
+          <a:noFill/>
+          <a:ln/>
+        </p:spPr>
+        <p:txBody>
+          <a:bodyPr wrap="square" lIns="0" tIns="0" rIns="0" bIns="0" rtlCol="0" anchor="ctr"/>
+          <a:lstStyle/>
+          <a:p>
+            <a:pPr algn="l" indent="0" marL="0">
+              <a:buNone/>
+            </a:pPr>
+            <a:r>
+              <a:rPr lang="en-US" sz="3400" b="1" dirty="0">
+                <a:solidFill>
+                  <a:schemeClr val="tx2"/>
+                </a:solidFill>
+              </a:rPr>
               <a:t>¿Qué camino elegir?</a:t>
             </a:r>
             <a:endParaRPr lang="en-US" sz="3400" dirty="0"/>
@@ -12086,7 +12857,7 @@
       </p:sp>
       <p:graphicFrame>
         <p:nvGraphicFramePr>
-          <p:cNvPr id="23" name="comparativa"/>
+          <p:cNvPr id="24" name="comparativa"/>
           <p:cNvGraphicFramePr>
             <a:graphicFrameLocks noGrp="1"/>
           </p:cNvGraphicFramePr>
@@ -13951,7 +14722,7 @@
             <a:pPr algn="r"/>
             <a:fld id="{F7021451-1387-4CA6-816F-3879F97B5CBC}" type="slidenum">
               <a:rPr b="0" lang="en-US"/>
-              <a:t>22</a:t>
+              <a:t>23</a:t>
             </a:fld>
             <a:endParaRPr lang="en-US"/>
           </a:p>
@@ -13965,9 +14736,9 @@
 </p:sld>
 </file>
 
-<file path=ppt/slides/slide23.xml><?xml version="1.0" encoding="utf-8"?>
+<file path=ppt/slides/slide24.xml><?xml version="1.0" encoding="utf-8"?>
 <p:sld xmlns:a="http://schemas.openxmlformats.org/drawingml/2006/main" xmlns:r="http://schemas.openxmlformats.org/officeDocument/2006/relationships" xmlns:p="http://schemas.openxmlformats.org/presentationml/2006/main">
-  <p:cSld name="Slide 23">
+  <p:cSld name="Slide 24">
     <p:spTree>
       <p:nvGrpSpPr>
         <p:cNvPr id="1" name=""/>
@@ -15318,8 +16089,8 @@
         </p:nvSpPr>
         <p:spPr>
           <a:xfrm>
-            <a:off x="822960" y="1783080"/>
-            <a:ext cx="3657600" cy="822960"/>
+            <a:off x="822960" y="1645920"/>
+            <a:ext cx="3657600" cy="457200"/>
           </a:xfrm>
           <a:prstGeom prst="rect">
             <a:avLst/>
@@ -15335,17 +16106,14 @@
               <a:buNone/>
             </a:pPr>
             <a:r>
-              <a:rPr lang="en-US" sz="4400" b="1" dirty="0">
+              <a:rPr lang="en-US" sz="2000" b="1" dirty="0">
                 <a:solidFill>
                   <a:schemeClr val="accent1"/>
                 </a:solidFill>
-                <a:latin typeface="Arial" pitchFamily="34" charset="0"/>
-                <a:ea typeface="Arial" pitchFamily="34" charset="-122"/>
-                <a:cs typeface="Arial" pitchFamily="34" charset="-120"/>
-              </a:rPr>
-              <a:t>ADF 9.0.0</a:t>
-            </a:r>
-            <a:endParaRPr lang="en-US" sz="4400" dirty="0"/>
+              </a:rPr>
+              <a:t>1. ¿Qué Angular tengo?</a:t>
+            </a:r>
+            <a:endParaRPr lang="en-US" sz="2000" dirty="0"/>
           </a:p>
         </p:txBody>
       </p:sp>
@@ -15357,7 +16125,63 @@
         </p:nvSpPr>
         <p:spPr>
           <a:xfrm>
-            <a:off x="822960" y="2606040"/>
+            <a:off x="822960" y="2148840"/>
+            <a:ext cx="3657600" cy="822960"/>
+          </a:xfrm>
+          <a:prstGeom prst="rect">
+            <a:avLst/>
+          </a:prstGeom>
+          <a:noFill/>
+          <a:ln/>
+        </p:spPr>
+        <p:txBody>
+          <a:bodyPr wrap="square" lIns="0" tIns="0" rIns="0" bIns="0" rtlCol="0" anchor="t"/>
+          <a:lstStyle/>
+          <a:p>
+            <a:pPr indent="0" marL="0">
+              <a:buNone/>
+            </a:pPr>
+            <a:r>
+              <a:rPr lang="en-US" sz="1500" dirty="0">
+                <a:solidFill>
+                  <a:schemeClr val="bg1"/>
+                </a:solidFill>
+                <a:latin typeface="Courier New" pitchFamily="34" charset="0"/>
+                <a:ea typeface="Courier New" pitchFamily="34" charset="-122"/>
+                <a:cs typeface="Courier New" pitchFamily="34" charset="-120"/>
+              </a:rPr>
+              <a:t>npx ng version</a:t>
+            </a:r>
+            <a:endParaRPr lang="en-US" sz="1500" dirty="0"/>
+          </a:p>
+          <a:p>
+            <a:pPr indent="0" marL="0">
+              <a:buNone/>
+            </a:pPr>
+            <a:r>
+              <a:rPr lang="en-US" sz="1500" dirty="0">
+                <a:solidFill>
+                  <a:schemeClr val="bg1"/>
+                </a:solidFill>
+                <a:latin typeface="Courier New" pitchFamily="34" charset="0"/>
+                <a:ea typeface="Courier New" pitchFamily="34" charset="-122"/>
+                <a:cs typeface="Courier New" pitchFamily="34" charset="-120"/>
+              </a:rPr>
+              <a:t>npm ls @angular/core</a:t>
+            </a:r>
+            <a:endParaRPr lang="en-US" sz="1500" dirty="0"/>
+          </a:p>
+        </p:txBody>
+      </p:sp>
+      <p:sp>
+        <p:nvSpPr>
+          <p:cNvPr id="6" name="Text 4"/>
+          <p:cNvSpPr txBox="1"/>
+          <p:nvPr/>
+        </p:nvSpPr>
+        <p:spPr>
+          <a:xfrm>
+            <a:off x="822960" y="3154680"/>
             <a:ext cx="3657600" cy="457200"/>
           </a:xfrm>
           <a:prstGeom prst="rect">
@@ -15374,27 +16198,27 @@
               <a:buNone/>
             </a:pPr>
             <a:r>
-              <a:rPr lang="en-US" sz="1800" dirty="0">
-                <a:solidFill>
-                  <a:schemeClr val="bg1"/>
-                </a:solidFill>
-              </a:rPr>
-              <a:t>se compiló con Angular 20.3.25</a:t>
-            </a:r>
-            <a:endParaRPr lang="en-US" sz="1800" dirty="0"/>
-          </a:p>
-        </p:txBody>
-      </p:sp>
-      <p:sp>
-        <p:nvSpPr>
-          <p:cNvPr id="6" name="Text 4"/>
+              <a:rPr lang="en-US" sz="2000" b="1" dirty="0">
+                <a:solidFill>
+                  <a:schemeClr val="accent1"/>
+                </a:solidFill>
+              </a:rPr>
+              <a:t>2. Busco su fila en la tabla</a:t>
+            </a:r>
+            <a:endParaRPr lang="en-US" sz="2000" dirty="0"/>
+          </a:p>
+        </p:txBody>
+      </p:sp>
+      <p:sp>
+        <p:nvSpPr>
+          <p:cNvPr id="7" name="Text 5"/>
           <p:cNvSpPr txBox="1"/>
           <p:nvPr/>
         </p:nvSpPr>
         <p:spPr>
           <a:xfrm>
-            <a:off x="822960" y="3291840"/>
-            <a:ext cx="3657600" cy="1371600"/>
+            <a:off x="822960" y="3794760"/>
+            <a:ext cx="3657600" cy="822960"/>
           </a:xfrm>
           <a:prstGeom prst="rect">
             <a:avLst/>
@@ -15410,27 +16234,27 @@
               <a:buNone/>
             </a:pPr>
             <a:r>
-              <a:rPr lang="en-US" sz="1500" dirty="0">
-                <a:solidFill>
-                  <a:schemeClr val="bg2"/>
-                </a:solidFill>
-              </a:rPr>
-              <a:t>La versión real está grabada dentro del paquete (ɵɵngDeclareComponent → version). Los peerDependencies (&gt;=16) no lo dicen.</a:t>
-            </a:r>
-            <a:endParaRPr lang="en-US" sz="1500" dirty="0"/>
-          </a:p>
-        </p:txBody>
-      </p:sp>
-      <p:sp>
-        <p:nvSpPr>
-          <p:cNvPr id="7" name="Text 5"/>
+              <a:rPr lang="en-US" sz="2000" b="1" dirty="0">
+                <a:solidFill>
+                  <a:schemeClr val="accent1"/>
+                </a:solidFill>
+              </a:rPr>
+              <a:t>3. Instalo exactamente ese ADF y esa js-api</a:t>
+            </a:r>
+            <a:endParaRPr lang="en-US" sz="2000" dirty="0"/>
+          </a:p>
+        </p:txBody>
+      </p:sp>
+      <p:sp>
+        <p:nvSpPr>
+          <p:cNvPr id="8" name="Text 6"/>
           <p:cNvSpPr txBox="1"/>
           <p:nvPr/>
         </p:nvSpPr>
         <p:spPr>
           <a:xfrm>
-            <a:off x="822960" y="4754880"/>
-            <a:ext cx="3657600" cy="1097280"/>
+            <a:off x="822960" y="4892040"/>
+            <a:ext cx="3657600" cy="914400"/>
           </a:xfrm>
           <a:prstGeom prst="rect">
             <a:avLst/>
@@ -15448,10 +16272,10 @@
             <a:r>
               <a:rPr lang="en-US" sz="1500" i="1" dirty="0">
                 <a:solidFill>
-                  <a:schemeClr val="bg1"/>
-                </a:solidFill>
-              </a:rPr>
-              <a:t>No existe ADF compilado con Angular 18, 21 ni 22: se usa el anterior y funciona.</a:t>
+                  <a:schemeClr val="bg2"/>
+                </a:solidFill>
+              </a:rPr>
+              <a:t>Si se mezclan versiones: ERESOLVE al instalar o errores al compilar.</a:t>
             </a:r>
             <a:endParaRPr lang="en-US" sz="1500" dirty="0"/>
           </a:p>
@@ -16272,7 +17096,7 @@
                             <a:srgbClr val="1B2631"/>
                           </a:solidFill>
                         </a:rPr>
-                        <a:t>7.0.1 (de Angular 17)</a:t>
+                        <a:t>7.0.1</a:t>
                       </a:r>
                       <a:endParaRPr lang="en-US" sz="1500" dirty="0"/>
                     </a:p>
@@ -16506,7 +17330,7 @@
                             <a:srgbClr val="1B2631"/>
                           </a:solidFill>
                         </a:rPr>
-                        <a:t>8.0.0 (template Nx)</a:t>
+                        <a:t>8.0.0 (generador Nx)</a:t>
                       </a:r>
                       <a:endParaRPr lang="en-US" sz="1500" dirty="0"/>
                     </a:p>
@@ -16974,7 +17798,7 @@
                             <a:srgbClr val="1B2631"/>
                           </a:solidFill>
                         </a:rPr>
-                        <a:t>9.0.0 (de Angular 20)</a:t>
+                        <a:t>9.0.0</a:t>
                       </a:r>
                       <a:endParaRPr lang="en-US" sz="1500" dirty="0"/>
                     </a:p>
@@ -17139,6 +17963,42 @@
           </a:graphicData>
         </a:graphic>
       </p:graphicFrame>
+      <p:sp>
+        <p:nvSpPr>
+          <p:cNvPr id="10" name="Text 7"/>
+          <p:cNvSpPr txBox="1"/>
+          <p:nvPr/>
+        </p:nvSpPr>
+        <p:spPr>
+          <a:xfrm>
+            <a:off x="5120640" y="5577840"/>
+            <a:ext cx="6492240" cy="411480"/>
+          </a:xfrm>
+          <a:prstGeom prst="rect">
+            <a:avLst/>
+          </a:prstGeom>
+          <a:noFill/>
+          <a:ln/>
+        </p:spPr>
+        <p:txBody>
+          <a:bodyPr wrap="square" lIns="0" tIns="0" rIns="0" bIns="0" rtlCol="0" anchor="ctr"/>
+          <a:lstStyle/>
+          <a:p>
+            <a:pPr indent="0" marL="0">
+              <a:buNone/>
+            </a:pPr>
+            <a:r>
+              <a:rPr lang="en-US" sz="1400" i="1" dirty="0">
+                <a:solidFill>
+                  <a:schemeClr val="accent6"/>
+                </a:solidFill>
+              </a:rPr>
+              <a:t>Todas las filas se probaron: instalar, compilar y abrir el login.</a:t>
+            </a:r>
+            <a:endParaRPr lang="en-US" sz="1400" dirty="0"/>
+          </a:p>
+        </p:txBody>
+      </p:sp>
       <p:sp>
         <p:nvSpPr>
           <p:cNvPr id="25" name="Slide Number Placeholder 0"/>
@@ -17241,7 +18101,7 @@
                   <a:schemeClr val="tx2"/>
                 </a:solidFill>
               </a:rPr>
-              <a:t>Preparar el entorno: tres versiones de Node y un ACS</a:t>
+              <a:t>Preparar el entorno: nvm y ACS en Docker</a:t>
             </a:r>
             <a:endParaRPr lang="en-US" sz="3400" dirty="0"/>
           </a:p>
@@ -17255,8 +18115,8 @@
         </p:nvSpPr>
         <p:spPr>
           <a:xfrm>
-            <a:off x="548640" y="1371600"/>
-            <a:ext cx="640080" cy="640080"/>
+            <a:off x="548640" y="1280160"/>
+            <a:ext cx="548640" cy="548640"/>
           </a:xfrm>
           <a:prstGeom prst="ellipse">
             <a:avLst/>
@@ -17283,8 +18143,8 @@
         </p:blipFill>
         <p:spPr>
           <a:xfrm>
-            <a:off x="708660" y="1531620"/>
-            <a:ext cx="320040" cy="320040"/>
+            <a:off x="685800" y="1417320"/>
+            <a:ext cx="274320" cy="274320"/>
           </a:xfrm>
           <a:prstGeom prst="rect">
             <a:avLst/>
@@ -17299,8 +18159,8 @@
         </p:nvSpPr>
         <p:spPr>
           <a:xfrm>
-            <a:off x="1325880" y="1371600"/>
-            <a:ext cx="2148840" cy="640080"/>
+            <a:off x="1234440" y="1280160"/>
+            <a:ext cx="2743200" cy="548640"/>
           </a:xfrm>
           <a:prstGeom prst="rect">
             <a:avLst/>
@@ -17316,14 +18176,14 @@
               <a:buNone/>
             </a:pPr>
             <a:r>
-              <a:rPr lang="en-US" sz="2000" b="1" dirty="0">
+              <a:rPr lang="en-US" sz="1800" b="1" dirty="0">
                 <a:solidFill>
                   <a:schemeClr val="tx2"/>
                 </a:solidFill>
               </a:rPr>
-              <a:t>nvm</a:t>
-            </a:r>
-            <a:endParaRPr lang="en-US" sz="2000" dirty="0"/>
+              <a:t>nvm (todos)</a:t>
+            </a:r>
+            <a:endParaRPr lang="en-US" sz="1800" dirty="0"/>
           </a:p>
         </p:txBody>
       </p:sp>
@@ -17335,12 +18195,12 @@
         </p:nvSpPr>
         <p:spPr>
           <a:xfrm>
-            <a:off x="548640" y="2194560"/>
-            <a:ext cx="2926080" cy="2651760"/>
+            <a:off x="548640" y="1920240"/>
+            <a:ext cx="3474720" cy="1965960"/>
           </a:xfrm>
           <a:prstGeom prst="roundRect">
             <a:avLst>
-              <a:gd name="adj" fmla="val 2759"/>
+              <a:gd name="adj" fmla="val 3721"/>
             </a:avLst>
           </a:prstGeom>
           <a:solidFill>
@@ -17357,8 +18217,8 @@
         </p:nvSpPr>
         <p:spPr>
           <a:xfrm>
-            <a:off x="777240" y="2359152"/>
-            <a:ext cx="2468880" cy="2322576"/>
+            <a:off x="777240" y="2084832"/>
+            <a:ext cx="3017520" cy="1636776"/>
           </a:xfrm>
           <a:prstGeom prst="rect">
             <a:avLst/>
@@ -17449,39 +18309,23 @@
             </a:r>
             <a:endParaRPr lang="en-US" sz="1400" dirty="0"/>
           </a:p>
-        </p:txBody>
-      </p:sp>
-      <p:sp>
-        <p:nvSpPr>
-          <p:cNvPr id="8" name="Text 5"/>
-          <p:cNvSpPr txBox="1"/>
-          <p:nvPr/>
-        </p:nvSpPr>
-        <p:spPr>
-          <a:xfrm>
-            <a:off x="548640" y="5029200"/>
-            <a:ext cx="2926080" cy="822960"/>
-          </a:xfrm>
-          <a:prstGeom prst="rect">
-            <a:avLst/>
-          </a:prstGeom>
-          <a:noFill/>
-          <a:ln/>
-        </p:spPr>
-        <p:txBody>
-          <a:bodyPr wrap="square" lIns="0" tIns="0" rIns="0" bIns="0" rtlCol="0" anchor="t"/>
-          <a:lstStyle/>
-          <a:p>
-            <a:pPr indent="0" marL="0">
+          <a:p>
+            <a:pPr indent="0" marL="0">
+              <a:spcAft>
+                <a:spcPts val="200"/>
+              </a:spcAft>
               <a:buNone/>
             </a:pPr>
             <a:r>
               <a:rPr lang="en-US" sz="1400" dirty="0">
                 <a:solidFill>
-                  <a:schemeClr val="tx1"/>
-                </a:solidFill>
-              </a:rPr>
-              <a:t>24: Nx, ACA 8/master, ADF 9 · 18: ACA 4/5 · 16: Yeoman</a:t>
+                  <a:schemeClr val="bg1"/>
+                </a:solidFill>
+                <a:latin typeface="Courier New" pitchFamily="34" charset="0"/>
+                <a:ea typeface="Courier New" pitchFamily="34" charset="-122"/>
+                <a:cs typeface="Courier New" pitchFamily="34" charset="-120"/>
+              </a:rPr>
+              <a:t>node -v ; npm -v</a:t>
             </a:r>
             <a:endParaRPr lang="en-US" sz="1400" dirty="0"/>
           </a:p>
@@ -17489,14 +18333,14 @@
       </p:sp>
       <p:sp>
         <p:nvSpPr>
-          <p:cNvPr id="9" name="env-ACS con Docker-circulo"/>
+          <p:cNvPr id="8" name="env-docker-circulo"/>
           <p:cNvSpPr/>
           <p:nvPr/>
         </p:nvSpPr>
         <p:spPr>
           <a:xfrm>
-            <a:off x="3657600" y="1371600"/>
-            <a:ext cx="640080" cy="640080"/>
+            <a:off x="4206240" y="1280160"/>
+            <a:ext cx="548640" cy="548640"/>
           </a:xfrm>
           <a:prstGeom prst="ellipse">
             <a:avLst/>
@@ -17509,7 +18353,7 @@
       </p:sp>
       <p:pic>
         <p:nvPicPr>
-          <p:cNvPr id="10" name="env-ACS con Docker-icono" descr="preencoded.png">    </p:cNvPr>
+          <p:cNvPr id="9" name="env-docker-icono" descr="preencoded.png">    </p:cNvPr>
           <p:cNvPicPr>
             <a:picLocks noChangeAspect="1"/>
           </p:cNvPicPr>
@@ -17523,8 +18367,8 @@
         </p:blipFill>
         <p:spPr>
           <a:xfrm>
-            <a:off x="3817620" y="1531620"/>
-            <a:ext cx="320040" cy="320040"/>
+            <a:off x="4343400" y="1417320"/>
+            <a:ext cx="274320" cy="274320"/>
           </a:xfrm>
           <a:prstGeom prst="rect">
             <a:avLst/>
@@ -17533,14 +18377,14 @@
       </p:pic>
       <p:sp>
         <p:nvSpPr>
-          <p:cNvPr id="11" name="Text 7"/>
+          <p:cNvPr id="10" name="Text 6"/>
           <p:cNvSpPr txBox="1"/>
           <p:nvPr/>
         </p:nvSpPr>
         <p:spPr>
           <a:xfrm>
-            <a:off x="4434840" y="1371600"/>
-            <a:ext cx="3703320" cy="640080"/>
+            <a:off x="4892040" y="1280160"/>
+            <a:ext cx="6675120" cy="548640"/>
           </a:xfrm>
           <a:prstGeom prst="rect">
             <a:avLst/>
@@ -17556,31 +18400,31 @@
               <a:buNone/>
             </a:pPr>
             <a:r>
-              <a:rPr lang="en-US" sz="2000" b="1" dirty="0">
+              <a:rPr lang="en-US" sz="1800" b="1" dirty="0">
                 <a:solidFill>
                   <a:schemeClr val="tx2"/>
                 </a:solidFill>
               </a:rPr>
-              <a:t>ACS con Docker</a:t>
-            </a:r>
-            <a:endParaRPr lang="en-US" sz="2000" dirty="0"/>
-          </a:p>
-        </p:txBody>
-      </p:sp>
-      <p:sp>
-        <p:nvSpPr>
-          <p:cNvPr id="12" name="env-ACS con Docker-fondo"/>
+              <a:t>ACS con Docker (8–12 GB de RAM)</a:t>
+            </a:r>
+            <a:endParaRPr lang="en-US" sz="1800" dirty="0"/>
+          </a:p>
+        </p:txBody>
+      </p:sp>
+      <p:sp>
+        <p:nvSpPr>
+          <p:cNvPr id="11" name="env-docker-fondo"/>
           <p:cNvSpPr/>
           <p:nvPr/>
         </p:nvSpPr>
         <p:spPr>
           <a:xfrm>
-            <a:off x="3657600" y="2194560"/>
-            <a:ext cx="4480560" cy="2651760"/>
+            <a:off x="4206240" y="1920240"/>
+            <a:ext cx="7406640" cy="1965960"/>
           </a:xfrm>
           <a:prstGeom prst="roundRect">
             <a:avLst>
-              <a:gd name="adj" fmla="val 2759"/>
+              <a:gd name="adj" fmla="val 3721"/>
             </a:avLst>
           </a:prstGeom>
           <a:solidFill>
@@ -17591,14 +18435,14 @@
       </p:sp>
       <p:sp>
         <p:nvSpPr>
-          <p:cNvPr id="13" name="env-ACS con Docker-codigo"/>
+          <p:cNvPr id="12" name="env-docker-codigo"/>
           <p:cNvSpPr txBox="1"/>
           <p:nvPr/>
         </p:nvSpPr>
         <p:spPr>
           <a:xfrm>
-            <a:off x="3886200" y="2359152"/>
-            <a:ext cx="4023360" cy="2322576"/>
+            <a:off x="4434840" y="2084832"/>
+            <a:ext cx="6949440" cy="1636776"/>
           </a:xfrm>
           <a:prstGeom prst="rect">
             <a:avLst/>
@@ -17619,13 +18463,13 @@
             <a:r>
               <a:rPr lang="en-US" sz="1400" dirty="0">
                 <a:solidFill>
-                  <a:schemeClr val="accent1"/>
+                  <a:schemeClr val="bg1"/>
                 </a:solidFill>
                 <a:latin typeface="Courier New" pitchFamily="34" charset="0"/>
                 <a:ea typeface="Courier New" pitchFamily="34" charset="-122"/>
                 <a:cs typeface="Courier New" pitchFamily="34" charset="-120"/>
               </a:rPr>
-              <a:t># &lt;repo&gt;: github.com/Alfresco/</a:t>
+              <a:t>git clone --depth 1 `</a:t>
             </a:r>
             <a:endParaRPr lang="en-US" sz="1400" dirty="0"/>
           </a:p>
@@ -17639,13 +18483,13 @@
             <a:r>
               <a:rPr lang="en-US" sz="1400" dirty="0">
                 <a:solidFill>
-                  <a:schemeClr val="accent1"/>
+                  <a:schemeClr val="bg1"/>
                 </a:solidFill>
                 <a:latin typeface="Courier New" pitchFamily="34" charset="0"/>
                 <a:ea typeface="Courier New" pitchFamily="34" charset="-122"/>
                 <a:cs typeface="Courier New" pitchFamily="34" charset="-120"/>
               </a:rPr>
-              <a:t>#         acs-deployment.git</a:t>
+              <a:t>  https://github.com/Alfresco/acs-deployment.git</a:t>
             </a:r>
             <a:endParaRPr lang="en-US" sz="1400" dirty="0"/>
           </a:p>
@@ -17665,7 +18509,7 @@
                 <a:ea typeface="Courier New" pitchFamily="34" charset="-122"/>
                 <a:cs typeface="Courier New" pitchFamily="34" charset="-120"/>
               </a:rPr>
-              <a:t>git clone --depth 1 &lt;repo&gt;</a:t>
+              <a:t>cd acs-deployment\docker-compose</a:t>
             </a:r>
             <a:endParaRPr lang="en-US" sz="1400" dirty="0"/>
           </a:p>
@@ -17685,7 +18529,7 @@
                 <a:ea typeface="Courier New" pitchFamily="34" charset="-122"/>
                 <a:cs typeface="Courier New" pitchFamily="34" charset="-120"/>
               </a:rPr>
-              <a:t>cd acs-deployment\docker-compose</a:t>
+              <a:t>docker compose -f community-compose.yaml up -d</a:t>
             </a:r>
             <a:endParaRPr lang="en-US" sz="1400" dirty="0"/>
           </a:p>
@@ -17699,84 +18543,28 @@
             <a:r>
               <a:rPr lang="en-US" sz="1400" dirty="0">
                 <a:solidFill>
-                  <a:schemeClr val="bg1"/>
+                  <a:schemeClr val="accent1"/>
                 </a:solidFill>
                 <a:latin typeface="Courier New" pitchFamily="34" charset="0"/>
                 <a:ea typeface="Courier New" pitchFamily="34" charset="-122"/>
                 <a:cs typeface="Courier New" pitchFamily="34" charset="-120"/>
               </a:rPr>
-              <a:t>docker compose `</a:t>
+              <a:t># usuario admin / admin</a:t>
             </a:r>
             <a:endParaRPr lang="en-US" sz="1400" dirty="0"/>
           </a:p>
-          <a:p>
-            <a:pPr indent="0" marL="0">
-              <a:spcAft>
-                <a:spcPts val="200"/>
-              </a:spcAft>
-              <a:buNone/>
-            </a:pPr>
-            <a:r>
-              <a:rPr lang="en-US" sz="1400" dirty="0">
-                <a:solidFill>
-                  <a:schemeClr val="bg1"/>
-                </a:solidFill>
-                <a:latin typeface="Courier New" pitchFamily="34" charset="0"/>
-                <a:ea typeface="Courier New" pitchFamily="34" charset="-122"/>
-                <a:cs typeface="Courier New" pitchFamily="34" charset="-120"/>
-              </a:rPr>
-              <a:t>  -f community-compose.yaml up -d</a:t>
-            </a:r>
-            <a:endParaRPr lang="en-US" sz="1400" dirty="0"/>
-          </a:p>
-        </p:txBody>
-      </p:sp>
-      <p:sp>
-        <p:nvSpPr>
-          <p:cNvPr id="14" name="Text 10"/>
-          <p:cNvSpPr txBox="1"/>
-          <p:nvPr/>
-        </p:nvSpPr>
-        <p:spPr>
-          <a:xfrm>
-            <a:off x="3657600" y="5029200"/>
-            <a:ext cx="4480560" cy="822960"/>
-          </a:xfrm>
-          <a:prstGeom prst="rect">
-            <a:avLst/>
-          </a:prstGeom>
-          <a:noFill/>
-          <a:ln/>
-        </p:spPr>
-        <p:txBody>
-          <a:bodyPr wrap="square" lIns="0" tIns="0" rIns="0" bIns="0" rtlCol="0" anchor="t"/>
-          <a:lstStyle/>
-          <a:p>
-            <a:pPr indent="0" marL="0">
-              <a:buNone/>
-            </a:pPr>
-            <a:r>
-              <a:rPr lang="en-US" sz="1400" dirty="0">
-                <a:solidFill>
-                  <a:schemeClr val="tx1"/>
-                </a:solidFill>
-              </a:rPr>
-              <a:t>admin / admin · 8–12 GB de RAM para Docker</a:t>
-            </a:r>
-            <a:endParaRPr lang="en-US" sz="1400" dirty="0"/>
-          </a:p>
-        </p:txBody>
-      </p:sp>
-      <p:sp>
-        <p:nvSpPr>
-          <p:cNvPr id="15" name="env-Solo para Yeoman-circulo"/>
+        </p:txBody>
+      </p:sp>
+      <p:sp>
+        <p:nvSpPr>
+          <p:cNvPr id="13" name="env-yo-circulo"/>
           <p:cNvSpPr/>
           <p:nvPr/>
         </p:nvSpPr>
         <p:spPr>
           <a:xfrm>
-            <a:off x="8321040" y="1371600"/>
-            <a:ext cx="640080" cy="640080"/>
+            <a:off x="548640" y="4069080"/>
+            <a:ext cx="548640" cy="548640"/>
           </a:xfrm>
           <a:prstGeom prst="ellipse">
             <a:avLst/>
@@ -17789,7 +18577,7 @@
       </p:sp>
       <p:pic>
         <p:nvPicPr>
-          <p:cNvPr id="16" name="env-Solo para Yeoman-icono" descr="preencoded.png">    </p:cNvPr>
+          <p:cNvPr id="14" name="env-yo-icono" descr="preencoded.png">    </p:cNvPr>
           <p:cNvPicPr>
             <a:picLocks noChangeAspect="1"/>
           </p:cNvPicPr>
@@ -17803,8 +18591,8 @@
         </p:blipFill>
         <p:spPr>
           <a:xfrm>
-            <a:off x="8481060" y="1531620"/>
-            <a:ext cx="320040" cy="320040"/>
+            <a:off x="685800" y="4206240"/>
+            <a:ext cx="274320" cy="274320"/>
           </a:xfrm>
           <a:prstGeom prst="rect">
             <a:avLst/>
@@ -17813,14 +18601,14 @@
       </p:pic>
       <p:sp>
         <p:nvSpPr>
-          <p:cNvPr id="17" name="Text 12"/>
+          <p:cNvPr id="15" name="Text 10"/>
           <p:cNvSpPr txBox="1"/>
           <p:nvPr/>
         </p:nvSpPr>
         <p:spPr>
           <a:xfrm>
-            <a:off x="9098280" y="1371600"/>
-            <a:ext cx="2514600" cy="640080"/>
+            <a:off x="1234440" y="4069080"/>
+            <a:ext cx="10332720" cy="548640"/>
           </a:xfrm>
           <a:prstGeom prst="rect">
             <a:avLst/>
@@ -17836,31 +18624,31 @@
               <a:buNone/>
             </a:pPr>
             <a:r>
-              <a:rPr lang="en-US" sz="2000" b="1" dirty="0">
+              <a:rPr lang="en-US" sz="1800" b="1" dirty="0">
                 <a:solidFill>
                   <a:schemeClr val="tx2"/>
                 </a:solidFill>
               </a:rPr>
-              <a:t>Solo para Yeoman</a:t>
-            </a:r>
-            <a:endParaRPr lang="en-US" sz="2000" dirty="0"/>
-          </a:p>
-        </p:txBody>
-      </p:sp>
-      <p:sp>
-        <p:nvSpPr>
-          <p:cNvPr id="18" name="env-Solo para Yeoman-fondo"/>
+              <a:t>Solo para Yeoman: Visual Studio Build Tools 2022 + Python setuptools</a:t>
+            </a:r>
+            <a:endParaRPr lang="en-US" sz="1800" dirty="0"/>
+          </a:p>
+        </p:txBody>
+      </p:sp>
+      <p:sp>
+        <p:nvSpPr>
+          <p:cNvPr id="16" name="env-yo-fondo"/>
           <p:cNvSpPr/>
           <p:nvPr/>
         </p:nvSpPr>
         <p:spPr>
           <a:xfrm>
-            <a:off x="8321040" y="2194560"/>
-            <a:ext cx="3291840" cy="2651760"/>
+            <a:off x="548640" y="4709160"/>
+            <a:ext cx="11064240" cy="1554480"/>
           </a:xfrm>
           <a:prstGeom prst="roundRect">
             <a:avLst>
-              <a:gd name="adj" fmla="val 2759"/>
+              <a:gd name="adj" fmla="val 4706"/>
             </a:avLst>
           </a:prstGeom>
           <a:solidFill>
@@ -17871,14 +18659,14 @@
       </p:sp>
       <p:sp>
         <p:nvSpPr>
-          <p:cNvPr id="19" name="env-Solo para Yeoman-codigo"/>
+          <p:cNvPr id="17" name="env-yo-codigo"/>
           <p:cNvSpPr txBox="1"/>
           <p:nvPr/>
         </p:nvSpPr>
         <p:spPr>
           <a:xfrm>
-            <a:off x="8549640" y="2359152"/>
-            <a:ext cx="2834640" cy="2322576"/>
+            <a:off x="777240" y="4873752"/>
+            <a:ext cx="10607040" cy="1225296"/>
           </a:xfrm>
           <a:prstGeom prst="rect">
             <a:avLst/>
@@ -17897,7 +18685,7 @@
               <a:buNone/>
             </a:pPr>
             <a:r>
-              <a:rPr lang="en-US" sz="1400" dirty="0">
+              <a:rPr lang="en-US" sz="1300" dirty="0">
                 <a:solidFill>
                   <a:schemeClr val="accent1"/>
                 </a:solidFill>
@@ -17905,9 +18693,9 @@
                 <a:ea typeface="Courier New" pitchFamily="34" charset="-122"/>
                 <a:cs typeface="Courier New" pitchFamily="34" charset="-120"/>
               </a:rPr>
-              <a:t># VS Build Tools 2022</a:t>
-            </a:r>
-            <a:endParaRPr lang="en-US" sz="1400" dirty="0"/>
+              <a:t># PowerShell como administrador</a:t>
+            </a:r>
+            <a:endParaRPr lang="en-US" sz="1300" dirty="0"/>
           </a:p>
           <a:p>
             <a:pPr indent="0" marL="0">
@@ -17917,17 +18705,17 @@
               <a:buNone/>
             </a:pPr>
             <a:r>
-              <a:rPr lang="en-US" sz="1400" dirty="0">
-                <a:solidFill>
-                  <a:schemeClr val="accent1"/>
+              <a:rPr lang="en-US" sz="1300" dirty="0">
+                <a:solidFill>
+                  <a:schemeClr val="bg1"/>
                 </a:solidFill>
                 <a:latin typeface="Courier New" pitchFamily="34" charset="0"/>
                 <a:ea typeface="Courier New" pitchFamily="34" charset="-122"/>
                 <a:cs typeface="Courier New" pitchFamily="34" charset="-120"/>
               </a:rPr>
-              <a:t># + Desarrollo C++</a:t>
-            </a:r>
-            <a:endParaRPr lang="en-US" sz="1400" dirty="0"/>
+              <a:t>winget install --id Microsoft.VisualStudio.2022.BuildTools `</a:t>
+            </a:r>
+            <a:endParaRPr lang="en-US" sz="1300" dirty="0"/>
           </a:p>
           <a:p>
             <a:pPr indent="0" marL="0">
@@ -17937,7 +18725,7 @@
               <a:buNone/>
             </a:pPr>
             <a:r>
-              <a:rPr lang="en-US" sz="1400" dirty="0">
+              <a:rPr lang="en-US" sz="1300" dirty="0">
                 <a:solidFill>
                   <a:schemeClr val="bg1"/>
                 </a:solidFill>
@@ -17945,9 +18733,9 @@
                 <a:ea typeface="Courier New" pitchFamily="34" charset="-122"/>
                 <a:cs typeface="Courier New" pitchFamily="34" charset="-120"/>
               </a:rPr>
-              <a:t>pip install setuptools</a:t>
-            </a:r>
-            <a:endParaRPr lang="en-US" sz="1400" dirty="0"/>
+              <a:t>  --override "--wait --passive --add Microsoft.VisualStudio.Workload.VCTools --includeRecommended"</a:t>
+            </a:r>
+            <a:endParaRPr lang="en-US" sz="1300" dirty="0"/>
           </a:p>
           <a:p>
             <a:pPr indent="0" marL="0">
@@ -17957,7 +18745,7 @@
               <a:buNone/>
             </a:pPr>
             <a:r>
-              <a:rPr lang="en-US" sz="1400" dirty="0">
+              <a:rPr lang="en-US" sz="1300" dirty="0">
                 <a:solidFill>
                   <a:schemeClr val="bg1"/>
                 </a:solidFill>
@@ -17965,9 +18753,9 @@
                 <a:ea typeface="Courier New" pitchFamily="34" charset="-122"/>
                 <a:cs typeface="Courier New" pitchFamily="34" charset="-120"/>
               </a:rPr>
-              <a:t>npm config set `</a:t>
-            </a:r>
-            <a:endParaRPr lang="en-US" sz="1400" dirty="0"/>
+              <a:t>python -m pip install setuptools</a:t>
+            </a:r>
+            <a:endParaRPr lang="en-US" sz="1300" dirty="0"/>
           </a:p>
           <a:p>
             <a:pPr indent="0" marL="0">
@@ -17977,7 +18765,7 @@
               <a:buNone/>
             </a:pPr>
             <a:r>
-              <a:rPr lang="en-US" sz="1400" dirty="0">
+              <a:rPr lang="en-US" sz="1300" dirty="0">
                 <a:solidFill>
                   <a:schemeClr val="bg1"/>
                 </a:solidFill>
@@ -17985,45 +18773,9 @@
                 <a:ea typeface="Courier New" pitchFamily="34" charset="-122"/>
                 <a:cs typeface="Courier New" pitchFamily="34" charset="-120"/>
               </a:rPr>
-              <a:t>  msvs_version 2022</a:t>
-            </a:r>
-            <a:endParaRPr lang="en-US" sz="1400" dirty="0"/>
-          </a:p>
-        </p:txBody>
-      </p:sp>
-      <p:sp>
-        <p:nvSpPr>
-          <p:cNvPr id="20" name="Text 15"/>
-          <p:cNvSpPr txBox="1"/>
-          <p:nvPr/>
-        </p:nvSpPr>
-        <p:spPr>
-          <a:xfrm>
-            <a:off x="8321040" y="5029200"/>
-            <a:ext cx="3291840" cy="822960"/>
-          </a:xfrm>
-          <a:prstGeom prst="rect">
-            <a:avLst/>
-          </a:prstGeom>
-          <a:noFill/>
-          <a:ln/>
-        </p:spPr>
-        <p:txBody>
-          <a:bodyPr wrap="square" lIns="0" tIns="0" rIns="0" bIns="0" rtlCol="0" anchor="t"/>
-          <a:lstStyle/>
-          <a:p>
-            <a:pPr indent="0" marL="0">
-              <a:buNone/>
-            </a:pPr>
-            <a:r>
-              <a:rPr lang="en-US" sz="1400" dirty="0">
-                <a:solidFill>
-                  <a:schemeClr val="tx1"/>
-                </a:solidFill>
-              </a:rPr>
-              <a:t>Build Tools 2022, no la 2026</a:t>
-            </a:r>
-            <a:endParaRPr lang="en-US" sz="1400" dirty="0"/>
+              <a:t>npm config set msvs_version 2022</a:t>
+            </a:r>
+            <a:endParaRPr lang="en-US" sz="1300" dirty="0"/>
           </a:p>
         </p:txBody>
       </p:sp>
@@ -18487,7 +19239,7 @@
                   <a:schemeClr val="tx1"/>
                 </a:solidFill>
               </a:rPr>
-              <a:t>Angular 14 soporta oficialmente Node 14.15+ y 16.10+</a:t>
+              <a:t>Versión con la que se generó y compiló el proyecto</a:t>
             </a:r>
             <a:endParaRPr lang="en-US" sz="1500" dirty="0"/>
           </a:p>
@@ -18719,7 +19471,7 @@
                   <a:schemeClr val="tx1"/>
                 </a:solidFill>
               </a:rPr>
-              <a:t>El generador compila deasync (módulo nativo). node-gyp 9 no reconoce VS 2026</a:t>
+              <a:t>El generador compila deasync, un módulo nativo de C++</a:t>
             </a:r>
             <a:endParaRPr lang="en-US" sz="1500" dirty="0"/>
           </a:p>
@@ -18727,7 +19479,7 @@
       </p:sp>
       <p:sp>
         <p:nvSpPr>
-          <p:cNvPr id="15" name="yreq-Python 3 + setuptools (si es ≥ 3.12)-circulo"/>
+          <p:cNvPr id="15" name="yreq-Python 3 + setuptools-circulo"/>
           <p:cNvSpPr/>
           <p:nvPr/>
         </p:nvSpPr>
@@ -18747,7 +19499,7 @@
       </p:sp>
       <p:pic>
         <p:nvPicPr>
-          <p:cNvPr id="16" name="yreq-Python 3 + setuptools (si es ≥ 3.12)-icono" descr="preencoded.png">    </p:cNvPr>
+          <p:cNvPr id="16" name="yreq-Python 3 + setuptools-icono" descr="preencoded.png">    </p:cNvPr>
           <p:cNvPicPr>
             <a:picLocks noChangeAspect="1"/>
           </p:cNvPicPr>
@@ -18799,7 +19551,7 @@
                   <a:schemeClr val="tx2"/>
                 </a:solidFill>
               </a:rPr>
-              <a:t>Python 3 + setuptools (si es ≥ 3.12)</a:t>
+              <a:t>Python 3 + setuptools</a:t>
             </a:r>
             <a:endParaRPr lang="en-US" sz="2000" dirty="0"/>
           </a:p>
@@ -18835,7 +19587,7 @@
                   <a:schemeClr val="tx1"/>
                 </a:solidFill>
               </a:rPr>
-              <a:t>node-gyp 9 importa distutils, eliminado en Python 3.12</a:t>
+              <a:t>node-gyp lo necesita; con Python 3.12+ falta distutils sin setuptools</a:t>
             </a:r>
             <a:endParaRPr lang="en-US" sz="1500" dirty="0"/>
           </a:p>
@@ -18843,7 +19595,7 @@
       </p:sp>
       <p:sp>
         <p:nvSpPr>
-          <p:cNvPr id="19" name="yreq-deasync"/>
+          <p:cNvPr id="19" name="yreq-instalar"/>
           <p:cNvSpPr/>
           <p:nvPr/>
         </p:nvSpPr>
@@ -18893,793 +19645,22 @@
                   <a:schemeClr val="tx2"/>
                 </a:solidFill>
               </a:rPr>
-              <a:t>¿Por qué compila?</a:t>
+              <a:t>Instalarlos</a:t>
             </a:r>
             <a:endParaRPr lang="en-US" sz="2000" dirty="0"/>
           </a:p>
         </p:txBody>
       </p:sp>
-      <p:graphicFrame>
-        <p:nvGraphicFramePr>
-          <p:cNvPr id="8" name="yreq-tabla"/>
-          <p:cNvGraphicFramePr>
-            <a:graphicFrameLocks noGrp="1"/>
-          </p:cNvGraphicFramePr>
-          <p:nvPr>
-            <p:extLst>
-              <p:ext uri="{D42A27DB-BD31-4B8C-83A1-F6EECF244321}">
-                <p14:modId xmlns:p14="http://schemas.microsoft.com/office/powerpoint/2010/main" val="1579011935"/>
-              </p:ext>
-            </p:extLst>
-          </p:nvPr>
-        </p:nvGraphicFramePr>
-        <p:xfrm>
-          <a:off x="7680960" y="2240280"/>
-          <a:ext cx="3657600" cy="914400"/>
-        </p:xfrm>
-        <a:graphic>
-          <a:graphicData uri="http://schemas.openxmlformats.org/drawingml/2006/table">
-            <a:tbl>
-              <a:tblPr/>
-              <a:tblGrid>
-                <a:gridCol w="1325880"/>
-                <a:gridCol w="1051560"/>
-                <a:gridCol w="1280160"/>
-              </a:tblGrid>
-              <a:tr h="457200">
-                <a:tc>
-                  <a:txBody>
-                    <a:bodyPr/>
-                    <a:lstStyle/>
-                    <a:p>
-                      <a:pPr indent="0" marL="0">
-                        <a:buNone/>
-                      </a:pPr>
-                      <a:r>
-                        <a:rPr lang="en-US" sz="1400" b="1" dirty="0">
-                          <a:solidFill>
-                            <a:srgbClr val="FFFFFF"/>
-                          </a:solidFill>
-                        </a:rPr>
-                        <a:t>Generador</a:t>
-                      </a:r>
-                      <a:endParaRPr lang="en-US" sz="1400" dirty="0"/>
-                    </a:p>
-                  </a:txBody>
-                  <a:tcPr marL="73152" marR="73152" marT="0" marB="0">
-                    <a:lnL w="9525" cap="flat" cmpd="sng" algn="ctr">
-                      <a:solidFill>
-                        <a:srgbClr val="C9D5DB"/>
-                      </a:solidFill>
-                      <a:prstDash val="solid"/>
-                      <a:round/>
-                      <a:headEnd type="none" w="med" len="med"/>
-                      <a:tailEnd type="none" w="med" len="med"/>
-                    </a:lnL>
-                    <a:lnR w="9525" cap="flat" cmpd="sng" algn="ctr">
-                      <a:solidFill>
-                        <a:srgbClr val="C9D5DB"/>
-                      </a:solidFill>
-                      <a:prstDash val="solid"/>
-                      <a:round/>
-                      <a:headEnd type="none" w="med" len="med"/>
-                      <a:tailEnd type="none" w="med" len="med"/>
-                    </a:lnR>
-                    <a:lnT w="9525" cap="flat" cmpd="sng" algn="ctr">
-                      <a:solidFill>
-                        <a:srgbClr val="C9D5DB"/>
-                      </a:solidFill>
-                      <a:prstDash val="solid"/>
-                      <a:round/>
-                      <a:headEnd type="none" w="med" len="med"/>
-                      <a:tailEnd type="none" w="med" len="med"/>
-                    </a:lnT>
-                    <a:lnB w="9525" cap="flat" cmpd="sng" algn="ctr">
-                      <a:solidFill>
-                        <a:srgbClr val="C9D5DB"/>
-                      </a:solidFill>
-                      <a:prstDash val="solid"/>
-                      <a:round/>
-                      <a:headEnd type="none" w="med" len="med"/>
-                      <a:tailEnd type="none" w="med" len="med"/>
-                    </a:lnB>
-                    <a:solidFill>
-                      <a:srgbClr val="0B3142"/>
-                    </a:solidFill>
-                  </a:tcPr>
-                </a:tc>
-                <a:tc>
-                  <a:txBody>
-                    <a:bodyPr/>
-                    <a:lstStyle/>
-                    <a:p>
-                      <a:pPr indent="0" marL="0">
-                        <a:buNone/>
-                      </a:pPr>
-                      <a:r>
-                        <a:rPr lang="en-US" sz="1400" b="1" dirty="0">
-                          <a:solidFill>
-                            <a:srgbClr val="FFFFFF"/>
-                          </a:solidFill>
-                        </a:rPr>
-                        <a:t>deasync</a:t>
-                      </a:r>
-                      <a:endParaRPr lang="en-US" sz="1400" dirty="0"/>
-                    </a:p>
-                  </a:txBody>
-                  <a:tcPr marL="73152" marR="73152" marT="0" marB="0">
-                    <a:lnL w="9525" cap="flat" cmpd="sng" algn="ctr">
-                      <a:solidFill>
-                        <a:srgbClr val="C9D5DB"/>
-                      </a:solidFill>
-                      <a:prstDash val="solid"/>
-                      <a:round/>
-                      <a:headEnd type="none" w="med" len="med"/>
-                      <a:tailEnd type="none" w="med" len="med"/>
-                    </a:lnL>
-                    <a:lnR w="9525" cap="flat" cmpd="sng" algn="ctr">
-                      <a:solidFill>
-                        <a:srgbClr val="C9D5DB"/>
-                      </a:solidFill>
-                      <a:prstDash val="solid"/>
-                      <a:round/>
-                      <a:headEnd type="none" w="med" len="med"/>
-                      <a:tailEnd type="none" w="med" len="med"/>
-                    </a:lnR>
-                    <a:lnT w="9525" cap="flat" cmpd="sng" algn="ctr">
-                      <a:solidFill>
-                        <a:srgbClr val="C9D5DB"/>
-                      </a:solidFill>
-                      <a:prstDash val="solid"/>
-                      <a:round/>
-                      <a:headEnd type="none" w="med" len="med"/>
-                      <a:tailEnd type="none" w="med" len="med"/>
-                    </a:lnT>
-                    <a:lnB w="9525" cap="flat" cmpd="sng" algn="ctr">
-                      <a:solidFill>
-                        <a:srgbClr val="C9D5DB"/>
-                      </a:solidFill>
-                      <a:prstDash val="solid"/>
-                      <a:round/>
-                      <a:headEnd type="none" w="med" len="med"/>
-                      <a:tailEnd type="none" w="med" len="med"/>
-                    </a:lnB>
-                    <a:solidFill>
-                      <a:srgbClr val="0B3142"/>
-                    </a:solidFill>
-                  </a:tcPr>
-                </a:tc>
-                <a:tc>
-                  <a:txBody>
-                    <a:bodyPr/>
-                    <a:lstStyle/>
-                    <a:p>
-                      <a:pPr indent="0" marL="0">
-                        <a:buNone/>
-                      </a:pPr>
-                      <a:r>
-                        <a:rPr lang="en-US" sz="1400" b="1" dirty="0">
-                          <a:solidFill>
-                            <a:srgbClr val="FFFFFF"/>
-                          </a:solidFill>
-                        </a:rPr>
-                        <a:t>¿Compila?</a:t>
-                      </a:r>
-                      <a:endParaRPr lang="en-US" sz="1400" dirty="0"/>
-                    </a:p>
-                  </a:txBody>
-                  <a:tcPr marL="73152" marR="73152" marT="0" marB="0">
-                    <a:lnL w="9525" cap="flat" cmpd="sng" algn="ctr">
-                      <a:solidFill>
-                        <a:srgbClr val="C9D5DB"/>
-                      </a:solidFill>
-                      <a:prstDash val="solid"/>
-                      <a:round/>
-                      <a:headEnd type="none" w="med" len="med"/>
-                      <a:tailEnd type="none" w="med" len="med"/>
-                    </a:lnL>
-                    <a:lnR w="9525" cap="flat" cmpd="sng" algn="ctr">
-                      <a:solidFill>
-                        <a:srgbClr val="C9D5DB"/>
-                      </a:solidFill>
-                      <a:prstDash val="solid"/>
-                      <a:round/>
-                      <a:headEnd type="none" w="med" len="med"/>
-                      <a:tailEnd type="none" w="med" len="med"/>
-                    </a:lnR>
-                    <a:lnT w="9525" cap="flat" cmpd="sng" algn="ctr">
-                      <a:solidFill>
-                        <a:srgbClr val="C9D5DB"/>
-                      </a:solidFill>
-                      <a:prstDash val="solid"/>
-                      <a:round/>
-                      <a:headEnd type="none" w="med" len="med"/>
-                      <a:tailEnd type="none" w="med" len="med"/>
-                    </a:lnT>
-                    <a:lnB w="9525" cap="flat" cmpd="sng" algn="ctr">
-                      <a:solidFill>
-                        <a:srgbClr val="C9D5DB"/>
-                      </a:solidFill>
-                      <a:prstDash val="solid"/>
-                      <a:round/>
-                      <a:headEnd type="none" w="med" len="med"/>
-                      <a:tailEnd type="none" w="med" len="med"/>
-                    </a:lnB>
-                    <a:solidFill>
-                      <a:srgbClr val="0B3142"/>
-                    </a:solidFill>
-                  </a:tcPr>
-                </a:tc>
-              </a:tr>
-              <a:tr h="457200">
-                <a:tc>
-                  <a:txBody>
-                    <a:bodyPr/>
-                    <a:lstStyle/>
-                    <a:p>
-                      <a:pPr indent="0" marL="0">
-                        <a:buNone/>
-                      </a:pPr>
-                      <a:r>
-                        <a:rPr lang="en-US" sz="1400" dirty="0">
-                          <a:solidFill>
-                            <a:srgbClr val="1B2631"/>
-                          </a:solidFill>
-                        </a:rPr>
-                        <a:t>2.0.0</a:t>
-                      </a:r>
-                      <a:endParaRPr lang="en-US" sz="1400" dirty="0"/>
-                    </a:p>
-                  </a:txBody>
-                  <a:tcPr marL="73152" marR="73152" marT="0" marB="0">
-                    <a:lnL w="9525" cap="flat" cmpd="sng" algn="ctr">
-                      <a:solidFill>
-                        <a:srgbClr val="C9D5DB"/>
-                      </a:solidFill>
-                      <a:prstDash val="solid"/>
-                      <a:round/>
-                      <a:headEnd type="none" w="med" len="med"/>
-                      <a:tailEnd type="none" w="med" len="med"/>
-                    </a:lnL>
-                    <a:lnR w="9525" cap="flat" cmpd="sng" algn="ctr">
-                      <a:solidFill>
-                        <a:srgbClr val="C9D5DB"/>
-                      </a:solidFill>
-                      <a:prstDash val="solid"/>
-                      <a:round/>
-                      <a:headEnd type="none" w="med" len="med"/>
-                      <a:tailEnd type="none" w="med" len="med"/>
-                    </a:lnR>
-                    <a:lnT w="9525" cap="flat" cmpd="sng" algn="ctr">
-                      <a:solidFill>
-                        <a:srgbClr val="C9D5DB"/>
-                      </a:solidFill>
-                      <a:prstDash val="solid"/>
-                      <a:round/>
-                      <a:headEnd type="none" w="med" len="med"/>
-                      <a:tailEnd type="none" w="med" len="med"/>
-                    </a:lnT>
-                    <a:lnB w="9525" cap="flat" cmpd="sng" algn="ctr">
-                      <a:solidFill>
-                        <a:srgbClr val="C9D5DB"/>
-                      </a:solidFill>
-                      <a:prstDash val="solid"/>
-                      <a:round/>
-                      <a:headEnd type="none" w="med" len="med"/>
-                      <a:tailEnd type="none" w="med" len="med"/>
-                    </a:lnB>
-                    <a:solidFill>
-                      <a:srgbClr val="FFFFFF"/>
-                    </a:solidFill>
-                  </a:tcPr>
-                </a:tc>
-                <a:tc>
-                  <a:txBody>
-                    <a:bodyPr/>
-                    <a:lstStyle/>
-                    <a:p>
-                      <a:pPr indent="0" marL="0">
-                        <a:buNone/>
-                      </a:pPr>
-                      <a:r>
-                        <a:rPr lang="en-US" sz="1400" dirty="0">
-                          <a:solidFill>
-                            <a:srgbClr val="1B2631"/>
-                          </a:solidFill>
-                        </a:rPr>
-                        <a:t>no usa</a:t>
-                      </a:r>
-                      <a:endParaRPr lang="en-US" sz="1400" dirty="0"/>
-                    </a:p>
-                  </a:txBody>
-                  <a:tcPr marL="73152" marR="73152" marT="0" marB="0">
-                    <a:lnL w="9525" cap="flat" cmpd="sng" algn="ctr">
-                      <a:solidFill>
-                        <a:srgbClr val="C9D5DB"/>
-                      </a:solidFill>
-                      <a:prstDash val="solid"/>
-                      <a:round/>
-                      <a:headEnd type="none" w="med" len="med"/>
-                      <a:tailEnd type="none" w="med" len="med"/>
-                    </a:lnL>
-                    <a:lnR w="9525" cap="flat" cmpd="sng" algn="ctr">
-                      <a:solidFill>
-                        <a:srgbClr val="C9D5DB"/>
-                      </a:solidFill>
-                      <a:prstDash val="solid"/>
-                      <a:round/>
-                      <a:headEnd type="none" w="med" len="med"/>
-                      <a:tailEnd type="none" w="med" len="med"/>
-                    </a:lnR>
-                    <a:lnT w="9525" cap="flat" cmpd="sng" algn="ctr">
-                      <a:solidFill>
-                        <a:srgbClr val="C9D5DB"/>
-                      </a:solidFill>
-                      <a:prstDash val="solid"/>
-                      <a:round/>
-                      <a:headEnd type="none" w="med" len="med"/>
-                      <a:tailEnd type="none" w="med" len="med"/>
-                    </a:lnT>
-                    <a:lnB w="9525" cap="flat" cmpd="sng" algn="ctr">
-                      <a:solidFill>
-                        <a:srgbClr val="C9D5DB"/>
-                      </a:solidFill>
-                      <a:prstDash val="solid"/>
-                      <a:round/>
-                      <a:headEnd type="none" w="med" len="med"/>
-                      <a:tailEnd type="none" w="med" len="med"/>
-                    </a:lnB>
-                    <a:solidFill>
-                      <a:srgbClr val="FFFFFF"/>
-                    </a:solidFill>
-                  </a:tcPr>
-                </a:tc>
-                <a:tc>
-                  <a:txBody>
-                    <a:bodyPr/>
-                    <a:lstStyle/>
-                    <a:p>
-                      <a:pPr indent="0" marL="0">
-                        <a:buNone/>
-                      </a:pPr>
-                      <a:r>
-                        <a:rPr lang="en-US" sz="1400" dirty="0">
-                          <a:solidFill>
-                            <a:srgbClr val="1B2631"/>
-                          </a:solidFill>
-                        </a:rPr>
-                        <a:t>No</a:t>
-                      </a:r>
-                      <a:endParaRPr lang="en-US" sz="1400" dirty="0"/>
-                    </a:p>
-                  </a:txBody>
-                  <a:tcPr marL="73152" marR="73152" marT="0" marB="0">
-                    <a:lnL w="9525" cap="flat" cmpd="sng" algn="ctr">
-                      <a:solidFill>
-                        <a:srgbClr val="C9D5DB"/>
-                      </a:solidFill>
-                      <a:prstDash val="solid"/>
-                      <a:round/>
-                      <a:headEnd type="none" w="med" len="med"/>
-                      <a:tailEnd type="none" w="med" len="med"/>
-                    </a:lnL>
-                    <a:lnR w="9525" cap="flat" cmpd="sng" algn="ctr">
-                      <a:solidFill>
-                        <a:srgbClr val="C9D5DB"/>
-                      </a:solidFill>
-                      <a:prstDash val="solid"/>
-                      <a:round/>
-                      <a:headEnd type="none" w="med" len="med"/>
-                      <a:tailEnd type="none" w="med" len="med"/>
-                    </a:lnR>
-                    <a:lnT w="9525" cap="flat" cmpd="sng" algn="ctr">
-                      <a:solidFill>
-                        <a:srgbClr val="C9D5DB"/>
-                      </a:solidFill>
-                      <a:prstDash val="solid"/>
-                      <a:round/>
-                      <a:headEnd type="none" w="med" len="med"/>
-                      <a:tailEnd type="none" w="med" len="med"/>
-                    </a:lnT>
-                    <a:lnB w="9525" cap="flat" cmpd="sng" algn="ctr">
-                      <a:solidFill>
-                        <a:srgbClr val="C9D5DB"/>
-                      </a:solidFill>
-                      <a:prstDash val="solid"/>
-                      <a:round/>
-                      <a:headEnd type="none" w="med" len="med"/>
-                      <a:tailEnd type="none" w="med" len="med"/>
-                    </a:lnB>
-                    <a:solidFill>
-                      <a:srgbClr val="FFFFFF"/>
-                    </a:solidFill>
-                  </a:tcPr>
-                </a:tc>
-              </a:tr>
-              <a:tr h="457200">
-                <a:tc>
-                  <a:txBody>
-                    <a:bodyPr/>
-                    <a:lstStyle/>
-                    <a:p>
-                      <a:pPr indent="0" marL="0">
-                        <a:buNone/>
-                      </a:pPr>
-                      <a:r>
-                        <a:rPr lang="en-US" sz="1400" dirty="0">
-                          <a:solidFill>
-                            <a:srgbClr val="1B2631"/>
-                          </a:solidFill>
-                        </a:rPr>
-                        <a:t>2.1 – 2.6.3</a:t>
-                      </a:r>
-                      <a:endParaRPr lang="en-US" sz="1400" dirty="0"/>
-                    </a:p>
-                  </a:txBody>
-                  <a:tcPr marL="73152" marR="73152" marT="0" marB="0">
-                    <a:lnL w="9525" cap="flat" cmpd="sng" algn="ctr">
-                      <a:solidFill>
-                        <a:srgbClr val="C9D5DB"/>
-                      </a:solidFill>
-                      <a:prstDash val="solid"/>
-                      <a:round/>
-                      <a:headEnd type="none" w="med" len="med"/>
-                      <a:tailEnd type="none" w="med" len="med"/>
-                    </a:lnL>
-                    <a:lnR w="9525" cap="flat" cmpd="sng" algn="ctr">
-                      <a:solidFill>
-                        <a:srgbClr val="C9D5DB"/>
-                      </a:solidFill>
-                      <a:prstDash val="solid"/>
-                      <a:round/>
-                      <a:headEnd type="none" w="med" len="med"/>
-                      <a:tailEnd type="none" w="med" len="med"/>
-                    </a:lnR>
-                    <a:lnT w="9525" cap="flat" cmpd="sng" algn="ctr">
-                      <a:solidFill>
-                        <a:srgbClr val="C9D5DB"/>
-                      </a:solidFill>
-                      <a:prstDash val="solid"/>
-                      <a:round/>
-                      <a:headEnd type="none" w="med" len="med"/>
-                      <a:tailEnd type="none" w="med" len="med"/>
-                    </a:lnT>
-                    <a:lnB w="9525" cap="flat" cmpd="sng" algn="ctr">
-                      <a:solidFill>
-                        <a:srgbClr val="C9D5DB"/>
-                      </a:solidFill>
-                      <a:prstDash val="solid"/>
-                      <a:round/>
-                      <a:headEnd type="none" w="med" len="med"/>
-                      <a:tailEnd type="none" w="med" len="med"/>
-                    </a:lnB>
-                    <a:solidFill>
-                      <a:srgbClr val="FFFFFF"/>
-                    </a:solidFill>
-                  </a:tcPr>
-                </a:tc>
-                <a:tc>
-                  <a:txBody>
-                    <a:bodyPr/>
-                    <a:lstStyle/>
-                    <a:p>
-                      <a:pPr indent="0" marL="0">
-                        <a:buNone/>
-                      </a:pPr>
-                      <a:r>
-                        <a:rPr lang="en-US" sz="1400" dirty="0">
-                          <a:solidFill>
-                            <a:srgbClr val="1B2631"/>
-                          </a:solidFill>
-                        </a:rPr>
-                        <a:t>0.1.12</a:t>
-                      </a:r>
-                      <a:endParaRPr lang="en-US" sz="1400" dirty="0"/>
-                    </a:p>
-                  </a:txBody>
-                  <a:tcPr marL="73152" marR="73152" marT="0" marB="0">
-                    <a:lnL w="9525" cap="flat" cmpd="sng" algn="ctr">
-                      <a:solidFill>
-                        <a:srgbClr val="C9D5DB"/>
-                      </a:solidFill>
-                      <a:prstDash val="solid"/>
-                      <a:round/>
-                      <a:headEnd type="none" w="med" len="med"/>
-                      <a:tailEnd type="none" w="med" len="med"/>
-                    </a:lnL>
-                    <a:lnR w="9525" cap="flat" cmpd="sng" algn="ctr">
-                      <a:solidFill>
-                        <a:srgbClr val="C9D5DB"/>
-                      </a:solidFill>
-                      <a:prstDash val="solid"/>
-                      <a:round/>
-                      <a:headEnd type="none" w="med" len="med"/>
-                      <a:tailEnd type="none" w="med" len="med"/>
-                    </a:lnR>
-                    <a:lnT w="9525" cap="flat" cmpd="sng" algn="ctr">
-                      <a:solidFill>
-                        <a:srgbClr val="C9D5DB"/>
-                      </a:solidFill>
-                      <a:prstDash val="solid"/>
-                      <a:round/>
-                      <a:headEnd type="none" w="med" len="med"/>
-                      <a:tailEnd type="none" w="med" len="med"/>
-                    </a:lnT>
-                    <a:lnB w="9525" cap="flat" cmpd="sng" algn="ctr">
-                      <a:solidFill>
-                        <a:srgbClr val="C9D5DB"/>
-                      </a:solidFill>
-                      <a:prstDash val="solid"/>
-                      <a:round/>
-                      <a:headEnd type="none" w="med" len="med"/>
-                      <a:tailEnd type="none" w="med" len="med"/>
-                    </a:lnB>
-                    <a:solidFill>
-                      <a:srgbClr val="FFFFFF"/>
-                    </a:solidFill>
-                  </a:tcPr>
-                </a:tc>
-                <a:tc>
-                  <a:txBody>
-                    <a:bodyPr/>
-                    <a:lstStyle/>
-                    <a:p>
-                      <a:pPr indent="0" marL="0">
-                        <a:buNone/>
-                      </a:pPr>
-                      <a:r>
-                        <a:rPr lang="en-US" sz="1400" dirty="0">
-                          <a:solidFill>
-                            <a:srgbClr val="1B2631"/>
-                          </a:solidFill>
-                        </a:rPr>
-                        <a:t>Node ≥ 10</a:t>
-                      </a:r>
-                      <a:endParaRPr lang="en-US" sz="1400" dirty="0"/>
-                    </a:p>
-                  </a:txBody>
-                  <a:tcPr marL="73152" marR="73152" marT="0" marB="0">
-                    <a:lnL w="9525" cap="flat" cmpd="sng" algn="ctr">
-                      <a:solidFill>
-                        <a:srgbClr val="C9D5DB"/>
-                      </a:solidFill>
-                      <a:prstDash val="solid"/>
-                      <a:round/>
-                      <a:headEnd type="none" w="med" len="med"/>
-                      <a:tailEnd type="none" w="med" len="med"/>
-                    </a:lnL>
-                    <a:lnR w="9525" cap="flat" cmpd="sng" algn="ctr">
-                      <a:solidFill>
-                        <a:srgbClr val="C9D5DB"/>
-                      </a:solidFill>
-                      <a:prstDash val="solid"/>
-                      <a:round/>
-                      <a:headEnd type="none" w="med" len="med"/>
-                      <a:tailEnd type="none" w="med" len="med"/>
-                    </a:lnR>
-                    <a:lnT w="9525" cap="flat" cmpd="sng" algn="ctr">
-                      <a:solidFill>
-                        <a:srgbClr val="C9D5DB"/>
-                      </a:solidFill>
-                      <a:prstDash val="solid"/>
-                      <a:round/>
-                      <a:headEnd type="none" w="med" len="med"/>
-                      <a:tailEnd type="none" w="med" len="med"/>
-                    </a:lnT>
-                    <a:lnB w="9525" cap="flat" cmpd="sng" algn="ctr">
-                      <a:solidFill>
-                        <a:srgbClr val="C9D5DB"/>
-                      </a:solidFill>
-                      <a:prstDash val="solid"/>
-                      <a:round/>
-                      <a:headEnd type="none" w="med" len="med"/>
-                      <a:tailEnd type="none" w="med" len="med"/>
-                    </a:lnB>
-                    <a:solidFill>
-                      <a:srgbClr val="FFFFFF"/>
-                    </a:solidFill>
-                  </a:tcPr>
-                </a:tc>
-              </a:tr>
-              <a:tr h="457200">
-                <a:tc>
-                  <a:txBody>
-                    <a:bodyPr/>
-                    <a:lstStyle/>
-                    <a:p>
-                      <a:pPr indent="0" marL="0">
-                        <a:buNone/>
-                      </a:pPr>
-                      <a:r>
-                        <a:rPr lang="en-US" sz="1400" dirty="0">
-                          <a:solidFill>
-                            <a:srgbClr val="1B2631"/>
-                          </a:solidFill>
-                        </a:rPr>
-                        <a:t>3.0 – 6.1.1</a:t>
-                      </a:r>
-                      <a:endParaRPr lang="en-US" sz="1400" dirty="0"/>
-                    </a:p>
-                  </a:txBody>
-                  <a:tcPr marL="73152" marR="73152" marT="0" marB="0">
-                    <a:lnL w="9525" cap="flat" cmpd="sng" algn="ctr">
-                      <a:solidFill>
-                        <a:srgbClr val="C9D5DB"/>
-                      </a:solidFill>
-                      <a:prstDash val="solid"/>
-                      <a:round/>
-                      <a:headEnd type="none" w="med" len="med"/>
-                      <a:tailEnd type="none" w="med" len="med"/>
-                    </a:lnL>
-                    <a:lnR w="9525" cap="flat" cmpd="sng" algn="ctr">
-                      <a:solidFill>
-                        <a:srgbClr val="C9D5DB"/>
-                      </a:solidFill>
-                      <a:prstDash val="solid"/>
-                      <a:round/>
-                      <a:headEnd type="none" w="med" len="med"/>
-                      <a:tailEnd type="none" w="med" len="med"/>
-                    </a:lnR>
-                    <a:lnT w="9525" cap="flat" cmpd="sng" algn="ctr">
-                      <a:solidFill>
-                        <a:srgbClr val="C9D5DB"/>
-                      </a:solidFill>
-                      <a:prstDash val="solid"/>
-                      <a:round/>
-                      <a:headEnd type="none" w="med" len="med"/>
-                      <a:tailEnd type="none" w="med" len="med"/>
-                    </a:lnT>
-                    <a:lnB w="9525" cap="flat" cmpd="sng" algn="ctr">
-                      <a:solidFill>
-                        <a:srgbClr val="C9D5DB"/>
-                      </a:solidFill>
-                      <a:prstDash val="solid"/>
-                      <a:round/>
-                      <a:headEnd type="none" w="med" len="med"/>
-                      <a:tailEnd type="none" w="med" len="med"/>
-                    </a:lnB>
-                    <a:solidFill>
-                      <a:srgbClr val="FFFFFF"/>
-                    </a:solidFill>
-                  </a:tcPr>
-                </a:tc>
-                <a:tc>
-                  <a:txBody>
-                    <a:bodyPr/>
-                    <a:lstStyle/>
-                    <a:p>
-                      <a:pPr indent="0" marL="0">
-                        <a:buNone/>
-                      </a:pPr>
-                      <a:r>
-                        <a:rPr lang="en-US" sz="1400" dirty="0">
-                          <a:solidFill>
-                            <a:srgbClr val="1B2631"/>
-                          </a:solidFill>
-                        </a:rPr>
-                        <a:t>0.1.14</a:t>
-                      </a:r>
-                      <a:endParaRPr lang="en-US" sz="1400" dirty="0"/>
-                    </a:p>
-                  </a:txBody>
-                  <a:tcPr marL="73152" marR="73152" marT="0" marB="0">
-                    <a:lnL w="9525" cap="flat" cmpd="sng" algn="ctr">
-                      <a:solidFill>
-                        <a:srgbClr val="C9D5DB"/>
-                      </a:solidFill>
-                      <a:prstDash val="solid"/>
-                      <a:round/>
-                      <a:headEnd type="none" w="med" len="med"/>
-                      <a:tailEnd type="none" w="med" len="med"/>
-                    </a:lnL>
-                    <a:lnR w="9525" cap="flat" cmpd="sng" algn="ctr">
-                      <a:solidFill>
-                        <a:srgbClr val="C9D5DB"/>
-                      </a:solidFill>
-                      <a:prstDash val="solid"/>
-                      <a:round/>
-                      <a:headEnd type="none" w="med" len="med"/>
-                      <a:tailEnd type="none" w="med" len="med"/>
-                    </a:lnR>
-                    <a:lnT w="9525" cap="flat" cmpd="sng" algn="ctr">
-                      <a:solidFill>
-                        <a:srgbClr val="C9D5DB"/>
-                      </a:solidFill>
-                      <a:prstDash val="solid"/>
-                      <a:round/>
-                      <a:headEnd type="none" w="med" len="med"/>
-                      <a:tailEnd type="none" w="med" len="med"/>
-                    </a:lnT>
-                    <a:lnB w="9525" cap="flat" cmpd="sng" algn="ctr">
-                      <a:solidFill>
-                        <a:srgbClr val="C9D5DB"/>
-                      </a:solidFill>
-                      <a:prstDash val="solid"/>
-                      <a:round/>
-                      <a:headEnd type="none" w="med" len="med"/>
-                      <a:tailEnd type="none" w="med" len="med"/>
-                    </a:lnB>
-                    <a:solidFill>
-                      <a:srgbClr val="FFFFFF"/>
-                    </a:solidFill>
-                  </a:tcPr>
-                </a:tc>
-                <a:tc>
-                  <a:txBody>
-                    <a:bodyPr/>
-                    <a:lstStyle/>
-                    <a:p>
-                      <a:pPr indent="0" marL="0">
-                        <a:buNone/>
-                      </a:pPr>
-                      <a:r>
-                        <a:rPr lang="en-US" sz="1400" dirty="0">
-                          <a:solidFill>
-                            <a:srgbClr val="1B2631"/>
-                          </a:solidFill>
-                        </a:rPr>
-                        <a:t>Siempre</a:t>
-                      </a:r>
-                      <a:endParaRPr lang="en-US" sz="1400" dirty="0"/>
-                    </a:p>
-                  </a:txBody>
-                  <a:tcPr marL="73152" marR="73152" marT="0" marB="0">
-                    <a:lnL w="9525" cap="flat" cmpd="sng" algn="ctr">
-                      <a:solidFill>
-                        <a:srgbClr val="C9D5DB"/>
-                      </a:solidFill>
-                      <a:prstDash val="solid"/>
-                      <a:round/>
-                      <a:headEnd type="none" w="med" len="med"/>
-                      <a:tailEnd type="none" w="med" len="med"/>
-                    </a:lnL>
-                    <a:lnR w="9525" cap="flat" cmpd="sng" algn="ctr">
-                      <a:solidFill>
-                        <a:srgbClr val="C9D5DB"/>
-                      </a:solidFill>
-                      <a:prstDash val="solid"/>
-                      <a:round/>
-                      <a:headEnd type="none" w="med" len="med"/>
-                      <a:tailEnd type="none" w="med" len="med"/>
-                    </a:lnR>
-                    <a:lnT w="9525" cap="flat" cmpd="sng" algn="ctr">
-                      <a:solidFill>
-                        <a:srgbClr val="C9D5DB"/>
-                      </a:solidFill>
-                      <a:prstDash val="solid"/>
-                      <a:round/>
-                      <a:headEnd type="none" w="med" len="med"/>
-                      <a:tailEnd type="none" w="med" len="med"/>
-                    </a:lnT>
-                    <a:lnB w="9525" cap="flat" cmpd="sng" algn="ctr">
-                      <a:solidFill>
-                        <a:srgbClr val="C9D5DB"/>
-                      </a:solidFill>
-                      <a:prstDash val="solid"/>
-                      <a:round/>
-                      <a:headEnd type="none" w="med" len="med"/>
-                      <a:tailEnd type="none" w="med" len="med"/>
-                    </a:lnB>
-                    <a:solidFill>
-                      <a:srgbClr val="FFFFFF"/>
-                    </a:solidFill>
-                  </a:tcPr>
-                </a:tc>
-              </a:tr>
-            </a:tbl>
-          </a:graphicData>
-        </a:graphic>
-      </p:graphicFrame>
-      <p:sp>
-        <p:nvSpPr>
-          <p:cNvPr id="22" name="Text 15"/>
+      <p:sp>
+        <p:nvSpPr>
+          <p:cNvPr id="21" name="Text 15"/>
           <p:cNvSpPr txBox="1"/>
           <p:nvPr/>
         </p:nvSpPr>
         <p:spPr>
           <a:xfrm>
-            <a:off x="7680960" y="4343400"/>
-            <a:ext cx="3657600" cy="1280160"/>
+            <a:off x="7680960" y="2148840"/>
+            <a:ext cx="3657600" cy="731520"/>
           </a:xfrm>
           <a:prstGeom prst="rect">
             <a:avLst/>
@@ -19700,9 +19681,170 @@
                   <a:schemeClr val="tx1"/>
                 </a:solidFill>
               </a:rPr>
-              <a:t>deasync solo trae binarios hasta Node 11, y yo 4 ya exige Node ≥ 12.10.</a:t>
+              <a:t>Los comandos de Build Tools y setuptools están en la diapositiva 5.</a:t>
             </a:r>
             <a:endParaRPr lang="en-US" sz="1500" dirty="0"/>
+          </a:p>
+        </p:txBody>
+      </p:sp>
+      <p:sp>
+        <p:nvSpPr>
+          <p:cNvPr id="22" name="yreq-cmd-fondo"/>
+          <p:cNvSpPr/>
+          <p:nvPr/>
+        </p:nvSpPr>
+        <p:spPr>
+          <a:xfrm>
+            <a:off x="7680960" y="3017520"/>
+            <a:ext cx="3657600" cy="2788920"/>
+          </a:xfrm>
+          <a:prstGeom prst="roundRect">
+            <a:avLst>
+              <a:gd name="adj" fmla="val 2623"/>
+            </a:avLst>
+          </a:prstGeom>
+          <a:solidFill>
+            <a:schemeClr val="tx2"/>
+          </a:solidFill>
+          <a:ln/>
+        </p:spPr>
+      </p:sp>
+      <p:sp>
+        <p:nvSpPr>
+          <p:cNvPr id="23" name="yreq-cmd-codigo"/>
+          <p:cNvSpPr txBox="1"/>
+          <p:nvPr/>
+        </p:nvSpPr>
+        <p:spPr>
+          <a:xfrm>
+            <a:off x="7909560" y="3182112"/>
+            <a:ext cx="3200400" cy="2459736"/>
+          </a:xfrm>
+          <a:prstGeom prst="rect">
+            <a:avLst/>
+          </a:prstGeom>
+          <a:noFill/>
+          <a:ln/>
+        </p:spPr>
+        <p:txBody>
+          <a:bodyPr wrap="square" lIns="0" tIns="0" rIns="0" bIns="0" rtlCol="0" anchor="t"/>
+          <a:lstStyle/>
+          <a:p>
+            <a:pPr indent="0" marL="0">
+              <a:spcAft>
+                <a:spcPts val="200"/>
+              </a:spcAft>
+              <a:buNone/>
+            </a:pPr>
+            <a:r>
+              <a:rPr lang="en-US" sz="1400" dirty="0">
+                <a:solidFill>
+                  <a:schemeClr val="bg1"/>
+                </a:solidFill>
+                <a:latin typeface="Courier New" pitchFamily="34" charset="0"/>
+                <a:ea typeface="Courier New" pitchFamily="34" charset="-122"/>
+                <a:cs typeface="Courier New" pitchFamily="34" charset="-120"/>
+              </a:rPr>
+              <a:t>nvm install 16.20.2</a:t>
+            </a:r>
+            <a:endParaRPr lang="en-US" sz="1400" dirty="0"/>
+          </a:p>
+          <a:p>
+            <a:pPr indent="0" marL="0">
+              <a:spcAft>
+                <a:spcPts val="200"/>
+              </a:spcAft>
+              <a:buNone/>
+            </a:pPr>
+            <a:r>
+              <a:rPr lang="en-US" sz="1400" dirty="0">
+                <a:solidFill>
+                  <a:schemeClr val="bg1"/>
+                </a:solidFill>
+                <a:latin typeface="Courier New" pitchFamily="34" charset="0"/>
+                <a:ea typeface="Courier New" pitchFamily="34" charset="-122"/>
+                <a:cs typeface="Courier New" pitchFamily="34" charset="-120"/>
+              </a:rPr>
+              <a:t>nvm use 16.20.2</a:t>
+            </a:r>
+            <a:endParaRPr lang="en-US" sz="1400" dirty="0"/>
+          </a:p>
+          <a:p>
+            <a:pPr indent="0" marL="0">
+              <a:spcAft>
+                <a:spcPts val="200"/>
+              </a:spcAft>
+              <a:buNone/>
+            </a:pPr>
+            <a:r>
+              <a:rPr lang="en-US" sz="1400" dirty="0">
+                <a:solidFill>
+                  <a:schemeClr val="bg1"/>
+                </a:solidFill>
+                <a:latin typeface="Courier New" pitchFamily="34" charset="0"/>
+                <a:ea typeface="Courier New" pitchFamily="34" charset="-122"/>
+                <a:cs typeface="Courier New" pitchFamily="34" charset="-120"/>
+              </a:rPr>
+              <a:t>npm config set `</a:t>
+            </a:r>
+            <a:endParaRPr lang="en-US" sz="1400" dirty="0"/>
+          </a:p>
+          <a:p>
+            <a:pPr indent="0" marL="0">
+              <a:spcAft>
+                <a:spcPts val="200"/>
+              </a:spcAft>
+              <a:buNone/>
+            </a:pPr>
+            <a:r>
+              <a:rPr lang="en-US" sz="1400" dirty="0">
+                <a:solidFill>
+                  <a:schemeClr val="bg1"/>
+                </a:solidFill>
+                <a:latin typeface="Courier New" pitchFamily="34" charset="0"/>
+                <a:ea typeface="Courier New" pitchFamily="34" charset="-122"/>
+                <a:cs typeface="Courier New" pitchFamily="34" charset="-120"/>
+              </a:rPr>
+              <a:t>  msvs_version 2022</a:t>
+            </a:r>
+            <a:endParaRPr lang="en-US" sz="1400" dirty="0"/>
+          </a:p>
+          <a:p>
+            <a:pPr indent="0" marL="0">
+              <a:spcAft>
+                <a:spcPts val="200"/>
+              </a:spcAft>
+              <a:buNone/>
+            </a:pPr>
+            <a:r>
+              <a:rPr lang="en-US" sz="1400" dirty="0">
+                <a:solidFill>
+                  <a:schemeClr val="bg1"/>
+                </a:solidFill>
+                <a:latin typeface="Courier New" pitchFamily="34" charset="0"/>
+                <a:ea typeface="Courier New" pitchFamily="34" charset="-122"/>
+                <a:cs typeface="Courier New" pitchFamily="34" charset="-120"/>
+              </a:rPr>
+              <a:t>node -v   </a:t>
+            </a:r>
+            <a:pPr indent="0" marL="0">
+              <a:spcAft>
+                <a:spcPts val="200"/>
+              </a:spcAft>
+              <a:buNone/>
+            </a:pPr>
+            <a:r>
+              <a:rPr lang="en-US" sz="1400" dirty="0">
+                <a:solidFill>
+                  <a:schemeClr val="accent1"/>
+                </a:solidFill>
+                <a:latin typeface="Courier New" pitchFamily="34" charset="0"/>
+                <a:ea typeface="Courier New" pitchFamily="34" charset="-122"/>
+                <a:cs typeface="Courier New" pitchFamily="34" charset="-120"/>
+              </a:rPr>
+              <a:t># v16.20.2</a:t>
+            </a:r>
+            <a:endParaRPr lang="en-US" sz="1400" dirty="0"/>
           </a:p>
         </p:txBody>
       </p:sp>
@@ -19892,7 +20034,7 @@
                 <a:ea typeface="Courier New" pitchFamily="34" charset="-122"/>
                 <a:cs typeface="Courier New" pitchFamily="34" charset="-120"/>
               </a:rPr>
-              <a:t>npm config set msvs_version 2022</a:t>
+              <a:t>npm install -g yo@4.3.1 `</a:t>
             </a:r>
             <a:endParaRPr lang="en-US" sz="1400" dirty="0"/>
           </a:p>
@@ -19912,7 +20054,7 @@
                 <a:ea typeface="Courier New" pitchFamily="34" charset="-122"/>
                 <a:cs typeface="Courier New" pitchFamily="34" charset="-120"/>
               </a:rPr>
-              <a:t>npm install -g yo@4.3.1 `</a:t>
+              <a:t>  generator-alfresco-adf-app@6.1.1</a:t>
             </a:r>
             <a:endParaRPr lang="en-US" sz="1400" dirty="0"/>
           </a:p>
@@ -19932,7 +20074,7 @@
                 <a:ea typeface="Courier New" pitchFamily="34" charset="-122"/>
                 <a:cs typeface="Courier New" pitchFamily="34" charset="-120"/>
               </a:rPr>
-              <a:t>  generator-alfresco-adf-app@6.1.1</a:t>
+              <a:t> </a:t>
             </a:r>
             <a:endParaRPr lang="en-US" sz="1400" dirty="0"/>
           </a:p>
@@ -19952,7 +20094,7 @@
                 <a:ea typeface="Courier New" pitchFamily="34" charset="-122"/>
                 <a:cs typeface="Courier New" pitchFamily="34" charset="-120"/>
               </a:rPr>
-              <a:t> </a:t>
+              <a:t>yo alfresco-adf-app</a:t>
             </a:r>
             <a:endParaRPr lang="en-US" sz="1400" dirty="0"/>
           </a:p>
@@ -19966,13 +20108,13 @@
             <a:r>
               <a:rPr lang="en-US" sz="1400" dirty="0">
                 <a:solidFill>
-                  <a:schemeClr val="bg1"/>
+                  <a:schemeClr val="accent1"/>
                 </a:solidFill>
                 <a:latin typeface="Courier New" pitchFamily="34" charset="0"/>
                 <a:ea typeface="Courier New" pitchFamily="34" charset="-122"/>
                 <a:cs typeface="Courier New" pitchFamily="34" charset="-120"/>
               </a:rPr>
-              <a:t>yo alfresco-adf-app</a:t>
+              <a:t>#  nombre: mi-app · blueprint: ACS</a:t>
             </a:r>
             <a:endParaRPr lang="en-US" sz="1400" dirty="0"/>
           </a:p>
@@ -19992,7 +20134,7 @@
                 <a:ea typeface="Courier New" pitchFamily="34" charset="-122"/>
                 <a:cs typeface="Courier New" pitchFamily="34" charset="-120"/>
               </a:rPr>
-              <a:t>#  nombre: mi-app · blueprint: ACS</a:t>
+              <a:t>#  instalar ahora: No · licencia: MIT</a:t>
             </a:r>
             <a:endParaRPr lang="en-US" sz="1400" dirty="0"/>
           </a:p>
@@ -20006,13 +20148,13 @@
             <a:r>
               <a:rPr lang="en-US" sz="1400" dirty="0">
                 <a:solidFill>
-                  <a:schemeClr val="accent1"/>
+                  <a:schemeClr val="bg1"/>
                 </a:solidFill>
                 <a:latin typeface="Courier New" pitchFamily="34" charset="0"/>
                 <a:ea typeface="Courier New" pitchFamily="34" charset="-122"/>
                 <a:cs typeface="Courier New" pitchFamily="34" charset="-120"/>
               </a:rPr>
-              <a:t>#  instalar ahora: No · licencia: MIT</a:t>
+              <a:t> </a:t>
             </a:r>
             <a:endParaRPr lang="en-US" sz="1400" dirty="0"/>
           </a:p>
@@ -20032,7 +20174,7 @@
                 <a:ea typeface="Courier New" pitchFamily="34" charset="-122"/>
                 <a:cs typeface="Courier New" pitchFamily="34" charset="-120"/>
               </a:rPr>
-              <a:t> </a:t>
+              <a:t>cd mi-app</a:t>
             </a:r>
             <a:endParaRPr lang="en-US" sz="1400" dirty="0"/>
           </a:p>
@@ -20052,11 +20194,8 @@
                 <a:ea typeface="Courier New" pitchFamily="34" charset="-122"/>
                 <a:cs typeface="Courier New" pitchFamily="34" charset="-120"/>
               </a:rPr>
-              <a:t>cd mi-app</a:t>
-            </a:r>
-            <a:endParaRPr lang="en-US" sz="1400" dirty="0"/>
-          </a:p>
-          <a:p>
+              <a:t>npm install       </a:t>
+            </a:r>
             <a:pPr indent="0" marL="0">
               <a:spcAft>
                 <a:spcPts val="200"/>
@@ -20066,14 +20205,17 @@
             <a:r>
               <a:rPr lang="en-US" sz="1400" dirty="0">
                 <a:solidFill>
-                  <a:schemeClr val="bg1"/>
+                  <a:schemeClr val="accent1"/>
                 </a:solidFill>
                 <a:latin typeface="Courier New" pitchFamily="34" charset="0"/>
                 <a:ea typeface="Courier New" pitchFamily="34" charset="-122"/>
                 <a:cs typeface="Courier New" pitchFamily="34" charset="-120"/>
               </a:rPr>
-              <a:t>npm install       </a:t>
-            </a:r>
+              <a:t># 2–3 min</a:t>
+            </a:r>
+            <a:endParaRPr lang="en-US" sz="1400" dirty="0"/>
+          </a:p>
+          <a:p>
             <a:pPr indent="0" marL="0">
               <a:spcAft>
                 <a:spcPts val="200"/>
@@ -20083,17 +20225,14 @@
             <a:r>
               <a:rPr lang="en-US" sz="1400" dirty="0">
                 <a:solidFill>
-                  <a:schemeClr val="accent1"/>
+                  <a:schemeClr val="bg1"/>
                 </a:solidFill>
                 <a:latin typeface="Courier New" pitchFamily="34" charset="0"/>
                 <a:ea typeface="Courier New" pitchFamily="34" charset="-122"/>
                 <a:cs typeface="Courier New" pitchFamily="34" charset="-120"/>
               </a:rPr>
-              <a:t># 2–3 min</a:t>
-            </a:r>
-            <a:endParaRPr lang="en-US" sz="1400" dirty="0"/>
-          </a:p>
-          <a:p>
+              <a:t>npm start         </a:t>
+            </a:r>
             <a:pPr indent="0" marL="0">
               <a:spcAft>
                 <a:spcPts val="200"/>
@@ -20103,30 +20242,13 @@
             <a:r>
               <a:rPr lang="en-US" sz="1400" dirty="0">
                 <a:solidFill>
-                  <a:schemeClr val="bg1"/>
+                  <a:schemeClr val="accent1"/>
                 </a:solidFill>
                 <a:latin typeface="Courier New" pitchFamily="34" charset="0"/>
                 <a:ea typeface="Courier New" pitchFamily="34" charset="-122"/>
                 <a:cs typeface="Courier New" pitchFamily="34" charset="-120"/>
               </a:rPr>
-              <a:t>npm start         </a:t>
-            </a:r>
-            <a:pPr indent="0" marL="0">
-              <a:spcAft>
-                <a:spcPts val="200"/>
-              </a:spcAft>
-              <a:buNone/>
-            </a:pPr>
-            <a:r>
-              <a:rPr lang="en-US" sz="1400" dirty="0">
-                <a:solidFill>
-                  <a:schemeClr val="accent1"/>
-                </a:solidFill>
-                <a:latin typeface="Courier New" pitchFamily="34" charset="0"/>
-                <a:ea typeface="Courier New" pitchFamily="34" charset="-122"/>
-                <a:cs typeface="Courier New" pitchFamily="34" charset="-120"/>
-              </a:rPr>
-              <a:t># ng serve app → :4200</a:t>
+              <a:t># http://localhost:4200</a:t>
             </a:r>
             <a:endParaRPr lang="en-US" sz="1400" dirty="0"/>
           </a:p>
@@ -20264,18 +20386,18 @@
       </p:sp>
       <p:sp>
         <p:nvSpPr>
-          <p:cNvPr id="7" name="ypasos-ojo"/>
+          <p:cNvPr id="7" name="ypasos-nombre"/>
           <p:cNvSpPr/>
           <p:nvPr/>
         </p:nvSpPr>
         <p:spPr>
           <a:xfrm>
-            <a:off x="7863840" y="4114800"/>
-            <a:ext cx="3749040" cy="1965960"/>
+            <a:off x="7863840" y="4023360"/>
+            <a:ext cx="3749040" cy="2057400"/>
           </a:xfrm>
           <a:prstGeom prst="roundRect">
             <a:avLst>
-              <a:gd name="adj" fmla="val 4651"/>
+              <a:gd name="adj" fmla="val 4444"/>
             </a:avLst>
           </a:prstGeom>
           <a:solidFill>
@@ -20292,7 +20414,7 @@
         </p:nvSpPr>
         <p:spPr>
           <a:xfrm>
-            <a:off x="8092440" y="4251960"/>
+            <a:off x="8092440" y="4160520"/>
             <a:ext cx="3291840" cy="365760"/>
           </a:xfrm>
           <a:prstGeom prst="rect">
@@ -20311,10 +20433,10 @@
             <a:r>
               <a:rPr lang="en-US" sz="1600" b="1" dirty="0">
                 <a:solidFill>
-                  <a:schemeClr val="accent5"/>
-                </a:solidFill>
-              </a:rPr>
-              <a:t>Ojo</a:t>
+                  <a:schemeClr val="tx2"/>
+                </a:solidFill>
+              </a:rPr>
+              <a:t>Renombrar el proyecto</a:t>
             </a:r>
             <a:endParaRPr lang="en-US" sz="1600" dirty="0"/>
           </a:p>
@@ -20328,8 +20450,8 @@
         </p:nvSpPr>
         <p:spPr>
           <a:xfrm>
-            <a:off x="8092440" y="4617720"/>
-            <a:ext cx="3291840" cy="1371600"/>
+            <a:off x="8092440" y="4526280"/>
+            <a:ext cx="3291840" cy="640080"/>
           </a:xfrm>
           <a:prstGeom prst="rect">
             <a:avLst/>
@@ -20350,7 +20472,46 @@
                   <a:schemeClr val="tx1"/>
                 </a:solidFill>
               </a:rPr>
-              <a:t>El package.json conserva el nombre adf-cli-acs-template y el LICENSE se crea en la carpeta padre.</a:t>
+              <a:t>El package.json sale con name: adf-cli-acs-template. Cambiarlo:</a:t>
+            </a:r>
+            <a:endParaRPr lang="en-US" sz="1400" dirty="0"/>
+          </a:p>
+        </p:txBody>
+      </p:sp>
+      <p:sp>
+        <p:nvSpPr>
+          <p:cNvPr id="10" name="Text 8"/>
+          <p:cNvSpPr txBox="1"/>
+          <p:nvPr/>
+        </p:nvSpPr>
+        <p:spPr>
+          <a:xfrm>
+            <a:off x="8092440" y="5257800"/>
+            <a:ext cx="3291840" cy="365760"/>
+          </a:xfrm>
+          <a:prstGeom prst="rect">
+            <a:avLst/>
+          </a:prstGeom>
+          <a:noFill/>
+          <a:ln/>
+        </p:spPr>
+        <p:txBody>
+          <a:bodyPr wrap="square" lIns="0" tIns="0" rIns="0" bIns="0" rtlCol="0" anchor="ctr"/>
+          <a:lstStyle/>
+          <a:p>
+            <a:pPr indent="0" marL="0">
+              <a:buNone/>
+            </a:pPr>
+            <a:r>
+              <a:rPr lang="en-US" sz="1400" dirty="0">
+                <a:solidFill>
+                  <a:schemeClr val="accent4"/>
+                </a:solidFill>
+                <a:latin typeface="Courier New" pitchFamily="34" charset="0"/>
+                <a:ea typeface="Courier New" pitchFamily="34" charset="-122"/>
+                <a:cs typeface="Courier New" pitchFamily="34" charset="-120"/>
+              </a:rPr>
+              <a:t>npm pkg set name=mi-app</a:t>
             </a:r>
             <a:endParaRPr lang="en-US" sz="1400" dirty="0"/>
           </a:p>
@@ -20458,7 +20619,7 @@
                   <a:schemeClr val="tx2"/>
                 </a:solidFill>
               </a:rPr>
-              <a:t>Atajo para el aula: copiar la plantilla sin yo</a:t>
+              <a:t>Atajo para el aula y errores frecuentes</a:t>
             </a:r>
             <a:endParaRPr lang="en-US" sz="3400" dirty="0"/>
           </a:p>
@@ -20472,8 +20633,8 @@
         </p:nvSpPr>
         <p:spPr>
           <a:xfrm>
-            <a:off x="548640" y="1371600"/>
-            <a:ext cx="11064240" cy="457200"/>
+            <a:off x="548640" y="1325880"/>
+            <a:ext cx="11064240" cy="411480"/>
           </a:xfrm>
           <a:prstGeom prst="rect">
             <a:avLst/>
@@ -20494,7 +20655,7 @@
                   <a:schemeClr val="tx1"/>
                 </a:solidFill>
               </a:rPr>
-              <a:t>El generador solo copia una carpeta. Se puede extraer del paquete npm y evitar Visual Studio:</a:t>
+              <a:t>Sin Visual Studio ni yo: el generador solo copia una carpeta, se extrae del paquete npm.</a:t>
             </a:r>
             <a:endParaRPr lang="en-US" sz="1600" dirty="0"/>
           </a:p>
@@ -20508,12 +20669,12 @@
         </p:nvSpPr>
         <p:spPr>
           <a:xfrm>
-            <a:off x="548640" y="1965960"/>
-            <a:ext cx="6035040" cy="3017520"/>
+            <a:off x="548640" y="1828800"/>
+            <a:ext cx="5029200" cy="4251960"/>
           </a:xfrm>
           <a:prstGeom prst="roundRect">
             <a:avLst>
-              <a:gd name="adj" fmla="val 2424"/>
+              <a:gd name="adj" fmla="val 1720"/>
             </a:avLst>
           </a:prstGeom>
           <a:solidFill>
@@ -20530,8 +20691,8 @@
         </p:nvSpPr>
         <p:spPr>
           <a:xfrm>
-            <a:off x="777240" y="2130552"/>
-            <a:ext cx="5577840" cy="2688336"/>
+            <a:off x="777240" y="1993392"/>
+            <a:ext cx="4572000" cy="3922776"/>
           </a:xfrm>
           <a:prstGeom prst="rect">
             <a:avLst/>
@@ -20550,7 +20711,7 @@
               <a:buNone/>
             </a:pPr>
             <a:r>
-              <a:rPr lang="en-US" sz="1400" dirty="0">
+              <a:rPr lang="en-US" sz="1300" dirty="0">
                 <a:solidFill>
                   <a:schemeClr val="bg1"/>
                 </a:solidFill>
@@ -20560,7 +20721,7 @@
               </a:rPr>
               <a:t>nvm use 16.20.2</a:t>
             </a:r>
-            <a:endParaRPr lang="en-US" sz="1400" dirty="0"/>
+            <a:endParaRPr lang="en-US" sz="1300" dirty="0"/>
           </a:p>
           <a:p>
             <a:pPr indent="0" marL="0">
@@ -20570,7 +20731,7 @@
               <a:buNone/>
             </a:pPr>
             <a:r>
-              <a:rPr lang="en-US" sz="1400" dirty="0">
+              <a:rPr lang="en-US" sz="1300" dirty="0">
                 <a:solidFill>
                   <a:schemeClr val="bg1"/>
                 </a:solidFill>
@@ -20580,7 +20741,7 @@
               </a:rPr>
               <a:t>npm pack generator-alfresco-adf-app@6.1.1</a:t>
             </a:r>
-            <a:endParaRPr lang="en-US" sz="1400" dirty="0"/>
+            <a:endParaRPr lang="en-US" sz="1300" dirty="0"/>
           </a:p>
           <a:p>
             <a:pPr indent="0" marL="0">
@@ -20590,7 +20751,7 @@
               <a:buNone/>
             </a:pPr>
             <a:r>
-              <a:rPr lang="en-US" sz="1400" dirty="0">
+              <a:rPr lang="en-US" sz="1300" dirty="0">
                 <a:solidFill>
                   <a:schemeClr val="bg1"/>
                 </a:solidFill>
@@ -20600,7 +20761,7 @@
               </a:rPr>
               <a:t>tar xzf generator-alfresco-adf-app-6.1.1.tgz</a:t>
             </a:r>
-            <a:endParaRPr lang="en-US" sz="1400" dirty="0"/>
+            <a:endParaRPr lang="en-US" sz="1300" dirty="0"/>
           </a:p>
           <a:p>
             <a:pPr indent="0" marL="0">
@@ -20610,7 +20771,7 @@
               <a:buNone/>
             </a:pPr>
             <a:r>
-              <a:rPr lang="en-US" sz="1400" dirty="0">
+              <a:rPr lang="en-US" sz="1300" dirty="0">
                 <a:solidFill>
                   <a:schemeClr val="bg1"/>
                 </a:solidFill>
@@ -20620,7 +20781,7 @@
               </a:rPr>
               <a:t>Copy-Item -Recurse `</a:t>
             </a:r>
-            <a:endParaRPr lang="en-US" sz="1400" dirty="0"/>
+            <a:endParaRPr lang="en-US" sz="1300" dirty="0"/>
           </a:p>
           <a:p>
             <a:pPr indent="0" marL="0">
@@ -20630,7 +20791,7 @@
               <a:buNone/>
             </a:pPr>
             <a:r>
-              <a:rPr lang="en-US" sz="1400" dirty="0">
+              <a:rPr lang="en-US" sz="1300" dirty="0">
                 <a:solidFill>
                   <a:schemeClr val="bg1"/>
                 </a:solidFill>
@@ -20640,7 +20801,7 @@
               </a:rPr>
               <a:t>  package\app\templates\adf-cli-acs-template `</a:t>
             </a:r>
-            <a:endParaRPr lang="en-US" sz="1400" dirty="0"/>
+            <a:endParaRPr lang="en-US" sz="1300" dirty="0"/>
           </a:p>
           <a:p>
             <a:pPr indent="0" marL="0">
@@ -20650,7 +20811,7 @@
               <a:buNone/>
             </a:pPr>
             <a:r>
-              <a:rPr lang="en-US" sz="1400" dirty="0">
+              <a:rPr lang="en-US" sz="1300" dirty="0">
                 <a:solidFill>
                   <a:schemeClr val="bg1"/>
                 </a:solidFill>
@@ -20658,9 +20819,9 @@
                 <a:ea typeface="Courier New" pitchFamily="34" charset="-122"/>
                 <a:cs typeface="Courier New" pitchFamily="34" charset="-120"/>
               </a:rPr>
-              <a:t>  ..\mi-app</a:t>
-            </a:r>
-            <a:endParaRPr lang="en-US" sz="1400" dirty="0"/>
+              <a:t>  mi-app</a:t>
+            </a:r>
+            <a:endParaRPr lang="en-US" sz="1300" dirty="0"/>
           </a:p>
           <a:p>
             <a:pPr indent="0" marL="0">
@@ -20670,7 +20831,7 @@
               <a:buNone/>
             </a:pPr>
             <a:r>
-              <a:rPr lang="en-US" sz="1400" dirty="0">
+              <a:rPr lang="en-US" sz="1300" dirty="0">
                 <a:solidFill>
                   <a:schemeClr val="bg1"/>
                 </a:solidFill>
@@ -20678,15 +20839,15 @@
                 <a:ea typeface="Courier New" pitchFamily="34" charset="-122"/>
                 <a:cs typeface="Courier New" pitchFamily="34" charset="-120"/>
               </a:rPr>
-              <a:t>cd ..\mi-app ; npm install ; npm start</a:t>
-            </a:r>
-            <a:endParaRPr lang="en-US" sz="1400" dirty="0"/>
+              <a:t>cd mi-app ; npm install ; npm start</a:t>
+            </a:r>
+            <a:endParaRPr lang="en-US" sz="1300" dirty="0"/>
           </a:p>
         </p:txBody>
       </p:sp>
       <p:graphicFrame>
         <p:nvGraphicFramePr>
-          <p:cNvPr id="10" name="yatajo-tabla"/>
+          <p:cNvPr id="10" name="yerr-tabla"/>
           <p:cNvGraphicFramePr>
             <a:graphicFrameLocks noGrp="1"/>
           </p:cNvGraphicFramePr>
@@ -20699,18 +20860,18 @@
           </p:nvPr>
         </p:nvGraphicFramePr>
         <p:xfrm>
-          <a:off x="6903720" y="1965960"/>
-          <a:ext cx="4709160" cy="914400"/>
+          <a:off x="5760720" y="1828800"/>
+          <a:ext cx="5852160" cy="914400"/>
         </p:xfrm>
         <a:graphic>
           <a:graphicData uri="http://schemas.openxmlformats.org/drawingml/2006/table">
             <a:tbl>
               <a:tblPr/>
               <a:tblGrid>
-                <a:gridCol w="2240280"/>
-                <a:gridCol w="2468880"/>
+                <a:gridCol w="1828800"/>
+                <a:gridCol w="4023360"/>
               </a:tblGrid>
-              <a:tr h="603504">
+              <a:tr h="457200">
                 <a:tc>
                   <a:txBody>
                     <a:bodyPr/>
@@ -20730,7 +20891,7 @@
                       <a:endParaRPr lang="en-US" sz="1400" dirty="0"/>
                     </a:p>
                   </a:txBody>
-                  <a:tcPr marL="73152" marR="73152" marT="0" marB="0" anchor="ctr">
+                  <a:tcPr marL="91440" marR="91440" marT="0" marB="0" anchor="ctr">
                     <a:lnL w="9525" cap="flat" cmpd="sng" algn="ctr">
                       <a:solidFill>
                         <a:srgbClr val="D5DEE3"/>
@@ -20791,7 +20952,7 @@
                       <a:endParaRPr lang="en-US" sz="1400" dirty="0"/>
                     </a:p>
                   </a:txBody>
-                  <a:tcPr marL="73152" marR="73152" marT="0" marB="0" anchor="ctr">
+                  <a:tcPr marL="91440" marR="91440" marT="0" marB="0" anchor="ctr">
                     <a:lnL w="9525" cap="flat" cmpd="sng" algn="ctr">
                       <a:solidFill>
                         <a:srgbClr val="D5DEE3"/>
@@ -20834,7 +20995,7 @@
                   </a:tcPr>
                 </a:tc>
               </a:tr>
-              <a:tr h="603504">
+              <a:tr h="914400">
                 <a:tc>
                   <a:txBody>
                     <a:bodyPr/>
@@ -20854,7 +21015,7 @@
                       <a:endParaRPr lang="en-US" sz="1400" dirty="0"/>
                     </a:p>
                   </a:txBody>
-                  <a:tcPr marL="73152" marR="73152" marT="0" marB="0" anchor="ctr">
+                  <a:tcPr marL="91440" marR="91440" marT="0" marB="0" anchor="ctr">
                     <a:lnL w="9525" cap="flat" cmpd="sng" algn="ctr">
                       <a:solidFill>
                         <a:srgbClr val="D5DEE3"/>
@@ -20902,17 +21063,31 @@
                         <a:buNone/>
                       </a:pPr>
                       <a:r>
-                        <a:rPr lang="en-US" sz="1400" dirty="0">
+                        <a:rPr lang="en-US" sz="1300" dirty="0">
                           <a:solidFill>
                             <a:srgbClr val="1B2631"/>
                           </a:solidFill>
                         </a:rPr>
-                        <a:t>Build Tools 2022 + msvs_version 2022</a:t>
+                        <a:t>Build Tools 2022 (diapositiva 5) y</a:t>
                       </a:r>
-                      <a:endParaRPr lang="en-US" sz="1400" dirty="0"/>
+                      <a:endParaRPr lang="en-US" sz="1300" dirty="0"/>
+                    </a:p>
+                    <a:p>
+                      <a:pPr indent="0" marL="0">
+                        <a:buNone/>
+                      </a:pPr>
+                      <a:r>
+                        <a:rPr lang="en-US" sz="1300" dirty="0">
+                          <a:solidFill>
+                            <a:srgbClr val="1B2631"/>
+                          </a:solidFill>
+                        </a:rPr>
+                        <a:t>npm config set msvs_version 2022</a:t>
+                      </a:r>
+                      <a:endParaRPr lang="en-US" sz="1300" dirty="0"/>
                     </a:p>
                   </a:txBody>
-                  <a:tcPr marL="73152" marR="73152" marT="0" marB="0" anchor="ctr">
+                  <a:tcPr marL="91440" marR="91440" marT="0" marB="0" anchor="ctr">
                     <a:lnL w="9525" cap="flat" cmpd="sng" algn="ctr">
                       <a:solidFill>
                         <a:srgbClr val="D5DEE3"/>
@@ -20952,7 +21127,7 @@
                   </a:tcPr>
                 </a:tc>
               </a:tr>
-              <a:tr h="603504">
+              <a:tr h="685800">
                 <a:tc>
                   <a:txBody>
                     <a:bodyPr/>
@@ -20972,7 +21147,7 @@
                       <a:endParaRPr lang="en-US" sz="1400" dirty="0"/>
                     </a:p>
                   </a:txBody>
-                  <a:tcPr marL="73152" marR="73152" marT="0" marB="0" anchor="ctr">
+                  <a:tcPr marL="91440" marR="91440" marT="0" marB="0" anchor="ctr">
                     <a:lnL w="9525" cap="flat" cmpd="sng" algn="ctr">
                       <a:solidFill>
                         <a:srgbClr val="D5DEE3"/>
@@ -21020,17 +21195,24 @@
                         <a:buNone/>
                       </a:pPr>
                       <a:r>
-                        <a:rPr lang="en-US" sz="1400" dirty="0">
+                        <a:rPr lang="en-US" sz="1300" dirty="0">
                           <a:solidFill>
                             <a:srgbClr val="1B2631"/>
                           </a:solidFill>
+                          <a:latin typeface="Courier New" pitchFamily="34" charset="0"/>
+                          <a:ea typeface="Courier New" pitchFamily="34" charset="-122"/>
+                          <a:cs typeface="Courier New" pitchFamily="34" charset="-120"/>
                         </a:rPr>
-                        <a:t>pip install setuptools</a:t>
+                        <a:t>python -m pip install setuptools</a:t>
                       </a:r>
-                      <a:endParaRPr lang="en-US" sz="1400" dirty="0"/>
+                      <a:endParaRPr lang="en-US" sz="1300" dirty="0">
+                        <a:latin typeface="Courier New" charset="0"/>
+                        <a:ea typeface="Courier New" charset="0"/>
+                        <a:cs typeface="Courier New" charset="0"/>
+                      </a:endParaRPr>
                     </a:p>
                   </a:txBody>
-                  <a:tcPr marL="73152" marR="73152" marT="0" marB="0" anchor="ctr">
+                  <a:tcPr marL="91440" marR="91440" marT="0" marB="0" anchor="ctr">
                     <a:lnL w="9525" cap="flat" cmpd="sng" algn="ctr">
                       <a:solidFill>
                         <a:srgbClr val="D5DEE3"/>
@@ -21070,7 +21252,7 @@
                   </a:tcPr>
                 </a:tc>
               </a:tr>
-              <a:tr h="603504">
+              <a:tr h="914400">
                 <a:tc>
                   <a:txBody>
                     <a:bodyPr/>
@@ -21090,7 +21272,7 @@
                       <a:endParaRPr lang="en-US" sz="1400" dirty="0"/>
                     </a:p>
                   </a:txBody>
-                  <a:tcPr marL="73152" marR="73152" marT="0" marB="0" anchor="ctr">
+                  <a:tcPr marL="91440" marR="91440" marT="0" marB="0" anchor="ctr">
                     <a:lnL w="9525" cap="flat" cmpd="sng" algn="ctr">
                       <a:solidFill>
                         <a:srgbClr val="D5DEE3"/>
@@ -21138,17 +21320,45 @@
                         <a:buNone/>
                       </a:pPr>
                       <a:r>
-                        <a:rPr lang="en-US" sz="1400" dirty="0">
+                        <a:rPr lang="en-US" sz="1300" dirty="0">
                           <a:solidFill>
                             <a:srgbClr val="1B2631"/>
                           </a:solidFill>
+                          <a:latin typeface="Courier New" pitchFamily="34" charset="0"/>
+                          <a:ea typeface="Courier New" pitchFamily="34" charset="-122"/>
+                          <a:cs typeface="Courier New" pitchFamily="34" charset="-120"/>
                         </a:rPr>
-                        <a:t>Corregir lo anterior y reinstalar</a:t>
+                        <a:t>npm install -g yo@4.3.1 `</a:t>
                       </a:r>
-                      <a:endParaRPr lang="en-US" sz="1400" dirty="0"/>
+                      <a:endParaRPr lang="en-US" sz="1300" dirty="0">
+                        <a:latin typeface="Courier New" charset="0"/>
+                        <a:ea typeface="Courier New" charset="0"/>
+                        <a:cs typeface="Courier New" charset="0"/>
+                      </a:endParaRPr>
+                    </a:p>
+                    <a:p>
+                      <a:pPr indent="0" marL="0">
+                        <a:buNone/>
+                      </a:pPr>
+                      <a:r>
+                        <a:rPr lang="en-US" sz="1300" dirty="0">
+                          <a:solidFill>
+                            <a:srgbClr val="1B2631"/>
+                          </a:solidFill>
+                          <a:latin typeface="Courier New" pitchFamily="34" charset="0"/>
+                          <a:ea typeface="Courier New" pitchFamily="34" charset="-122"/>
+                          <a:cs typeface="Courier New" pitchFamily="34" charset="-120"/>
+                        </a:rPr>
+                        <a:t>  generator-alfresco-adf-app@6.1.1</a:t>
+                      </a:r>
+                      <a:endParaRPr lang="en-US" sz="1300" dirty="0">
+                        <a:latin typeface="Courier New" charset="0"/>
+                        <a:ea typeface="Courier New" charset="0"/>
+                        <a:cs typeface="Courier New" charset="0"/>
+                      </a:endParaRPr>
                     </a:p>
                   </a:txBody>
-                  <a:tcPr marL="73152" marR="73152" marT="0" marB="0" anchor="ctr">
+                  <a:tcPr marL="91440" marR="91440" marT="0" marB="0" anchor="ctr">
                     <a:lnL w="9525" cap="flat" cmpd="sng" algn="ctr">
                       <a:solidFill>
                         <a:srgbClr val="D5DEE3"/>
@@ -21188,7 +21398,7 @@
                   </a:tcPr>
                 </a:tc>
               </a:tr>
-              <a:tr h="603504">
+              <a:tr h="594360">
                 <a:tc>
                   <a:txBody>
                     <a:bodyPr/>
@@ -21208,7 +21418,7 @@
                       <a:endParaRPr lang="en-US" sz="1400" dirty="0"/>
                     </a:p>
                   </a:txBody>
-                  <a:tcPr marL="73152" marR="73152" marT="0" marB="0" anchor="ctr">
+                  <a:tcPr marL="91440" marR="91440" marT="0" marB="0" anchor="ctr">
                     <a:lnL w="9525" cap="flat" cmpd="sng" algn="ctr">
                       <a:solidFill>
                         <a:srgbClr val="D5DEE3"/>
@@ -21256,17 +21466,24 @@
                         <a:buNone/>
                       </a:pPr>
                       <a:r>
-                        <a:rPr lang="en-US" sz="1400" dirty="0">
+                        <a:rPr lang="en-US" sz="1300" dirty="0">
                           <a:solidFill>
                             <a:srgbClr val="1B2631"/>
                           </a:solidFill>
+                          <a:latin typeface="Courier New" pitchFamily="34" charset="0"/>
+                          <a:ea typeface="Courier New" pitchFamily="34" charset="-122"/>
+                          <a:cs typeface="Courier New" pitchFamily="34" charset="-120"/>
                         </a:rPr>
                         <a:t>nvm use 16.20.2</a:t>
                       </a:r>
-                      <a:endParaRPr lang="en-US" sz="1400" dirty="0"/>
+                      <a:endParaRPr lang="en-US" sz="1300" dirty="0">
+                        <a:latin typeface="Courier New" charset="0"/>
+                        <a:ea typeface="Courier New" charset="0"/>
+                        <a:cs typeface="Courier New" charset="0"/>
+                      </a:endParaRPr>
                     </a:p>
                   </a:txBody>
-                  <a:tcPr marL="73152" marR="73152" marT="0" marB="0" anchor="ctr">
+                  <a:tcPr marL="91440" marR="91440" marT="0" marB="0" anchor="ctr">
                     <a:lnL w="9525" cap="flat" cmpd="sng" algn="ctr">
                       <a:solidFill>
                         <a:srgbClr val="D5DEE3"/>
@@ -21310,42 +21527,6 @@
           </a:graphicData>
         </a:graphic>
       </p:graphicFrame>
-      <p:sp>
-        <p:nvSpPr>
-          <p:cNvPr id="7" name="Text 4"/>
-          <p:cNvSpPr txBox="1"/>
-          <p:nvPr/>
-        </p:nvSpPr>
-        <p:spPr>
-          <a:xfrm>
-            <a:off x="548640" y="5257800"/>
-            <a:ext cx="11064240" cy="457200"/>
-          </a:xfrm>
-          <a:prstGeom prst="rect">
-            <a:avLst/>
-          </a:prstGeom>
-          <a:noFill/>
-          <a:ln/>
-        </p:spPr>
-        <p:txBody>
-          <a:bodyPr wrap="square" lIns="0" tIns="0" rIns="0" bIns="0" rtlCol="0" anchor="ctr"/>
-          <a:lstStyle/>
-          <a:p>
-            <a:pPr indent="0" marL="0">
-              <a:buNone/>
-            </a:pPr>
-            <a:r>
-              <a:rPr lang="en-US" sz="1500" i="1" dirty="0">
-                <a:solidFill>
-                  <a:schemeClr val="accent6"/>
-                </a:solidFill>
-              </a:rPr>
-              <a:t>Comprobado: npm install y ng build terminan bien con Node 16.20.2.</a:t>
-            </a:r>
-            <a:endParaRPr lang="en-US" sz="1500" dirty="0"/>
-          </a:p>
-        </p:txBody>
-      </p:sp>
       <p:sp>
         <p:nvSpPr>
           <p:cNvPr id="25" name="Slide Number Placeholder 0"/>
